--- a/powerpoints/hoorcollege/03_Exploring_Manipulating_Data_aangevuld.pptx
+++ b/powerpoints/hoorcollege/03_Exploring_Manipulating_Data_aangevuld.pptx
@@ -34,6 +34,7 @@
     <p:sldId id="902" r:id="rId35"/>
     <p:sldId id="903" r:id="rId36"/>
     <p:sldId id="904" r:id="rId37"/>
+    <p:sldId id="905" r:id="rId38"/>
   </p:sldIdLst>
   <p:sldSz cx="12192000" cy="6858000"/>
   <p:notesSz cx="6858000" cy="9144000"/>
@@ -12442,7 +12443,7 @@
               </a:defRPr>
             </a:pPr>
             <a:r>
-              <a:t>S7 S8 (allebei schoppen) → 36,6%     op de river met de flush → 94,1%</a:t>
+              <a:t>S7 S8, allebei schoppen: 36,6% op de flop — en 94,1% op de river, met de flush</a:t>
             </a:r>
           </a:p>
           <a:p>
@@ -12455,7 +12456,7 @@
               </a:defRPr>
             </a:pPr>
             <a:r>
-              <a:t>H7 C8 (gemengd)              →  8,0%     op de river                   →  0,0%</a:t>
+              <a:t>H7 C8, gemengde kleuren: 8,0% op de flop — en 0,0% op de river</a:t>
             </a:r>
           </a:p>
           <a:p>
@@ -12770,6 +12771,242 @@
             </a:pPr>
             <a:r>
               <a:t>24</a:t>
+            </a:r>
+          </a:p>
+        </p:txBody>
+      </p:sp>
+    </p:spTree>
+  </p:cSld>
+  <p:clrMapOvr>
+    <a:masterClrMapping/>
+  </p:clrMapOvr>
+</p:sld>
+</file>
+
+<file path=ppt/slides/slide25.xml><?xml version="1.0" encoding="utf-8"?>
+<p:sld xmlns:a="http://schemas.openxmlformats.org/drawingml/2006/main" xmlns:p="http://schemas.openxmlformats.org/presentationml/2006/main" xmlns:r="http://schemas.openxmlformats.org/officeDocument/2006/relationships">
+  <p:cSld>
+    <p:spTree>
+      <p:nvGrpSpPr>
+        <p:cNvPr id="1" name=""/>
+        <p:cNvGrpSpPr/>
+        <p:nvPr/>
+      </p:nvGrpSpPr>
+      <p:grpSpPr/>
+      <p:sp>
+        <p:nvSpPr>
+          <p:cNvPr id="2" name="TextBox 1"/>
+          <p:cNvSpPr txBox="1"/>
+          <p:nvPr/>
+        </p:nvSpPr>
+        <p:spPr>
+          <a:xfrm>
+            <a:off x="1984248" y="941832"/>
+            <a:ext cx="8229600" cy="1143000"/>
+          </a:xfrm>
+          <a:prstGeom prst="rect">
+            <a:avLst/>
+          </a:prstGeom>
+          <a:noFill/>
+        </p:spPr>
+        <p:txBody>
+          <a:bodyPr wrap="square">
+            <a:spAutoFit/>
+          </a:bodyPr>
+          <a:lstStyle/>
+          <a:p>
+            <a:pPr>
+              <a:defRPr sz="3200">
+                <a:solidFill>
+                  <a:srgbClr val="25167A"/>
+                </a:solidFill>
+                <a:latin typeface="Arial"/>
+              </a:defRPr>
+            </a:pPr>
+            <a:r>
+              <a:t>De bot die niet nadenkt werd eerste</a:t>
+            </a:r>
+          </a:p>
+        </p:txBody>
+      </p:sp>
+      <p:sp>
+        <p:nvSpPr>
+          <p:cNvPr id="3" name="TextBox 2"/>
+          <p:cNvSpPr txBox="1"/>
+          <p:nvPr/>
+        </p:nvSpPr>
+        <p:spPr>
+          <a:xfrm>
+            <a:off x="1984248" y="2084831"/>
+            <a:ext cx="8778240" cy="4041648"/>
+          </a:xfrm>
+          <a:prstGeom prst="rect">
+            <a:avLst/>
+          </a:prstGeom>
+          <a:noFill/>
+        </p:spPr>
+        <p:txBody>
+          <a:bodyPr wrap="square">
+            <a:spAutoFit/>
+          </a:bodyPr>
+          <a:lstStyle/>
+          <a:p>
+            <a:pPr>
+              <a:defRPr sz="1700" b="1">
+                <a:solidFill>
+                  <a:srgbClr val="000000"/>
+                </a:solidFill>
+                <a:latin typeface="Arial"/>
+              </a:defRPr>
+            </a:pPr>
+            <a:r>
+              <a:t>Toernooi week 3, 27 bots. De uitslag bovenaan:</a:t>
+            </a:r>
+          </a:p>
+          <a:p>
+            <a:pPr lvl="1">
+              <a:defRPr sz="1400" b="0">
+                <a:solidFill>
+                  <a:srgbClr val="1B4D3E"/>
+                </a:solidFill>
+                <a:latin typeface="Arial"/>
+              </a:defRPr>
+            </a:pPr>
+            <a:r>
+              <a:t>1.  Testbot_CalltAlles — 1748 chips, foldt 0,0%</a:t>
+            </a:r>
+          </a:p>
+          <a:p>
+            <a:pPr lvl="1">
+              <a:defRPr sz="1400" b="0">
+                <a:solidFill>
+                  <a:srgbClr val="000000"/>
+                </a:solidFill>
+                <a:latin typeface="Arial"/>
+              </a:defRPr>
+            </a:pPr>
+            <a:r>
+              <a:t>2.  een van jullie — 1738 chips, foldt 82,5%</a:t>
+            </a:r>
+          </a:p>
+          <a:p>
+            <a:pPr lvl="1">
+              <a:defRPr sz="1400" b="0">
+                <a:solidFill>
+                  <a:srgbClr val="000000"/>
+                </a:solidFill>
+                <a:latin typeface="Arial"/>
+              </a:defRPr>
+            </a:pPr>
+            <a:r>
+              <a:t>3.  een van jullie — 1256 chips, foldt 58,7%</a:t>
+            </a:r>
+          </a:p>
+          <a:p>
+            <a:pPr>
+              <a:spcBef>
+                <a:spcPts val="1300"/>
+              </a:spcBef>
+              <a:defRPr sz="1700" b="1">
+                <a:solidFill>
+                  <a:srgbClr val="000000"/>
+                </a:solidFill>
+                <a:latin typeface="Arial"/>
+              </a:defRPr>
+            </a:pPr>
+            <a:r>
+              <a:t>Die eerste is één regel: geef altijd "call" terug, wat je ook hebt.</a:t>
+            </a:r>
+          </a:p>
+          <a:p>
+            <a:pPr lvl="1">
+              <a:defRPr sz="1400" b="0">
+                <a:solidFill>
+                  <a:srgbClr val="000000"/>
+                </a:solidFill>
+                <a:latin typeface="Arial"/>
+              </a:defRPr>
+            </a:pPr>
+            <a:r>
+              <a:t>Geen winkans, geen pot odds, kijkt niet eens naar zijn kaarten</a:t>
+            </a:r>
+          </a:p>
+          <a:p>
+            <a:pPr lvl="1">
+              <a:defRPr sz="1400" b="0">
+                <a:solidFill>
+                  <a:srgbClr val="000000"/>
+                </a:solidFill>
+                <a:latin typeface="Arial"/>
+              </a:defRPr>
+            </a:pPr>
+            <a:r>
+              <a:t>De klas foldde 92,2% van alle beslissingen; negen bots foldden 99% of meer</a:t>
+            </a:r>
+          </a:p>
+          <a:p>
+            <a:pPr lvl="1">
+              <a:defRPr sz="1400" b="0">
+                <a:solidFill>
+                  <a:srgbClr val="505A64"/>
+                </a:solidFill>
+                <a:latin typeface="Arial"/>
+              </a:defRPr>
+            </a:pPr>
+            <a:r>
+              <a:t>Correlatie tussen fold% en eindstand: -0,69 — meer folden is minder eindigen</a:t>
+            </a:r>
+          </a:p>
+          <a:p>
+            <a:pPr>
+              <a:spcBef>
+                <a:spcPts val="1300"/>
+              </a:spcBef>
+              <a:defRPr sz="1700" b="1">
+                <a:solidFill>
+                  <a:srgbClr val="25167A"/>
+                </a:solidFill>
+                <a:latin typeface="Arial"/>
+              </a:defRPr>
+            </a:pPr>
+            <a:r>
+              <a:t>Waarom verliest een bot mét regels van een bot zonder regels?</a:t>
+            </a:r>
+          </a:p>
+        </p:txBody>
+      </p:sp>
+      <p:sp>
+        <p:nvSpPr>
+          <p:cNvPr id="4" name="TextBox 3"/>
+          <p:cNvSpPr txBox="1"/>
+          <p:nvPr/>
+        </p:nvSpPr>
+        <p:spPr>
+          <a:xfrm>
+            <a:off x="9774936" y="6126480"/>
+            <a:ext cx="630936" cy="365760"/>
+          </a:xfrm>
+          <a:prstGeom prst="rect">
+            <a:avLst/>
+          </a:prstGeom>
+          <a:noFill/>
+        </p:spPr>
+        <p:txBody>
+          <a:bodyPr wrap="none">
+            <a:spAutoFit/>
+          </a:bodyPr>
+          <a:lstStyle/>
+          <a:p>
+            <a:pPr>
+              <a:defRPr sz="1200">
+                <a:solidFill>
+                  <a:srgbClr val="505A64"/>
+                </a:solidFill>
+                <a:latin typeface="Arial"/>
+              </a:defRPr>
+            </a:pPr>
+            <a:r>
+              <a:t>25</a:t>
             </a:r>
           </a:p>
         </p:txBody>

--- a/powerpoints/hoorcollege/03_Exploring_Manipulating_Data_aangevuld.pptx
+++ b/powerpoints/hoorcollege/03_Exploring_Manipulating_Data_aangevuld.pptx
@@ -35,6 +35,10 @@
     <p:sldId id="903" r:id="rId36"/>
     <p:sldId id="904" r:id="rId37"/>
     <p:sldId id="905" r:id="rId38"/>
+    <p:sldId id="906" r:id="rId39"/>
+    <p:sldId id="907" r:id="rId40"/>
+    <p:sldId id="908" r:id="rId41"/>
+    <p:sldId id="909" r:id="rId42"/>
   </p:sldIdLst>
   <p:sldSz cx="12192000" cy="6858000"/>
   <p:notesSz cx="6858000" cy="9144000"/>
@@ -12721,7 +12725,7 @@
               </a:defRPr>
             </a:pPr>
             <a:r>
-              <a:t>all_in en grote_raise mogen dan pas — zonder te weten hoeveel je hebt kun je dat niet afwegen</a:t>
+              <a:t>all_in en grote_raise mogen dan pas: zonder je stack kun je dat niet afwegen</a:t>
             </a:r>
           </a:p>
           <a:p>
@@ -13007,6 +13011,944 @@
             </a:pPr>
             <a:r>
               <a:t>25</a:t>
+            </a:r>
+          </a:p>
+        </p:txBody>
+      </p:sp>
+    </p:spTree>
+  </p:cSld>
+  <p:clrMapOvr>
+    <a:masterClrMapping/>
+  </p:clrMapOvr>
+</p:sld>
+</file>
+
+<file path=ppt/slides/slide26.xml><?xml version="1.0" encoding="utf-8"?>
+<p:sld xmlns:a="http://schemas.openxmlformats.org/drawingml/2006/main" xmlns:p="http://schemas.openxmlformats.org/presentationml/2006/main" xmlns:r="http://schemas.openxmlformats.org/officeDocument/2006/relationships">
+  <p:cSld>
+    <p:spTree>
+      <p:nvGrpSpPr>
+        <p:cNvPr id="1" name=""/>
+        <p:cNvGrpSpPr/>
+        <p:nvPr/>
+      </p:nvGrpSpPr>
+      <p:grpSpPr/>
+      <p:sp>
+        <p:nvSpPr>
+          <p:cNvPr id="2" name="TextBox 1"/>
+          <p:cNvSpPr txBox="1"/>
+          <p:nvPr/>
+        </p:nvSpPr>
+        <p:spPr>
+          <a:xfrm>
+            <a:off x="1984248" y="941832"/>
+            <a:ext cx="8229600" cy="1143000"/>
+          </a:xfrm>
+          <a:prstGeom prst="rect">
+            <a:avLst/>
+          </a:prstGeom>
+          <a:noFill/>
+        </p:spPr>
+        <p:txBody>
+          <a:bodyPr wrap="square">
+            <a:spAutoFit/>
+          </a:bodyPr>
+          <a:lstStyle/>
+          <a:p>
+            <a:pPr>
+              <a:defRPr sz="3200">
+                <a:solidFill>
+                  <a:srgbClr val="25167A"/>
+                </a:solidFill>
+                <a:latin typeface="Arial"/>
+              </a:defRPr>
+            </a:pPr>
+            <a:r>
+              <a:t>Groepscase 2 — wat je oplevert</a:t>
+            </a:r>
+          </a:p>
+        </p:txBody>
+      </p:sp>
+      <p:sp>
+        <p:nvSpPr>
+          <p:cNvPr id="3" name="TextBox 2"/>
+          <p:cNvSpPr txBox="1"/>
+          <p:nvPr/>
+        </p:nvSpPr>
+        <p:spPr>
+          <a:xfrm>
+            <a:off x="1984248" y="2084831"/>
+            <a:ext cx="8778240" cy="4041648"/>
+          </a:xfrm>
+          <a:prstGeom prst="rect">
+            <a:avLst/>
+          </a:prstGeom>
+          <a:noFill/>
+        </p:spPr>
+        <p:txBody>
+          <a:bodyPr wrap="square">
+            <a:spAutoFit/>
+          </a:bodyPr>
+          <a:lstStyle/>
+          <a:p>
+            <a:pPr>
+              <a:defRPr sz="1700" b="1">
+                <a:solidFill>
+                  <a:srgbClr val="000000"/>
+                </a:solidFill>
+                <a:latin typeface="Arial"/>
+              </a:defRPr>
+            </a:pPr>
+            <a:r>
+              <a:t>Een Streamlit-dashboard over een onderwerp dat je zelf kiest.</a:t>
+            </a:r>
+          </a:p>
+          <a:p>
+            <a:pPr lvl="1">
+              <a:defRPr sz="1400" b="0">
+                <a:solidFill>
+                  <a:srgbClr val="000000"/>
+                </a:solidFill>
+                <a:latin typeface="Arial"/>
+              </a:defRPr>
+            </a:pPr>
+            <a:r>
+              <a:t>Gepubliceerd via GitHub op share.streamlit.io, te openen met een link</a:t>
+            </a:r>
+          </a:p>
+          <a:p>
+            <a:pPr lvl="1">
+              <a:defRPr sz="1400" b="0">
+                <a:solidFill>
+                  <a:srgbClr val="000000"/>
+                </a:solidFill>
+                <a:latin typeface="Arial"/>
+              </a:defRPr>
+            </a:pPr>
+            <a:r>
+              <a:t>De app haalt de data zelf op bij een openbare API — niet met de hand gedownload</a:t>
+            </a:r>
+          </a:p>
+          <a:p>
+            <a:pPr lvl="1">
+              <a:defRPr sz="1400" b="0">
+                <a:solidFill>
+                  <a:srgbClr val="1B4D3E"/>
+                </a:solidFill>
+                <a:latin typeface="Arial"/>
+              </a:defRPr>
+            </a:pPr>
+            <a:r>
+              <a:t>Minimaal één join: twee bronnen die je tot één tabel samenvoegt</a:t>
+            </a:r>
+          </a:p>
+          <a:p>
+            <a:pPr>
+              <a:spcBef>
+                <a:spcPts val="1300"/>
+              </a:spcBef>
+              <a:defRPr sz="1700" b="1">
+                <a:solidFill>
+                  <a:srgbClr val="000000"/>
+                </a:solidFill>
+                <a:latin typeface="Arial"/>
+              </a:defRPr>
+            </a:pPr>
+            <a:r>
+              <a:t>Loopt over week 3 en week 4. Dat is kort.</a:t>
+            </a:r>
+          </a:p>
+          <a:p>
+            <a:pPr lvl="1">
+              <a:defRPr sz="1400" b="0">
+                <a:solidFill>
+                  <a:srgbClr val="000000"/>
+                </a:solidFill>
+                <a:latin typeface="Arial"/>
+              </a:defRPr>
+            </a:pPr>
+            <a:r>
+              <a:t>Donderdag 18:00 staat je onderwerp vast: welke vraag, welke twee bronnen,</a:t>
+            </a:r>
+          </a:p>
+          <a:p>
+            <a:pPr lvl="1">
+              <a:defRPr sz="1400" b="0">
+                <a:solidFill>
+                  <a:srgbClr val="000000"/>
+                </a:solidFill>
+                <a:latin typeface="Arial"/>
+              </a:defRPr>
+            </a:pPr>
+            <a:r>
+              <a:t>op welke kolom die aan elkaar passen, en wie in de groep wat doet</a:t>
+            </a:r>
+          </a:p>
+          <a:p>
+            <a:pPr>
+              <a:spcBef>
+                <a:spcPts val="1300"/>
+              </a:spcBef>
+              <a:defRPr sz="1700" b="1">
+                <a:solidFill>
+                  <a:srgbClr val="25167A"/>
+                </a:solidFill>
+                <a:latin typeface="Arial"/>
+              </a:defRPr>
+            </a:pPr>
+            <a:r>
+              <a:t>Zoek nu al op of die twee bronnen écht een gemeenschappelijke kolom hebben.</a:t>
+            </a:r>
+          </a:p>
+          <a:p>
+            <a:pPr lvl="1">
+              <a:defRPr sz="1400" b="0">
+                <a:solidFill>
+                  <a:srgbClr val="505A64"/>
+                </a:solidFill>
+                <a:latin typeface="Arial"/>
+              </a:defRPr>
+            </a:pPr>
+            <a:r>
+              <a:t>"Den Haag" en "'s-Gravenhage" passen niet op elkaar zonder werk</a:t>
+            </a:r>
+          </a:p>
+        </p:txBody>
+      </p:sp>
+      <p:sp>
+        <p:nvSpPr>
+          <p:cNvPr id="4" name="TextBox 3"/>
+          <p:cNvSpPr txBox="1"/>
+          <p:nvPr/>
+        </p:nvSpPr>
+        <p:spPr>
+          <a:xfrm>
+            <a:off x="9774936" y="6126480"/>
+            <a:ext cx="630936" cy="365760"/>
+          </a:xfrm>
+          <a:prstGeom prst="rect">
+            <a:avLst/>
+          </a:prstGeom>
+          <a:noFill/>
+        </p:spPr>
+        <p:txBody>
+          <a:bodyPr wrap="none">
+            <a:spAutoFit/>
+          </a:bodyPr>
+          <a:lstStyle/>
+          <a:p>
+            <a:pPr>
+              <a:defRPr sz="1200">
+                <a:solidFill>
+                  <a:srgbClr val="505A64"/>
+                </a:solidFill>
+                <a:latin typeface="Arial"/>
+              </a:defRPr>
+            </a:pPr>
+            <a:r>
+              <a:t>26</a:t>
+            </a:r>
+          </a:p>
+        </p:txBody>
+      </p:sp>
+    </p:spTree>
+  </p:cSld>
+  <p:clrMapOvr>
+    <a:masterClrMapping/>
+  </p:clrMapOvr>
+</p:sld>
+</file>
+
+<file path=ppt/slides/slide27.xml><?xml version="1.0" encoding="utf-8"?>
+<p:sld xmlns:a="http://schemas.openxmlformats.org/drawingml/2006/main" xmlns:p="http://schemas.openxmlformats.org/presentationml/2006/main" xmlns:r="http://schemas.openxmlformats.org/officeDocument/2006/relationships">
+  <p:cSld>
+    <p:spTree>
+      <p:nvGrpSpPr>
+        <p:cNvPr id="1" name=""/>
+        <p:cNvGrpSpPr/>
+        <p:nvPr/>
+      </p:nvGrpSpPr>
+      <p:grpSpPr/>
+      <p:sp>
+        <p:nvSpPr>
+          <p:cNvPr id="2" name="TextBox 1"/>
+          <p:cNvSpPr txBox="1"/>
+          <p:nvPr/>
+        </p:nvSpPr>
+        <p:spPr>
+          <a:xfrm>
+            <a:off x="1984248" y="941832"/>
+            <a:ext cx="8229600" cy="1143000"/>
+          </a:xfrm>
+          <a:prstGeom prst="rect">
+            <a:avLst/>
+          </a:prstGeom>
+          <a:noFill/>
+        </p:spPr>
+        <p:txBody>
+          <a:bodyPr wrap="square">
+            <a:spAutoFit/>
+          </a:bodyPr>
+          <a:lstStyle/>
+          <a:p>
+            <a:pPr>
+              <a:defRPr sz="3200">
+                <a:solidFill>
+                  <a:srgbClr val="25167A"/>
+                </a:solidFill>
+                <a:latin typeface="Arial"/>
+              </a:defRPr>
+            </a:pPr>
+            <a:r>
+              <a:t>Waar je cijfer vandaan komt</a:t>
+            </a:r>
+          </a:p>
+        </p:txBody>
+      </p:sp>
+      <p:sp>
+        <p:nvSpPr>
+          <p:cNvPr id="3" name="TextBox 2"/>
+          <p:cNvSpPr txBox="1"/>
+          <p:nvPr/>
+        </p:nvSpPr>
+        <p:spPr>
+          <a:xfrm>
+            <a:off x="1984248" y="2084831"/>
+            <a:ext cx="8778240" cy="4041648"/>
+          </a:xfrm>
+          <a:prstGeom prst="rect">
+            <a:avLst/>
+          </a:prstGeom>
+          <a:noFill/>
+        </p:spPr>
+        <p:txBody>
+          <a:bodyPr wrap="square">
+            <a:spAutoFit/>
+          </a:bodyPr>
+          <a:lstStyle/>
+          <a:p>
+            <a:pPr>
+              <a:defRPr sz="1700" b="1">
+                <a:solidFill>
+                  <a:srgbClr val="25167A"/>
+                </a:solidFill>
+                <a:latin typeface="Arial"/>
+              </a:defRPr>
+            </a:pPr>
+            <a:r>
+              <a:t>Drie criteria voor IDS — de data-kant</a:t>
+            </a:r>
+          </a:p>
+          <a:p>
+            <a:pPr lvl="1">
+              <a:defRPr sz="1400" b="0">
+                <a:solidFill>
+                  <a:srgbClr val="000000"/>
+                </a:solidFill>
+                <a:latin typeface="Arial"/>
+              </a:defRPr>
+            </a:pPr>
+            <a:r>
+              <a:t>Data verzameling · twee bronnen, plus de sleutel en de rijen vóór en ná de join</a:t>
+            </a:r>
+          </a:p>
+          <a:p>
+            <a:pPr lvl="1">
+              <a:defRPr sz="1400" b="0">
+                <a:solidFill>
+                  <a:srgbClr val="000000"/>
+                </a:solidFill>
+                <a:latin typeface="Arial"/>
+              </a:defRPr>
+            </a:pPr>
+            <a:r>
+              <a:t>Data verkenning · lege waarden, bereik, dubbele rijen — en wat je ermee deed</a:t>
+            </a:r>
+          </a:p>
+          <a:p>
+            <a:pPr lvl="1">
+              <a:defRPr sz="1400" b="0">
+                <a:solidFill>
+                  <a:srgbClr val="000000"/>
+                </a:solidFill>
+                <a:latin typeface="Arial"/>
+              </a:defRPr>
+            </a:pPr>
+            <a:r>
+              <a:t>Analyse · een conclusie die de data draagt, niet meer dan dat</a:t>
+            </a:r>
+          </a:p>
+          <a:p>
+            <a:pPr>
+              <a:spcBef>
+                <a:spcPts val="1300"/>
+              </a:spcBef>
+              <a:defRPr sz="1700" b="1">
+                <a:solidFill>
+                  <a:srgbClr val="25167A"/>
+                </a:solidFill>
+                <a:latin typeface="Arial"/>
+              </a:defRPr>
+            </a:pPr>
+            <a:r>
+              <a:t>Vier criteria voor VA — de verhaalkant</a:t>
+            </a:r>
+          </a:p>
+          <a:p>
+            <a:pPr lvl="1">
+              <a:defRPr sz="1400" b="0">
+                <a:solidFill>
+                  <a:srgbClr val="000000"/>
+                </a:solidFill>
+                <a:latin typeface="Arial"/>
+              </a:defRPr>
+            </a:pPr>
+            <a:r>
+              <a:t>Opbouw en verhaallijn · Interactiviteit · Dashboardontwerp</a:t>
+            </a:r>
+          </a:p>
+          <a:p>
+            <a:pPr lvl="1">
+              <a:defRPr sz="1400" b="0">
+                <a:solidFill>
+                  <a:srgbClr val="000000"/>
+                </a:solidFill>
+                <a:latin typeface="Arial"/>
+              </a:defRPr>
+            </a:pPr>
+            <a:r>
+              <a:t>Vergelijken en annoteren · het verschil, het opgetelde verloop, of de waarde</a:t>
+            </a:r>
+          </a:p>
+          <a:p>
+            <a:pPr lvl="1">
+              <a:defRPr sz="1400" b="0">
+                <a:solidFill>
+                  <a:srgbClr val="1B4D3E"/>
+                </a:solidFill>
+                <a:latin typeface="Arial"/>
+              </a:defRPr>
+            </a:pPr>
+            <a:r>
+              <a:t>ten opzichte van het moment ervoor — diff, cumsum, shift</a:t>
+            </a:r>
+          </a:p>
+          <a:p>
+            <a:pPr>
+              <a:spcBef>
+                <a:spcPts val="1300"/>
+              </a:spcBef>
+              <a:defRPr sz="1700" b="1">
+                <a:solidFill>
+                  <a:srgbClr val="000000"/>
+                </a:solidFill>
+                <a:latin typeface="Arial"/>
+              </a:defRPr>
+            </a:pPr>
+            <a:r>
+              <a:t>Vijf niveaus, van Ontbreekt (1) tot Uitstekend (9).</a:t>
+            </a:r>
+          </a:p>
+        </p:txBody>
+      </p:sp>
+      <p:sp>
+        <p:nvSpPr>
+          <p:cNvPr id="4" name="TextBox 3"/>
+          <p:cNvSpPr txBox="1"/>
+          <p:nvPr/>
+        </p:nvSpPr>
+        <p:spPr>
+          <a:xfrm>
+            <a:off x="9774936" y="6126480"/>
+            <a:ext cx="630936" cy="365760"/>
+          </a:xfrm>
+          <a:prstGeom prst="rect">
+            <a:avLst/>
+          </a:prstGeom>
+          <a:noFill/>
+        </p:spPr>
+        <p:txBody>
+          <a:bodyPr wrap="none">
+            <a:spAutoFit/>
+          </a:bodyPr>
+          <a:lstStyle/>
+          <a:p>
+            <a:pPr>
+              <a:defRPr sz="1200">
+                <a:solidFill>
+                  <a:srgbClr val="505A64"/>
+                </a:solidFill>
+                <a:latin typeface="Arial"/>
+              </a:defRPr>
+            </a:pPr>
+            <a:r>
+              <a:t>27</a:t>
+            </a:r>
+          </a:p>
+        </p:txBody>
+      </p:sp>
+    </p:spTree>
+  </p:cSld>
+  <p:clrMapOvr>
+    <a:masterClrMapping/>
+  </p:clrMapOvr>
+</p:sld>
+</file>
+
+<file path=ppt/slides/slide28.xml><?xml version="1.0" encoding="utf-8"?>
+<p:sld xmlns:a="http://schemas.openxmlformats.org/drawingml/2006/main" xmlns:p="http://schemas.openxmlformats.org/presentationml/2006/main" xmlns:r="http://schemas.openxmlformats.org/officeDocument/2006/relationships">
+  <p:cSld>
+    <p:spTree>
+      <p:nvGrpSpPr>
+        <p:cNvPr id="1" name=""/>
+        <p:cNvGrpSpPr/>
+        <p:nvPr/>
+      </p:nvGrpSpPr>
+      <p:grpSpPr/>
+      <p:sp>
+        <p:nvSpPr>
+          <p:cNvPr id="2" name="TextBox 1"/>
+          <p:cNvSpPr txBox="1"/>
+          <p:nvPr/>
+        </p:nvSpPr>
+        <p:spPr>
+          <a:xfrm>
+            <a:off x="1984248" y="941832"/>
+            <a:ext cx="8229600" cy="1143000"/>
+          </a:xfrm>
+          <a:prstGeom prst="rect">
+            <a:avLst/>
+          </a:prstGeom>
+          <a:noFill/>
+        </p:spPr>
+        <p:txBody>
+          <a:bodyPr wrap="square">
+            <a:spAutoFit/>
+          </a:bodyPr>
+          <a:lstStyle/>
+          <a:p>
+            <a:pPr>
+              <a:defRPr sz="3200">
+                <a:solidFill>
+                  <a:srgbClr val="25167A"/>
+                </a:solidFill>
+                <a:latin typeface="Arial"/>
+              </a:defRPr>
+            </a:pPr>
+            <a:r>
+              <a:t>Vijf voorwaarden — die gaan van je cijfer af</a:t>
+            </a:r>
+          </a:p>
+        </p:txBody>
+      </p:sp>
+      <p:sp>
+        <p:nvSpPr>
+          <p:cNvPr id="3" name="TextBox 2"/>
+          <p:cNvSpPr txBox="1"/>
+          <p:nvPr/>
+        </p:nvSpPr>
+        <p:spPr>
+          <a:xfrm>
+            <a:off x="1984248" y="2084831"/>
+            <a:ext cx="8778240" cy="4041648"/>
+          </a:xfrm>
+          <a:prstGeom prst="rect">
+            <a:avLst/>
+          </a:prstGeom>
+          <a:noFill/>
+        </p:spPr>
+        <p:txBody>
+          <a:bodyPr wrap="square">
+            <a:spAutoFit/>
+          </a:bodyPr>
+          <a:lstStyle/>
+          <a:p>
+            <a:pPr>
+              <a:defRPr sz="1700" b="1">
+                <a:solidFill>
+                  <a:srgbClr val="000000"/>
+                </a:solidFill>
+                <a:latin typeface="Arial"/>
+              </a:defRPr>
+            </a:pPr>
+            <a:r>
+              <a:t>Dit zijn geen criteria maar drempels. Beide cijfers, IDS en VA.</a:t>
+            </a:r>
+          </a:p>
+          <a:p>
+            <a:pPr lvl="1">
+              <a:defRPr sz="1400" b="0">
+                <a:solidFill>
+                  <a:srgbClr val="000000"/>
+                </a:solidFill>
+                <a:latin typeface="Arial"/>
+              </a:defRPr>
+            </a:pPr>
+            <a:r>
+              <a:t>App niet online, of een schone clone draait niet zonder handwerk</a:t>
+            </a:r>
+          </a:p>
+          <a:p>
+            <a:pPr lvl="1">
+              <a:defRPr sz="1400" b="0">
+                <a:solidFill>
+                  <a:srgbClr val="25167A"/>
+                </a:solidFill>
+                <a:latin typeface="Arial"/>
+              </a:defRPr>
+            </a:pPr>
+            <a:r>
+              <a:t>     -1,0</a:t>
+            </a:r>
+          </a:p>
+          <a:p>
+            <a:pPr lvl="1">
+              <a:defRPr sz="1400" b="0">
+                <a:solidFill>
+                  <a:srgbClr val="000000"/>
+                </a:solidFill>
+                <a:latin typeface="Arial"/>
+              </a:defRPr>
+            </a:pPr>
+            <a:r>
+              <a:t>Presentatie langer dan 10 minuten, exclusief vragen</a:t>
+            </a:r>
+          </a:p>
+          <a:p>
+            <a:pPr lvl="1">
+              <a:defRPr sz="1400" b="0">
+                <a:solidFill>
+                  <a:srgbClr val="25167A"/>
+                </a:solidFill>
+                <a:latin typeface="Arial"/>
+              </a:defRPr>
+            </a:pPr>
+            <a:r>
+              <a:t>     -1,0</a:t>
+            </a:r>
+          </a:p>
+          <a:p>
+            <a:pPr lvl="1">
+              <a:defRPr sz="1400" b="0">
+                <a:solidFill>
+                  <a:srgbClr val="000000"/>
+                </a:solidFill>
+                <a:latin typeface="Arial"/>
+              </a:defRPr>
+            </a:pPr>
+            <a:r>
+              <a:t>Geen slider, checkbox én dropdown, elk gekoppeld aan een tabel of grafiek</a:t>
+            </a:r>
+          </a:p>
+          <a:p>
+            <a:pPr lvl="1">
+              <a:defRPr sz="1400" b="0">
+                <a:solidFill>
+                  <a:srgbClr val="25167A"/>
+                </a:solidFill>
+                <a:latin typeface="Arial"/>
+              </a:defRPr>
+            </a:pPr>
+            <a:r>
+              <a:t>     -0,5</a:t>
+            </a:r>
+          </a:p>
+          <a:p>
+            <a:pPr>
+              <a:spcBef>
+                <a:spcPts val="1300"/>
+              </a:spcBef>
+              <a:defRPr sz="1700" b="1">
+                <a:solidFill>
+                  <a:srgbClr val="000000"/>
+                </a:solidFill>
+                <a:latin typeface="Arial"/>
+              </a:defRPr>
+            </a:pPr>
+            <a:r>
+              <a:t>En twee zonder aftrek, maar niet vrijblijvend:</a:t>
+            </a:r>
+          </a:p>
+          <a:p>
+            <a:pPr lvl="1">
+              <a:defRPr sz="1400" b="0">
+                <a:solidFill>
+                  <a:srgbClr val="505A64"/>
+                </a:solidFill>
+                <a:latin typeface="Arial"/>
+              </a:defRPr>
+            </a:pPr>
+            <a:r>
+              <a:t>Onderwerp op tijd gemeld · code van anderen met bron erbij, en uit te leggen</a:t>
+            </a:r>
+          </a:p>
+        </p:txBody>
+      </p:sp>
+      <p:sp>
+        <p:nvSpPr>
+          <p:cNvPr id="4" name="TextBox 3"/>
+          <p:cNvSpPr txBox="1"/>
+          <p:nvPr/>
+        </p:nvSpPr>
+        <p:spPr>
+          <a:xfrm>
+            <a:off x="9774936" y="6126480"/>
+            <a:ext cx="630936" cy="365760"/>
+          </a:xfrm>
+          <a:prstGeom prst="rect">
+            <a:avLst/>
+          </a:prstGeom>
+          <a:noFill/>
+        </p:spPr>
+        <p:txBody>
+          <a:bodyPr wrap="none">
+            <a:spAutoFit/>
+          </a:bodyPr>
+          <a:lstStyle/>
+          <a:p>
+            <a:pPr>
+              <a:defRPr sz="1200">
+                <a:solidFill>
+                  <a:srgbClr val="505A64"/>
+                </a:solidFill>
+                <a:latin typeface="Arial"/>
+              </a:defRPr>
+            </a:pPr>
+            <a:r>
+              <a:t>28</a:t>
+            </a:r>
+          </a:p>
+        </p:txBody>
+      </p:sp>
+    </p:spTree>
+  </p:cSld>
+  <p:clrMapOvr>
+    <a:masterClrMapping/>
+  </p:clrMapOvr>
+</p:sld>
+</file>
+
+<file path=ppt/slides/slide29.xml><?xml version="1.0" encoding="utf-8"?>
+<p:sld xmlns:a="http://schemas.openxmlformats.org/drawingml/2006/main" xmlns:p="http://schemas.openxmlformats.org/presentationml/2006/main" xmlns:r="http://schemas.openxmlformats.org/officeDocument/2006/relationships">
+  <p:cSld>
+    <p:spTree>
+      <p:nvGrpSpPr>
+        <p:cNvPr id="1" name=""/>
+        <p:cNvGrpSpPr/>
+        <p:nvPr/>
+      </p:nvGrpSpPr>
+      <p:grpSpPr/>
+      <p:sp>
+        <p:nvSpPr>
+          <p:cNvPr id="2" name="TextBox 1"/>
+          <p:cNvSpPr txBox="1"/>
+          <p:nvPr/>
+        </p:nvSpPr>
+        <p:spPr>
+          <a:xfrm>
+            <a:off x="1984248" y="941832"/>
+            <a:ext cx="8229600" cy="1143000"/>
+          </a:xfrm>
+          <a:prstGeom prst="rect">
+            <a:avLst/>
+          </a:prstGeom>
+          <a:noFill/>
+        </p:spPr>
+        <p:txBody>
+          <a:bodyPr wrap="square">
+            <a:spAutoFit/>
+          </a:bodyPr>
+          <a:lstStyle/>
+          <a:p>
+            <a:pPr>
+              <a:defRPr sz="3200">
+                <a:solidFill>
+                  <a:srgbClr val="25167A"/>
+                </a:solidFill>
+                <a:latin typeface="Arial"/>
+              </a:defRPr>
+            </a:pPr>
+            <a:r>
+              <a:t>Dat heb je vanmiddag al gedaan</a:t>
+            </a:r>
+          </a:p>
+        </p:txBody>
+      </p:sp>
+      <p:sp>
+        <p:nvSpPr>
+          <p:cNvPr id="3" name="TextBox 2"/>
+          <p:cNvSpPr txBox="1"/>
+          <p:nvPr/>
+        </p:nvSpPr>
+        <p:spPr>
+          <a:xfrm>
+            <a:off x="1984248" y="2084831"/>
+            <a:ext cx="8778240" cy="4041648"/>
+          </a:xfrm>
+          <a:prstGeom prst="rect">
+            <a:avLst/>
+          </a:prstGeom>
+          <a:noFill/>
+        </p:spPr>
+        <p:txBody>
+          <a:bodyPr wrap="square">
+            <a:spAutoFit/>
+          </a:bodyPr>
+          <a:lstStyle/>
+          <a:p>
+            <a:pPr>
+              <a:defRPr sz="1700" b="1">
+                <a:solidFill>
+                  <a:srgbClr val="000000"/>
+                </a:solidFill>
+                <a:latin typeface="Arial"/>
+              </a:defRPr>
+            </a:pPr>
+            <a:r>
+              <a:t>De demo van zojuist was Case 2 in het klein:</a:t>
+            </a:r>
+          </a:p>
+          <a:p>
+            <a:pPr lvl="1">
+              <a:defRPr sz="1400" b="0">
+                <a:solidFill>
+                  <a:srgbClr val="1B4D3E"/>
+                </a:solidFill>
+                <a:latin typeface="Arial"/>
+              </a:defRPr>
+            </a:pPr>
+            <a:r>
+              <a:t>twee tabellen op bot_naam samengevoegd, rijen geteld vóór en ná</a:t>
+            </a:r>
+          </a:p>
+          <a:p>
+            <a:pPr lvl="1">
+              <a:defRPr sz="1400" b="0">
+                <a:solidFill>
+                  <a:srgbClr val="000000"/>
+                </a:solidFill>
+                <a:latin typeface="Arial"/>
+              </a:defRPr>
+            </a:pPr>
+            <a:r>
+              <a:t>     → criterium Data verzameling</a:t>
+            </a:r>
+          </a:p>
+          <a:p>
+            <a:pPr lvl="1">
+              <a:defRPr sz="1400" b="0">
+                <a:solidFill>
+                  <a:srgbClr val="1B4D3E"/>
+                </a:solidFill>
+                <a:latin typeface="Arial"/>
+              </a:defRPr>
+            </a:pPr>
+            <a:r>
+              <a:t>928 lege waarden gevonden, en gezien wat ze met je percentage deden</a:t>
+            </a:r>
+          </a:p>
+          <a:p>
+            <a:pPr lvl="1">
+              <a:defRPr sz="1400" b="0">
+                <a:solidFill>
+                  <a:srgbClr val="000000"/>
+                </a:solidFill>
+                <a:latin typeface="Arial"/>
+              </a:defRPr>
+            </a:pPr>
+            <a:r>
+              <a:t>     → criterium Data verkenning</a:t>
+            </a:r>
+          </a:p>
+          <a:p>
+            <a:pPr lvl="1">
+              <a:defRPr sz="1400" b="0">
+                <a:solidFill>
+                  <a:srgbClr val="1B4D3E"/>
+                </a:solidFill>
+                <a:latin typeface="Arial"/>
+              </a:defRPr>
+            </a:pPr>
+            <a:r>
+              <a:t>diff en cumsum over het verloop van een stack</a:t>
+            </a:r>
+          </a:p>
+          <a:p>
+            <a:pPr lvl="1">
+              <a:defRPr sz="1400" b="0">
+                <a:solidFill>
+                  <a:srgbClr val="000000"/>
+                </a:solidFill>
+                <a:latin typeface="Arial"/>
+              </a:defRPr>
+            </a:pPr>
+            <a:r>
+              <a:t>     → criterium Vergelijken en annoteren</a:t>
+            </a:r>
+          </a:p>
+          <a:p>
+            <a:pPr>
+              <a:spcBef>
+                <a:spcPts val="1300"/>
+              </a:spcBef>
+              <a:defRPr sz="1700" b="1">
+                <a:solidFill>
+                  <a:srgbClr val="000000"/>
+                </a:solidFill>
+                <a:latin typeface="Arial"/>
+              </a:defRPr>
+            </a:pPr>
+            <a:r>
+              <a:t>Het verschil met de case: daar kiest niemand de dataset voor je,</a:t>
+            </a:r>
+          </a:p>
+          <a:p>
+            <a:pPr lvl="1">
+              <a:defRPr sz="1400" b="0">
+                <a:solidFill>
+                  <a:srgbClr val="505A64"/>
+                </a:solidFill>
+                <a:latin typeface="Arial"/>
+              </a:defRPr>
+            </a:pPr>
+            <a:r>
+              <a:t>en staat er geen kolom aan_zet klaar om je fout te laten zien.</a:t>
+            </a:r>
+          </a:p>
+        </p:txBody>
+      </p:sp>
+      <p:sp>
+        <p:nvSpPr>
+          <p:cNvPr id="4" name="TextBox 3"/>
+          <p:cNvSpPr txBox="1"/>
+          <p:nvPr/>
+        </p:nvSpPr>
+        <p:spPr>
+          <a:xfrm>
+            <a:off x="9774936" y="6126480"/>
+            <a:ext cx="630936" cy="365760"/>
+          </a:xfrm>
+          <a:prstGeom prst="rect">
+            <a:avLst/>
+          </a:prstGeom>
+          <a:noFill/>
+        </p:spPr>
+        <p:txBody>
+          <a:bodyPr wrap="none">
+            <a:spAutoFit/>
+          </a:bodyPr>
+          <a:lstStyle/>
+          <a:p>
+            <a:pPr>
+              <a:defRPr sz="1200">
+                <a:solidFill>
+                  <a:srgbClr val="505A64"/>
+                </a:solidFill>
+                <a:latin typeface="Arial"/>
+              </a:defRPr>
+            </a:pPr>
+            <a:r>
+              <a:t>29</a:t>
             </a:r>
           </a:p>
         </p:txBody>

--- a/powerpoints/hoorcollege/03_Exploring_Manipulating_Data_aangevuld.pptx
+++ b/powerpoints/hoorcollege/03_Exploring_Manipulating_Data_aangevuld.pptx
@@ -39,6 +39,8 @@
     <p:sldId id="907" r:id="rId40"/>
     <p:sldId id="908" r:id="rId41"/>
     <p:sldId id="909" r:id="rId42"/>
+    <p:sldId id="910" r:id="rId43"/>
+    <p:sldId id="911" r:id="rId44"/>
   </p:sldIdLst>
   <p:sldSz cx="12192000" cy="6858000"/>
   <p:notesSz cx="6858000" cy="9144000"/>
@@ -2058,6 +2060,947 @@
 </p:notes>
 </file>
 
+<file path=ppt/notesSlides/notesSlide10.xml><?xml version="1.0" encoding="utf-8"?>
+<p:notes xmlns:a="http://schemas.openxmlformats.org/drawingml/2006/main" xmlns:p="http://schemas.openxmlformats.org/presentationml/2006/main" xmlns:r="http://schemas.openxmlformats.org/officeDocument/2006/relationships">
+  <p:cSld>
+    <p:spTree>
+      <p:nvGrpSpPr>
+        <p:cNvPr id="1" name=""/>
+        <p:cNvGrpSpPr/>
+        <p:nvPr/>
+      </p:nvGrpSpPr>
+      <p:grpSpPr>
+        <a:xfrm>
+          <a:off x="0" y="0"/>
+          <a:ext cx="0" cy="0"/>
+          <a:chOff x="0" y="0"/>
+          <a:chExt cx="0" cy="0"/>
+        </a:xfrm>
+      </p:grpSpPr>
+      <p:sp>
+        <p:nvSpPr>
+          <p:cNvPr id="2" name="Slide Image Placeholder 1"/>
+          <p:cNvSpPr>
+            <a:spLocks noGrp="1"/>
+          </p:cNvSpPr>
+          <p:nvPr>
+            <p:ph type="sldImg"/>
+          </p:nvPr>
+        </p:nvSpPr>
+        <p:spPr/>
+      </p:sp>
+      <p:sp>
+        <p:nvSpPr>
+          <p:cNvPr id="3" name="Notes Placeholder 2"/>
+          <p:cNvSpPr>
+            <a:spLocks noGrp="1"/>
+          </p:cNvSpPr>
+          <p:nvPr>
+            <p:ph type="body"/>
+          </p:nvPr>
+        </p:nvSpPr>
+        <p:spPr/>
+        <p:txBody>
+          <a:bodyPr/>
+          <a:lstStyle/>
+          <a:p>
+            <a:r>
+              <a:t>De deadline is donderdag 18:00 en dat is geen</a:t>
+            </a:r>
+          </a:p>
+          <a:p>
+            <a:r>
+              <a:t>inlevermoment maar een BESLUIT: welke vraag, welke twee bronnen, op welke kolom die</a:t>
+            </a:r>
+          </a:p>
+          <a:p>
+            <a:r>
+              <a:t>aan elkaar passen, wie doet wat.</a:t>
+            </a:r>
+          </a:p>
+          <a:p/>
+          <a:p>
+            <a:r>
+              <a:t>Het zinnetje over Den Haag en 's-Gravenhage is niet grappig bedoeld. Laat ze nu al</a:t>
+            </a:r>
+          </a:p>
+          <a:p>
+            <a:r>
+              <a:t>een keer kijken of hun twee bronnen echt een gemeenschappelijke kolom hebben met</a:t>
+            </a:r>
+          </a:p>
+          <a:p>
+            <a:r>
+              <a:t>dezelfde schrijfwijze.</a:t>
+            </a:r>
+          </a:p>
+        </p:txBody>
+      </p:sp>
+      <p:sp>
+        <p:nvSpPr>
+          <p:cNvPr id="4" name="Slide Number Placeholder 3"/>
+          <p:cNvSpPr>
+            <a:spLocks noGrp="1"/>
+          </p:cNvSpPr>
+          <p:nvPr>
+            <p:ph type="sldNum"/>
+          </p:nvPr>
+        </p:nvSpPr>
+        <p:spPr/>
+      </p:sp>
+    </p:spTree>
+  </p:cSld>
+  <p:clrMapOvr>
+    <a:masterClrMapping/>
+  </p:clrMapOvr>
+</p:notes>
+</file>
+
+<file path=ppt/notesSlides/notesSlide11.xml><?xml version="1.0" encoding="utf-8"?>
+<p:notes xmlns:a="http://schemas.openxmlformats.org/drawingml/2006/main" xmlns:p="http://schemas.openxmlformats.org/presentationml/2006/main" xmlns:r="http://schemas.openxmlformats.org/officeDocument/2006/relationships">
+  <p:cSld>
+    <p:spTree>
+      <p:nvGrpSpPr>
+        <p:cNvPr id="1" name=""/>
+        <p:cNvGrpSpPr/>
+        <p:nvPr/>
+      </p:nvGrpSpPr>
+      <p:grpSpPr>
+        <a:xfrm>
+          <a:off x="0" y="0"/>
+          <a:ext cx="0" cy="0"/>
+          <a:chOff x="0" y="0"/>
+          <a:chExt cx="0" cy="0"/>
+        </a:xfrm>
+      </p:grpSpPr>
+      <p:sp>
+        <p:nvSpPr>
+          <p:cNvPr id="2" name="Slide Image Placeholder 1"/>
+          <p:cNvSpPr>
+            <a:spLocks noGrp="1"/>
+          </p:cNvSpPr>
+          <p:nvPr>
+            <p:ph type="sldImg"/>
+          </p:nvPr>
+        </p:nvSpPr>
+        <p:spPr/>
+      </p:sp>
+      <p:sp>
+        <p:nvSpPr>
+          <p:cNvPr id="3" name="Notes Placeholder 2"/>
+          <p:cNvSpPr>
+            <a:spLocks noGrp="1"/>
+          </p:cNvSpPr>
+          <p:nvPr>
+            <p:ph type="body"/>
+          </p:nvPr>
+        </p:nvSpPr>
+        <p:spPr/>
+        <p:txBody>
+          <a:bodyPr/>
+          <a:lstStyle/>
+          <a:p>
+            <a:r>
+              <a:t>Vergelijken en annoteren is het criterium waar</a:t>
+            </a:r>
+          </a:p>
+          <a:p>
+            <a:r>
+              <a:t>groepen punten laten liggen. Het vraagt diff, cumsum of shift - het verschil met het</a:t>
+            </a:r>
+          </a:p>
+          <a:p>
+            <a:r>
+              <a:t>moment ervoor, niet alleen de waarde. Ze hebben diff vanmiddag al gebruikt om de</a:t>
+            </a:r>
+          </a:p>
+          <a:p>
+            <a:r>
+              <a:t>winst-kolom te maken; zeg dat er hardop bij.</a:t>
+            </a:r>
+          </a:p>
+        </p:txBody>
+      </p:sp>
+      <p:sp>
+        <p:nvSpPr>
+          <p:cNvPr id="4" name="Slide Number Placeholder 3"/>
+          <p:cNvSpPr>
+            <a:spLocks noGrp="1"/>
+          </p:cNvSpPr>
+          <p:nvPr>
+            <p:ph type="sldNum"/>
+          </p:nvPr>
+        </p:nvSpPr>
+        <p:spPr/>
+      </p:sp>
+    </p:spTree>
+  </p:cSld>
+  <p:clrMapOvr>
+    <a:masterClrMapping/>
+  </p:clrMapOvr>
+</p:notes>
+</file>
+
+<file path=ppt/notesSlides/notesSlide12.xml><?xml version="1.0" encoding="utf-8"?>
+<p:notes xmlns:a="http://schemas.openxmlformats.org/drawingml/2006/main" xmlns:p="http://schemas.openxmlformats.org/presentationml/2006/main" xmlns:r="http://schemas.openxmlformats.org/officeDocument/2006/relationships">
+  <p:cSld>
+    <p:spTree>
+      <p:nvGrpSpPr>
+        <p:cNvPr id="1" name=""/>
+        <p:cNvGrpSpPr/>
+        <p:nvPr/>
+      </p:nvGrpSpPr>
+      <p:grpSpPr>
+        <a:xfrm>
+          <a:off x="0" y="0"/>
+          <a:ext cx="0" cy="0"/>
+          <a:chOff x="0" y="0"/>
+          <a:chExt cx="0" cy="0"/>
+        </a:xfrm>
+      </p:grpSpPr>
+      <p:sp>
+        <p:nvSpPr>
+          <p:cNvPr id="2" name="Slide Image Placeholder 1"/>
+          <p:cNvSpPr>
+            <a:spLocks noGrp="1"/>
+          </p:cNvSpPr>
+          <p:nvPr>
+            <p:ph type="sldImg"/>
+          </p:nvPr>
+        </p:nvSpPr>
+        <p:spPr/>
+      </p:sp>
+      <p:sp>
+        <p:nvSpPr>
+          <p:cNvPr id="3" name="Notes Placeholder 2"/>
+          <p:cNvSpPr>
+            <a:spLocks noGrp="1"/>
+          </p:cNvSpPr>
+          <p:nvPr>
+            <p:ph type="body"/>
+          </p:nvPr>
+        </p:nvSpPr>
+        <p:spPr/>
+        <p:txBody>
+          <a:bodyPr/>
+          <a:lstStyle/>
+          <a:p>
+            <a:r>
+              <a:t>Deze dia is saai en bespaart je</a:t>
+            </a:r>
+          </a:p>
+          <a:p>
+            <a:r>
+              <a:t>in week 4 een half uur discussie. De aftrek gaat van BEIDE cijfers af, IDS en VA.</a:t>
+            </a:r>
+          </a:p>
+          <a:p/>
+          <a:p>
+            <a:r>
+              <a:t>"Een schone clone draait zonder handmatige stappen" is de zwaarste: hun app moet het</a:t>
+            </a:r>
+          </a:p>
+          <a:p>
+            <a:r>
+              <a:t>doen op een computer die hun notebook nooit heeft gezien.</a:t>
+            </a:r>
+          </a:p>
+        </p:txBody>
+      </p:sp>
+      <p:sp>
+        <p:nvSpPr>
+          <p:cNvPr id="4" name="Slide Number Placeholder 3"/>
+          <p:cNvSpPr>
+            <a:spLocks noGrp="1"/>
+          </p:cNvSpPr>
+          <p:nvPr>
+            <p:ph type="sldNum"/>
+          </p:nvPr>
+        </p:nvSpPr>
+        <p:spPr/>
+      </p:sp>
+    </p:spTree>
+  </p:cSld>
+  <p:clrMapOvr>
+    <a:masterClrMapping/>
+  </p:clrMapOvr>
+</p:notes>
+</file>
+
+<file path=ppt/notesSlides/notesSlide13.xml><?xml version="1.0" encoding="utf-8"?>
+<p:notes xmlns:a="http://schemas.openxmlformats.org/drawingml/2006/main" xmlns:p="http://schemas.openxmlformats.org/presentationml/2006/main" xmlns:r="http://schemas.openxmlformats.org/officeDocument/2006/relationships">
+  <p:cSld>
+    <p:spTree>
+      <p:nvGrpSpPr>
+        <p:cNvPr id="1" name=""/>
+        <p:cNvGrpSpPr/>
+        <p:nvPr/>
+      </p:nvGrpSpPr>
+      <p:grpSpPr>
+        <a:xfrm>
+          <a:off x="0" y="0"/>
+          <a:ext cx="0" cy="0"/>
+          <a:chOff x="0" y="0"/>
+          <a:chExt cx="0" cy="0"/>
+        </a:xfrm>
+      </p:grpSpPr>
+      <p:sp>
+        <p:nvSpPr>
+          <p:cNvPr id="2" name="Slide Image Placeholder 1"/>
+          <p:cNvSpPr>
+            <a:spLocks noGrp="1"/>
+          </p:cNvSpPr>
+          <p:nvPr>
+            <p:ph type="sldImg"/>
+          </p:nvPr>
+        </p:nvSpPr>
+        <p:spPr/>
+      </p:sp>
+      <p:sp>
+        <p:nvSpPr>
+          <p:cNvPr id="3" name="Notes Placeholder 2"/>
+          <p:cNvSpPr>
+            <a:spLocks noGrp="1"/>
+          </p:cNvSpPr>
+          <p:nvPr>
+            <p:ph type="body"/>
+          </p:nvPr>
+        </p:nvSpPr>
+        <p:spPr/>
+        <p:txBody>
+          <a:bodyPr/>
+          <a:lstStyle/>
+          <a:p>
+            <a:r>
+              <a:t>Dit is de dia die de curriculum-audit vroeg.</a:t>
+            </a:r>
+          </a:p>
+          <a:p>
+            <a:r>
+              <a:t>Studenten leggen de koppeling tussen werkcollege en rubric zelf niet. Een zin - dit</a:t>
+            </a:r>
+          </a:p>
+          <a:p>
+            <a:r>
+              <a:t>is het criterium waarop je case wordt beoordeeld - is het verschil tussen een</a:t>
+            </a:r>
+          </a:p>
+          <a:p>
+            <a:r>
+              <a:t>oefening en een reden.</a:t>
+            </a:r>
+          </a:p>
+        </p:txBody>
+      </p:sp>
+      <p:sp>
+        <p:nvSpPr>
+          <p:cNvPr id="4" name="Slide Number Placeholder 3"/>
+          <p:cNvSpPr>
+            <a:spLocks noGrp="1"/>
+          </p:cNvSpPr>
+          <p:nvPr>
+            <p:ph type="sldNum"/>
+          </p:nvPr>
+        </p:nvSpPr>
+        <p:spPr/>
+      </p:sp>
+    </p:spTree>
+  </p:cSld>
+  <p:clrMapOvr>
+    <a:masterClrMapping/>
+  </p:clrMapOvr>
+</p:notes>
+</file>
+
+<file path=ppt/notesSlides/notesSlide14.xml><?xml version="1.0" encoding="utf-8"?>
+<p:notes xmlns:a="http://schemas.openxmlformats.org/drawingml/2006/main" xmlns:p="http://schemas.openxmlformats.org/presentationml/2006/main" xmlns:r="http://schemas.openxmlformats.org/officeDocument/2006/relationships">
+  <p:cSld>
+    <p:spTree>
+      <p:nvGrpSpPr>
+        <p:cNvPr id="1" name=""/>
+        <p:cNvGrpSpPr/>
+        <p:nvPr/>
+      </p:nvGrpSpPr>
+      <p:grpSpPr>
+        <a:xfrm>
+          <a:off x="0" y="0"/>
+          <a:ext cx="0" cy="0"/>
+          <a:chOff x="0" y="0"/>
+          <a:chExt cx="0" cy="0"/>
+        </a:xfrm>
+      </p:grpSpPr>
+      <p:sp>
+        <p:nvSpPr>
+          <p:cNvPr id="2" name="Slide Image Placeholder 1"/>
+          <p:cNvSpPr>
+            <a:spLocks noGrp="1"/>
+          </p:cNvSpPr>
+          <p:nvPr>
+            <p:ph type="sldImg"/>
+          </p:nvPr>
+        </p:nvSpPr>
+        <p:spPr/>
+      </p:sp>
+      <p:sp>
+        <p:nvSpPr>
+          <p:cNvPr id="3" name="Notes Placeholder 2"/>
+          <p:cNvSpPr>
+            <a:spLocks noGrp="1"/>
+          </p:cNvSpPr>
+          <p:nvPr>
+            <p:ph type="body"/>
+          </p:nvPr>
+        </p:nvSpPr>
+        <p:spPr/>
+        <p:txBody>
+          <a:bodyPr/>
+          <a:lstStyle/>
+          <a:p>
+            <a:r>
+              <a:t>[EDA-recept] Dit recept is precies de volgorde van de demo straks:</a:t>
+            </a:r>
+          </a:p>
+          <a:p>
+            <a:r>
+              <a:t>describe -&gt; univariaat -&gt; bivariaat. Blok 1 is describe, blok 3 is bivariaat.</a:t>
+            </a:r>
+          </a:p>
+          <a:p>
+            <a:r>
+              <a:t>Zeg dat je het zo meteen op hun eigen toernooi doet, dan luisteren ze anders.</a:t>
+            </a:r>
+          </a:p>
+        </p:txBody>
+      </p:sp>
+      <p:sp>
+        <p:nvSpPr>
+          <p:cNvPr id="4" name="Slide Number Placeholder 3"/>
+          <p:cNvSpPr>
+            <a:spLocks noGrp="1"/>
+          </p:cNvSpPr>
+          <p:nvPr>
+            <p:ph type="sldNum"/>
+          </p:nvPr>
+        </p:nvSpPr>
+        <p:spPr/>
+      </p:sp>
+    </p:spTree>
+  </p:cSld>
+  <p:clrMapOvr>
+    <a:masterClrMapping/>
+  </p:clrMapOvr>
+</p:notes>
+</file>
+
+<file path=ppt/notesSlides/notesSlide15.xml><?xml version="1.0" encoding="utf-8"?>
+<p:notes xmlns:a="http://schemas.openxmlformats.org/drawingml/2006/main" xmlns:p="http://schemas.openxmlformats.org/presentationml/2006/main" xmlns:r="http://schemas.openxmlformats.org/officeDocument/2006/relationships">
+  <p:cSld>
+    <p:spTree>
+      <p:nvGrpSpPr>
+        <p:cNvPr id="1" name=""/>
+        <p:cNvGrpSpPr/>
+        <p:nvPr/>
+      </p:nvGrpSpPr>
+      <p:grpSpPr>
+        <a:xfrm>
+          <a:off x="0" y="0"/>
+          <a:ext cx="0" cy="0"/>
+          <a:chOff x="0" y="0"/>
+          <a:chExt cx="0" cy="0"/>
+        </a:xfrm>
+      </p:grpSpPr>
+      <p:sp>
+        <p:nvSpPr>
+          <p:cNvPr id="2" name="Slide Image Placeholder 1"/>
+          <p:cNvSpPr>
+            <a:spLocks noGrp="1"/>
+          </p:cNvSpPr>
+          <p:nvPr>
+            <p:ph type="sldImg"/>
+          </p:nvPr>
+        </p:nvSpPr>
+        <p:spPr/>
+      </p:sp>
+      <p:sp>
+        <p:nvSpPr>
+          <p:cNvPr id="3" name="Notes Placeholder 2"/>
+          <p:cNvSpPr>
+            <a:spLocks noGrp="1"/>
+          </p:cNvSpPr>
+          <p:nvPr>
+            <p:ph type="body"/>
+          </p:nvPr>
+        </p:nvSpPr>
+        <p:spPr/>
+        <p:txBody>
+          <a:bodyPr/>
+          <a:lstStyle/>
+          <a:p>
+            <a:r>
+              <a:t>[Blok 1 - wat de samenvatting verbergt] Op het toernooi van deze week:</a:t>
+            </a:r>
+          </a:p>
+          <a:p>
+            <a:r>
+              <a:t>gemiddelde 0,0 - mediaan 0,0 - std 39 - laagste -1030 - hoogste +1750.</a:t>
+            </a:r>
+          </a:p>
+          <a:p/>
+          <a:p>
+            <a:r>
+              <a:t>Het gemiddelde is exact nul en dat is geen toeval: poker is een nulsom, wat de</a:t>
+            </a:r>
+          </a:p>
+          <a:p>
+            <a:r>
+              <a:t>een wint verliest de ander. Dat is meteen je controle. Komt er geen nul uit je</a:t>
+            </a:r>
+          </a:p>
+          <a:p>
+            <a:r>
+              <a:t>eigen berekening, dan klopt je groepering niet.</a:t>
+            </a:r>
+          </a:p>
+          <a:p/>
+          <a:p>
+            <a:r>
+              <a:t>Mediaan nul betekent: in de meeste handen gebeurt er niets. En toch ging er in</a:t>
+            </a:r>
+          </a:p>
+          <a:p>
+            <a:r>
+              <a:t>een van die handen 1750 chips om. Vier getallen, en geen van de vier vertelt dat.</a:t>
+            </a:r>
+          </a:p>
+        </p:txBody>
+      </p:sp>
+      <p:sp>
+        <p:nvSpPr>
+          <p:cNvPr id="4" name="Slide Number Placeholder 3"/>
+          <p:cNvSpPr>
+            <a:spLocks noGrp="1"/>
+          </p:cNvSpPr>
+          <p:nvPr>
+            <p:ph type="sldNum"/>
+          </p:nvPr>
+        </p:nvSpPr>
+        <p:spPr/>
+      </p:sp>
+    </p:spTree>
+  </p:cSld>
+  <p:clrMapOvr>
+    <a:masterClrMapping/>
+  </p:clrMapOvr>
+</p:notes>
+</file>
+
+<file path=ppt/notesSlides/notesSlide16.xml><?xml version="1.0" encoding="utf-8"?>
+<p:notes xmlns:a="http://schemas.openxmlformats.org/drawingml/2006/main" xmlns:p="http://schemas.openxmlformats.org/presentationml/2006/main" xmlns:r="http://schemas.openxmlformats.org/officeDocument/2006/relationships">
+  <p:cSld>
+    <p:spTree>
+      <p:nvGrpSpPr>
+        <p:cNvPr id="1" name=""/>
+        <p:cNvGrpSpPr/>
+        <p:nvPr/>
+      </p:nvGrpSpPr>
+      <p:grpSpPr>
+        <a:xfrm>
+          <a:off x="0" y="0"/>
+          <a:ext cx="0" cy="0"/>
+          <a:chOff x="0" y="0"/>
+          <a:chExt cx="0" cy="0"/>
+        </a:xfrm>
+      </p:grpSpPr>
+      <p:sp>
+        <p:nvSpPr>
+          <p:cNvPr id="2" name="Slide Image Placeholder 1"/>
+          <p:cNvSpPr>
+            <a:spLocks noGrp="1"/>
+          </p:cNvSpPr>
+          <p:nvPr>
+            <p:ph type="sldImg"/>
+          </p:nvPr>
+        </p:nvSpPr>
+        <p:spPr/>
+      </p:sp>
+      <p:sp>
+        <p:nvSpPr>
+          <p:cNvPr id="3" name="Notes Placeholder 2"/>
+          <p:cNvSpPr>
+            <a:spLocks noGrp="1"/>
+          </p:cNvSpPr>
+          <p:nvPr>
+            <p:ph type="body"/>
+          </p:nvPr>
+        </p:nvSpPr>
+        <p:spPr/>
+        <p:txBody>
+          <a:bodyPr/>
+          <a:lstStyle/>
+          <a:p>
+            <a:r>
+              <a:t>[Blok 2 - de verdeling] Op hun data: 4838 van de 6750 handen vallen</a:t>
+            </a:r>
+          </a:p>
+          <a:p>
+            <a:r>
+              <a:t>tussen 0 en 20 chips. 1488 tussen -20 en -1. En dan de staarten: 53 handen tussen</a:t>
+            </a:r>
+          </a:p>
+          <a:p>
+            <a:r>
+              <a:t>-100 en -20, negen onder de -200, zeven boven de +200.</a:t>
+            </a:r>
+          </a:p>
+          <a:p/>
+          <a:p>
+            <a:r>
+              <a:t>Die ene piek rond nul zijn handen die zijn weggelegd zonder in de blinds te zitten.</a:t>
+            </a:r>
+          </a:p>
+          <a:p>
+            <a:r>
+              <a:t>Het echte spel zit in de zeven handen rechts. Vraag aan de zaal: welk van de vier</a:t>
+            </a:r>
+          </a:p>
+          <a:p>
+            <a:r>
+              <a:t>getallen van de vorige dia had je dat verteld? Geen enkel.</a:t>
+            </a:r>
+          </a:p>
+        </p:txBody>
+      </p:sp>
+      <p:sp>
+        <p:nvSpPr>
+          <p:cNvPr id="4" name="Slide Number Placeholder 3"/>
+          <p:cNvSpPr>
+            <a:spLocks noGrp="1"/>
+          </p:cNvSpPr>
+          <p:nvPr>
+            <p:ph type="sldNum"/>
+          </p:nvPr>
+        </p:nvSpPr>
+        <p:spPr/>
+      </p:sp>
+    </p:spTree>
+  </p:cSld>
+  <p:clrMapOvr>
+    <a:masterClrMapping/>
+  </p:clrMapOvr>
+</p:notes>
+</file>
+
+<file path=ppt/notesSlides/notesSlide17.xml><?xml version="1.0" encoding="utf-8"?>
+<p:notes xmlns:a="http://schemas.openxmlformats.org/drawingml/2006/main" xmlns:p="http://schemas.openxmlformats.org/presentationml/2006/main" xmlns:r="http://schemas.openxmlformats.org/officeDocument/2006/relationships">
+  <p:cSld>
+    <p:spTree>
+      <p:nvGrpSpPr>
+        <p:cNvPr id="1" name=""/>
+        <p:cNvGrpSpPr/>
+        <p:nvPr/>
+      </p:nvGrpSpPr>
+      <p:grpSpPr>
+        <a:xfrm>
+          <a:off x="0" y="0"/>
+          <a:ext cx="0" cy="0"/>
+          <a:chOff x="0" y="0"/>
+          <a:chExt cx="0" cy="0"/>
+        </a:xfrm>
+      </p:grpSpPr>
+      <p:sp>
+        <p:nvSpPr>
+          <p:cNvPr id="2" name="Slide Image Placeholder 1"/>
+          <p:cNvSpPr>
+            <a:spLocks noGrp="1"/>
+          </p:cNvSpPr>
+          <p:nvPr>
+            <p:ph type="sldImg"/>
+          </p:nvPr>
+        </p:nvSpPr>
+        <p:spPr/>
+      </p:sp>
+      <p:sp>
+        <p:nvSpPr>
+          <p:cNvPr id="3" name="Notes Placeholder 2"/>
+          <p:cNvSpPr>
+            <a:spLocks noGrp="1"/>
+          </p:cNvSpPr>
+          <p:nvPr>
+            <p:ph type="body"/>
+          </p:nvPr>
+        </p:nvSpPr>
+        <p:spPr/>
+        <p:txBody>
+          <a:bodyPr/>
+          <a:lstStyle/>
+          <a:p>
+            <a:r>
+              <a:t>[Central tendency] Hier maakt de keuze het verschil tussen twee conclusies,</a:t>
+            </a:r>
+          </a:p>
+          <a:p>
+            <a:r>
+              <a:t>en dat kun je op hun data laten zien. Gemiddelde winst per hand: 0. Mediaan: 0.</a:t>
+            </a:r>
+          </a:p>
+          <a:p>
+            <a:r>
+              <a:t>Allebei nul, allebei waar, en samen verbergen ze een hand van +1750.</a:t>
+            </a:r>
+          </a:p>
+          <a:p/>
+          <a:p>
+            <a:r>
+              <a:t>Bij de bots ligt het andersom: de mediaan van de eindstand is 946, het gemiddelde</a:t>
+            </a:r>
+          </a:p>
+          <a:p>
+            <a:r>
+              <a:t>1000 (want nulsom). Dat verschil van 54 chips is de scheefheid - een paar bots</a:t>
+            </a:r>
+          </a:p>
+          <a:p>
+            <a:r>
+              <a:t>hebben veel, de meeste iets minder dan waarmee ze begonnen.</a:t>
+            </a:r>
+          </a:p>
+        </p:txBody>
+      </p:sp>
+      <p:sp>
+        <p:nvSpPr>
+          <p:cNvPr id="4" name="Slide Number Placeholder 3"/>
+          <p:cNvSpPr>
+            <a:spLocks noGrp="1"/>
+          </p:cNvSpPr>
+          <p:nvPr>
+            <p:ph type="sldNum"/>
+          </p:nvPr>
+        </p:nvSpPr>
+        <p:spPr/>
+      </p:sp>
+    </p:spTree>
+  </p:cSld>
+  <p:clrMapOvr>
+    <a:masterClrMapping/>
+  </p:clrMapOvr>
+</p:notes>
+</file>
+
+<file path=ppt/notesSlides/notesSlide18.xml><?xml version="1.0" encoding="utf-8"?>
+<p:notes xmlns:a="http://schemas.openxmlformats.org/drawingml/2006/main" xmlns:p="http://schemas.openxmlformats.org/presentationml/2006/main" xmlns:r="http://schemas.openxmlformats.org/officeDocument/2006/relationships">
+  <p:cSld>
+    <p:spTree>
+      <p:nvGrpSpPr>
+        <p:cNvPr id="1" name=""/>
+        <p:cNvGrpSpPr/>
+        <p:nvPr/>
+      </p:nvGrpSpPr>
+      <p:grpSpPr>
+        <a:xfrm>
+          <a:off x="0" y="0"/>
+          <a:ext cx="0" cy="0"/>
+          <a:chOff x="0" y="0"/>
+          <a:chExt cx="0" cy="0"/>
+        </a:xfrm>
+      </p:grpSpPr>
+      <p:sp>
+        <p:nvSpPr>
+          <p:cNvPr id="2" name="Slide Image Placeholder 1"/>
+          <p:cNvSpPr>
+            <a:spLocks noGrp="1"/>
+          </p:cNvSpPr>
+          <p:nvPr>
+            <p:ph type="sldImg"/>
+          </p:nvPr>
+        </p:nvSpPr>
+        <p:spPr/>
+      </p:sp>
+      <p:sp>
+        <p:nvSpPr>
+          <p:cNvPr id="3" name="Notes Placeholder 2"/>
+          <p:cNvSpPr>
+            <a:spLocks noGrp="1"/>
+          </p:cNvSpPr>
+          <p:nvPr>
+            <p:ph type="body"/>
+          </p:nvPr>
+        </p:nvSpPr>
+        <p:spPr/>
+        <p:txBody>
+          <a:bodyPr/>
+          <a:lstStyle/>
+          <a:p>
+            <a:r>
+              <a:t>[Filteren] De twee filters uit de demo:</a:t>
+            </a:r>
+          </a:p>
+          <a:p/>
+          <a:p>
+            <a:r>
+              <a:t>  handen[handen["bot_naam"] == "500959250"]      -- rijen op inhoud</a:t>
+            </a:r>
+          </a:p>
+          <a:p>
+            <a:r>
+              <a:t>  handen.loc[handen["aan_zet"], "actie"]         -- boolean mask</a:t>
+            </a:r>
+          </a:p>
+          <a:p/>
+          <a:p>
+            <a:r>
+              <a:t>Die tweede is de belangrijkste regel van het college. aan_zet is een kolom vol</a:t>
+            </a:r>
+          </a:p>
+          <a:p>
+            <a:r>
+              <a:t>True/False; in .loc zetten houdt alleen de rijen waar hij True is. 928 van de 6750</a:t>
+            </a:r>
+          </a:p>
+          <a:p>
+            <a:r>
+              <a:t>logregels zijn handen waarin de bot nooit iets koos - hij zat in de blinds en de</a:t>
+            </a:r>
+          </a:p>
+          <a:p>
+            <a:r>
+              <a:t>hand was al voorbij.</a:t>
+            </a:r>
+          </a:p>
+        </p:txBody>
+      </p:sp>
+      <p:sp>
+        <p:nvSpPr>
+          <p:cNvPr id="4" name="Slide Number Placeholder 3"/>
+          <p:cNvSpPr>
+            <a:spLocks noGrp="1"/>
+          </p:cNvSpPr>
+          <p:nvPr>
+            <p:ph type="sldNum"/>
+          </p:nvPr>
+        </p:nvSpPr>
+        <p:spPr/>
+      </p:sp>
+    </p:spTree>
+  </p:cSld>
+  <p:clrMapOvr>
+    <a:masterClrMapping/>
+  </p:clrMapOvr>
+</p:notes>
+</file>
+
+<file path=ppt/notesSlides/notesSlide19.xml><?xml version="1.0" encoding="utf-8"?>
+<p:notes xmlns:a="http://schemas.openxmlformats.org/drawingml/2006/main" xmlns:p="http://schemas.openxmlformats.org/presentationml/2006/main" xmlns:r="http://schemas.openxmlformats.org/officeDocument/2006/relationships">
+  <p:cSld>
+    <p:spTree>
+      <p:nvGrpSpPr>
+        <p:cNvPr id="1" name=""/>
+        <p:cNvGrpSpPr/>
+        <p:nvPr/>
+      </p:nvGrpSpPr>
+      <p:grpSpPr>
+        <a:xfrm>
+          <a:off x="0" y="0"/>
+          <a:ext cx="0" cy="0"/>
+          <a:chOff x="0" y="0"/>
+          <a:chExt cx="0" cy="0"/>
+        </a:xfrm>
+      </p:grpSpPr>
+      <p:sp>
+        <p:nvSpPr>
+          <p:cNvPr id="2" name="Slide Image Placeholder 1"/>
+          <p:cNvSpPr>
+            <a:spLocks noGrp="1"/>
+          </p:cNvSpPr>
+          <p:nvPr>
+            <p:ph type="sldImg"/>
+          </p:nvPr>
+        </p:nvSpPr>
+        <p:spPr/>
+      </p:sp>
+      <p:sp>
+        <p:nvSpPr>
+          <p:cNvPr id="3" name="Notes Placeholder 2"/>
+          <p:cNvSpPr>
+            <a:spLocks noGrp="1"/>
+          </p:cNvSpPr>
+          <p:nvPr>
+            <p:ph type="body"/>
+          </p:nvPr>
+        </p:nvSpPr>
+        <p:spPr/>
+        <p:txBody>
+          <a:bodyPr/>
+          <a:lstStyle/>
+          <a:p>
+            <a:r>
+              <a:t>[Nieuwe variabelen] De winst-kolom is hier het voorbeeld, en hij komt</a:t>
+            </a:r>
+          </a:p>
+          <a:p>
+            <a:r>
+              <a:t>niet uit het log maar reken je zelf uit:</a:t>
+            </a:r>
+          </a:p>
+          <a:p/>
+          <a:p>
+            <a:r>
+              <a:t>  handen["winst"] = handen.groupby(["bot_naam","simulatie"])["stack"].diff()</a:t>
+            </a:r>
+          </a:p>
+          <a:p>
+            <a:r>
+              <a:t>                          .fillna(handen["stack"] - 1000)</a:t>
+            </a:r>
+          </a:p>
+          <a:p/>
+          <a:p>
+            <a:r>
+              <a:t>Het log bewaart de stack NA elke hand, dus winst is het verschil met de hand</a:t>
+            </a:r>
+          </a:p>
+          <a:p>
+            <a:r>
+              <a:t>ervoor. Twee dingen die misgaan: groeperen zonder simulatie (dan trek je de</a:t>
+            </a:r>
+          </a:p>
+          <a:p>
+            <a:r>
+              <a:t>eerste hand van zitting 1 af van de laatste van zitting 0), en de NaN van de</a:t>
+            </a:r>
+          </a:p>
+          <a:p>
+            <a:r>
+              <a:t>eerste hand laten staan.</a:t>
+            </a:r>
+          </a:p>
+          <a:p/>
+          <a:p>
+            <a:r>
+              <a:t>Controle: alle winst samen is precies 0.</a:t>
+            </a:r>
+          </a:p>
+        </p:txBody>
+      </p:sp>
+      <p:sp>
+        <p:nvSpPr>
+          <p:cNvPr id="4" name="Slide Number Placeholder 3"/>
+          <p:cNvSpPr>
+            <a:spLocks noGrp="1"/>
+          </p:cNvSpPr>
+          <p:nvPr>
+            <p:ph type="sldNum"/>
+          </p:nvPr>
+        </p:nvSpPr>
+        <p:spPr/>
+      </p:sp>
+    </p:spTree>
+  </p:cSld>
+  <p:clrMapOvr>
+    <a:masterClrMapping/>
+  </p:clrMapOvr>
+</p:notes>
+</file>
+
 <file path=ppt/notesSlides/notesSlide2.xml><?xml version="1.0" encoding="utf-8"?>
 <p:notes xmlns:a="http://schemas.openxmlformats.org/drawingml/2006/main" xmlns:r="http://schemas.openxmlformats.org/officeDocument/2006/relationships" xmlns:p="http://schemas.openxmlformats.org/presentationml/2006/main">
   <p:cSld>
@@ -2120,9 +3063,29 @@
           </a:bodyPr>
           <a:lstStyle/>
           <a:p>
-            <a:endParaRPr lang="en-US" sz="2000" b="0" strike="noStrike" spc="-1">
-              <a:latin typeface="Calibri"/>
-            </a:endParaRPr>
+            <a:r>
+              <a:t>[np.random] Dit is precies wat schat_winkans() doet. Je kunt de winkans</a:t>
+            </a:r>
+          </a:p>
+          <a:p>
+            <a:r>
+              <a:t>van A-K tegen vijf tegenstanders niet uitrekenen met een formule; je deelt duizend</a:t>
+            </a:r>
+          </a:p>
+          <a:p>
+            <a:r>
+              <a:t>keer willekeurige kaarten en telt hoe vaak je wint. Een verdeling maken om een</a:t>
+            </a:r>
+          </a:p>
+          <a:p>
+            <a:r>
+              <a:t>getal te schatten dat je niet kunt afleiden - dat is Monte Carlo, en dat zit al</a:t>
+            </a:r>
+          </a:p>
+          <a:p>
+            <a:r>
+              <a:t>sinds werkcollege 4 in hun bot.</a:t>
+            </a:r>
           </a:p>
         </p:txBody>
       </p:sp>
@@ -2183,6 +3146,212 @@
             </a:endParaRPr>
           </a:p>
         </p:txBody>
+      </p:sp>
+    </p:spTree>
+  </p:cSld>
+  <p:clrMapOvr>
+    <a:masterClrMapping/>
+  </p:clrMapOvr>
+</p:notes>
+</file>
+
+<file path=ppt/notesSlides/notesSlide20.xml><?xml version="1.0" encoding="utf-8"?>
+<p:notes xmlns:a="http://schemas.openxmlformats.org/drawingml/2006/main" xmlns:p="http://schemas.openxmlformats.org/presentationml/2006/main" xmlns:r="http://schemas.openxmlformats.org/officeDocument/2006/relationships">
+  <p:cSld>
+    <p:spTree>
+      <p:nvGrpSpPr>
+        <p:cNvPr id="1" name=""/>
+        <p:cNvGrpSpPr/>
+        <p:nvPr/>
+      </p:nvGrpSpPr>
+      <p:grpSpPr>
+        <a:xfrm>
+          <a:off x="0" y="0"/>
+          <a:ext cx="0" cy="0"/>
+          <a:chOff x="0" y="0"/>
+          <a:chExt cx="0" cy="0"/>
+        </a:xfrm>
+      </p:grpSpPr>
+      <p:sp>
+        <p:nvSpPr>
+          <p:cNvPr id="2" name="Slide Image Placeholder 1"/>
+          <p:cNvSpPr>
+            <a:spLocks noGrp="1"/>
+          </p:cNvSpPr>
+          <p:nvPr>
+            <p:ph type="sldImg"/>
+          </p:nvPr>
+        </p:nvSpPr>
+        <p:spPr/>
+      </p:sp>
+      <p:sp>
+        <p:nvSpPr>
+          <p:cNvPr id="3" name="Notes Placeholder 2"/>
+          <p:cNvSpPr>
+            <a:spLocks noGrp="1"/>
+          </p:cNvSpPr>
+          <p:nvPr>
+            <p:ph type="body"/>
+          </p:nvPr>
+        </p:nvSpPr>
+        <p:spPr/>
+        <p:txBody>
+          <a:bodyPr/>
+          <a:lstStyle/>
+          <a:p>
+            <a:r>
+              <a:t>[Groupby] Een-op-een met de vorige dia:</a:t>
+            </a:r>
+          </a:p>
+          <a:p/>
+          <a:p>
+            <a:r>
+              <a:t>  gapminder.groupby('continent')['pop'].sum()</a:t>
+            </a:r>
+          </a:p>
+          <a:p>
+            <a:r>
+              <a:t>  handen.groupby('bot_naam')['winst'].sum()</a:t>
+            </a:r>
+          </a:p>
+          <a:p/>
+          <a:p>
+            <a:r>
+              <a:t>Letterlijk dezelfde regel. En dan de valkuil, die je moet laten zien:</a:t>
+            </a:r>
+          </a:p>
+          <a:p/>
+          <a:p>
+            <a:r>
+              <a:t>  handen.groupby('bot_naam')['stack'].sum()   -&gt;  258.550 chips</a:t>
+            </a:r>
+          </a:p>
+          <a:p/>
+          <a:p>
+            <a:r>
+              <a:t>Geen foutmelding, keurig getal, volslagen onzin. Een stack is een STAND, geen</a:t>
+            </a:r>
+          </a:p>
+          <a:p>
+            <a:r>
+              <a:t>stroom. Dat over 250 handen optellen is hetzelfde als de bevolking van Europa</a:t>
+            </a:r>
+          </a:p>
+          <a:p>
+            <a:r>
+              <a:t>over alle twaalf gapminder-jaren optellen. Voor een stand wil je .last().</a:t>
+            </a:r>
+          </a:p>
+        </p:txBody>
+      </p:sp>
+      <p:sp>
+        <p:nvSpPr>
+          <p:cNvPr id="4" name="Slide Number Placeholder 3"/>
+          <p:cNvSpPr>
+            <a:spLocks noGrp="1"/>
+          </p:cNvSpPr>
+          <p:nvPr>
+            <p:ph type="sldNum"/>
+          </p:nvPr>
+        </p:nvSpPr>
+        <p:spPr/>
+      </p:sp>
+    </p:spTree>
+  </p:cSld>
+  <p:clrMapOvr>
+    <a:masterClrMapping/>
+  </p:clrMapOvr>
+</p:notes>
+</file>
+
+<file path=ppt/notesSlides/notesSlide21.xml><?xml version="1.0" encoding="utf-8"?>
+<p:notes xmlns:a="http://schemas.openxmlformats.org/drawingml/2006/main" xmlns:p="http://schemas.openxmlformats.org/presentationml/2006/main" xmlns:r="http://schemas.openxmlformats.org/officeDocument/2006/relationships">
+  <p:cSld>
+    <p:spTree>
+      <p:nvGrpSpPr>
+        <p:cNvPr id="1" name=""/>
+        <p:cNvGrpSpPr/>
+        <p:nvPr/>
+      </p:nvGrpSpPr>
+      <p:grpSpPr>
+        <a:xfrm>
+          <a:off x="0" y="0"/>
+          <a:ext cx="0" cy="0"/>
+          <a:chOff x="0" y="0"/>
+          <a:chExt cx="0" cy="0"/>
+        </a:xfrm>
+      </p:grpSpPr>
+      <p:sp>
+        <p:nvSpPr>
+          <p:cNvPr id="2" name="Slide Image Placeholder 1"/>
+          <p:cNvSpPr>
+            <a:spLocks noGrp="1"/>
+          </p:cNvSpPr>
+          <p:nvPr>
+            <p:ph type="sldImg"/>
+          </p:nvPr>
+        </p:nvSpPr>
+        <p:spPr/>
+      </p:sp>
+      <p:sp>
+        <p:nvSpPr>
+          <p:cNvPr id="3" name="Notes Placeholder 2"/>
+          <p:cNvSpPr>
+            <a:spLocks noGrp="1"/>
+          </p:cNvSpPr>
+          <p:nvPr>
+            <p:ph type="body"/>
+          </p:nvPr>
+        </p:nvSpPr>
+        <p:spPr/>
+        <p:txBody>
+          <a:bodyPr/>
+          <a:lstStyle/>
+          <a:p>
+            <a:r>
+              <a:t>[Opdracht] De opdracht is dit jaar niet gapminder maar hun eigen</a:t>
+            </a:r>
+          </a:p>
+          <a:p>
+            <a:r>
+              <a:t>toernooi: 03_demo_college_toernooi.ipynb. Dezelfde acht bewerkingen, hun eigen data.</a:t>
+            </a:r>
+          </a:p>
+          <a:p/>
+          <a:p>
+            <a:r>
+              <a:t>Ze hebben hun token nodig. Wie dat kwijt is pakt toernooi_week3.json van</a:t>
+            </a:r>
+          </a:p>
+          <a:p>
+            <a:r>
+              <a:t>Brightspace. Reken op vijf minuten opstarten - de eerste API-aanroep wekt de server.</a:t>
+            </a:r>
+          </a:p>
+          <a:p/>
+          <a:p>
+            <a:r>
+              <a:t>De drie TODO's onderaan zijn de kern: eindstand als tabel, fold% per bot, en</a:t>
+            </a:r>
+          </a:p>
+          <a:p>
+            <a:r>
+              <a:t>.corr() tussen die twee. Uitwerkingen staan in 03_demo_college_uitwerkingen.ipynb.</a:t>
+            </a:r>
+          </a:p>
+        </p:txBody>
+      </p:sp>
+      <p:sp>
+        <p:nvSpPr>
+          <p:cNvPr id="4" name="Slide Number Placeholder 3"/>
+          <p:cNvSpPr>
+            <a:spLocks noGrp="1"/>
+          </p:cNvSpPr>
+          <p:nvPr>
+            <p:ph type="sldNum"/>
+          </p:nvPr>
+        </p:nvSpPr>
+        <p:spPr/>
       </p:sp>
     </p:spTree>
   </p:cSld>
@@ -2317,6 +3486,568 @@
             </a:endParaRPr>
           </a:p>
         </p:txBody>
+      </p:sp>
+    </p:spTree>
+  </p:cSld>
+  <p:clrMapOvr>
+    <a:masterClrMapping/>
+  </p:clrMapOvr>
+</p:notes>
+</file>
+
+<file path=ppt/notesSlides/notesSlide4.xml><?xml version="1.0" encoding="utf-8"?>
+<p:notes xmlns:a="http://schemas.openxmlformats.org/drawingml/2006/main" xmlns:p="http://schemas.openxmlformats.org/presentationml/2006/main" xmlns:r="http://schemas.openxmlformats.org/officeDocument/2006/relationships">
+  <p:cSld>
+    <p:spTree>
+      <p:nvGrpSpPr>
+        <p:cNvPr id="1" name=""/>
+        <p:cNvGrpSpPr/>
+        <p:nvPr/>
+      </p:nvGrpSpPr>
+      <p:grpSpPr>
+        <a:xfrm>
+          <a:off x="0" y="0"/>
+          <a:ext cx="0" cy="0"/>
+          <a:chOff x="0" y="0"/>
+          <a:chExt cx="0" cy="0"/>
+        </a:xfrm>
+      </p:grpSpPr>
+      <p:sp>
+        <p:nvSpPr>
+          <p:cNvPr id="2" name="Slide Image Placeholder 1"/>
+          <p:cNvSpPr>
+            <a:spLocks noGrp="1"/>
+          </p:cNvSpPr>
+          <p:nvPr>
+            <p:ph type="sldImg"/>
+          </p:nvPr>
+        </p:nvSpPr>
+        <p:spPr/>
+      </p:sp>
+      <p:sp>
+        <p:nvSpPr>
+          <p:cNvPr id="3" name="Notes Placeholder 2"/>
+          <p:cNvSpPr>
+            <a:spLocks noGrp="1"/>
+          </p:cNvSpPr>
+          <p:nvPr>
+            <p:ph type="body"/>
+          </p:nvPr>
+        </p:nvSpPr>
+        <p:spPr/>
+        <p:txBody>
+          <a:bodyPr/>
+          <a:lstStyle/>
+          <a:p>
+            <a:r>
+              <a:t>Kort houden - dit is de kaart, niet de reis.</a:t>
+            </a:r>
+          </a:p>
+          <a:p>
+            <a:r>
+              <a:t>Het enige dat ze moeten onthouden: winkans en pot odds naast elkaar is de</a:t>
+            </a:r>
+          </a:p>
+          <a:p>
+            <a:r>
+              <a:t>beslisregel, en dat is de hele week. De rest is gereedschap om die regel te maken.</a:t>
+            </a:r>
+          </a:p>
+        </p:txBody>
+      </p:sp>
+      <p:sp>
+        <p:nvSpPr>
+          <p:cNvPr id="4" name="Slide Number Placeholder 3"/>
+          <p:cNvSpPr>
+            <a:spLocks noGrp="1"/>
+          </p:cNvSpPr>
+          <p:nvPr>
+            <p:ph type="sldNum"/>
+          </p:nvPr>
+        </p:nvSpPr>
+        <p:spPr/>
+      </p:sp>
+    </p:spTree>
+  </p:cSld>
+  <p:clrMapOvr>
+    <a:masterClrMapping/>
+  </p:clrMapOvr>
+</p:notes>
+</file>
+
+<file path=ppt/notesSlides/notesSlide5.xml><?xml version="1.0" encoding="utf-8"?>
+<p:notes xmlns:a="http://schemas.openxmlformats.org/drawingml/2006/main" xmlns:p="http://schemas.openxmlformats.org/presentationml/2006/main" xmlns:r="http://schemas.openxmlformats.org/officeDocument/2006/relationships">
+  <p:cSld>
+    <p:spTree>
+      <p:nvGrpSpPr>
+        <p:cNvPr id="1" name=""/>
+        <p:cNvGrpSpPr/>
+        <p:nvPr/>
+      </p:nvGrpSpPr>
+      <p:grpSpPr>
+        <a:xfrm>
+          <a:off x="0" y="0"/>
+          <a:ext cx="0" cy="0"/>
+          <a:chOff x="0" y="0"/>
+          <a:chExt cx="0" cy="0"/>
+        </a:xfrm>
+      </p:grpSpPr>
+      <p:sp>
+        <p:nvSpPr>
+          <p:cNvPr id="2" name="Slide Image Placeholder 1"/>
+          <p:cNvSpPr>
+            <a:spLocks noGrp="1"/>
+          </p:cNvSpPr>
+          <p:nvPr>
+            <p:ph type="sldImg"/>
+          </p:nvPr>
+        </p:nvSpPr>
+        <p:spPr/>
+      </p:sp>
+      <p:sp>
+        <p:nvSpPr>
+          <p:cNvPr id="3" name="Notes Placeholder 2"/>
+          <p:cNvSpPr>
+            <a:spLocks noGrp="1"/>
+          </p:cNvSpPr>
+          <p:nvPr>
+            <p:ph type="body"/>
+          </p:nvPr>
+        </p:nvSpPr>
+        <p:spPr/>
+        <p:txBody>
+          <a:bodyPr/>
+          <a:lstStyle/>
+          <a:p>
+            <a:r>
+              <a:t>Dit is de grens van week 3,</a:t>
+            </a:r>
+          </a:p>
+          <a:p>
+            <a:r>
+              <a:t>en het is een bewuste grens. Preflop-winkansen veranderen nooit, dus 169 starthanden</a:t>
+            </a:r>
+          </a:p>
+          <a:p>
+            <a:r>
+              <a:t>kun je een keer uitrekenen en in een dictionary plakken. Daarom kon het.</a:t>
+            </a:r>
+          </a:p>
+          <a:p/>
+          <a:p>
+            <a:r>
+              <a:t>Vraag die altijd komt: ziet mijn bot het bord? Nee. Twee kaarten, elke straat, de</a:t>
+            </a:r>
+          </a:p>
+          <a:p>
+            <a:r>
+              <a:t>hele hand lang. Dat is deze week zo en dat verandert in week 5.</a:t>
+            </a:r>
+          </a:p>
+        </p:txBody>
+      </p:sp>
+      <p:sp>
+        <p:nvSpPr>
+          <p:cNvPr id="4" name="Slide Number Placeholder 3"/>
+          <p:cNvSpPr>
+            <a:spLocks noGrp="1"/>
+          </p:cNvSpPr>
+          <p:nvPr>
+            <p:ph type="sldNum"/>
+          </p:nvPr>
+        </p:nvSpPr>
+        <p:spPr/>
+      </p:sp>
+    </p:spTree>
+  </p:cSld>
+  <p:clrMapOvr>
+    <a:masterClrMapping/>
+  </p:clrMapOvr>
+</p:notes>
+</file>
+
+<file path=ppt/notesSlides/notesSlide6.xml><?xml version="1.0" encoding="utf-8"?>
+<p:notes xmlns:a="http://schemas.openxmlformats.org/drawingml/2006/main" xmlns:p="http://schemas.openxmlformats.org/presentationml/2006/main" xmlns:r="http://schemas.openxmlformats.org/officeDocument/2006/relationships">
+  <p:cSld>
+    <p:spTree>
+      <p:nvGrpSpPr>
+        <p:cNvPr id="1" name=""/>
+        <p:cNvGrpSpPr/>
+        <p:nvPr/>
+      </p:nvGrpSpPr>
+      <p:grpSpPr>
+        <a:xfrm>
+          <a:off x="0" y="0"/>
+          <a:ext cx="0" cy="0"/>
+          <a:chOff x="0" y="0"/>
+          <a:chExt cx="0" cy="0"/>
+        </a:xfrm>
+      </p:grpSpPr>
+      <p:sp>
+        <p:nvSpPr>
+          <p:cNvPr id="2" name="Slide Image Placeholder 1"/>
+          <p:cNvSpPr>
+            <a:spLocks noGrp="1"/>
+          </p:cNvSpPr>
+          <p:nvPr>
+            <p:ph type="sldImg"/>
+          </p:nvPr>
+        </p:nvSpPr>
+        <p:spPr/>
+      </p:sp>
+      <p:sp>
+        <p:nvSpPr>
+          <p:cNvPr id="3" name="Notes Placeholder 2"/>
+          <p:cNvSpPr>
+            <a:spLocks noGrp="1"/>
+          </p:cNvSpPr>
+          <p:nvPr>
+            <p:ph type="body"/>
+          </p:nvPr>
+        </p:nvSpPr>
+        <p:spPr/>
+        <p:txBody>
+          <a:bodyPr/>
+          <a:lstStyle/>
+          <a:p>
+            <a:r>
+              <a:t>De kleur is hier het punt, niet de</a:t>
+            </a:r>
+          </a:p>
+          <a:p>
+            <a:r>
+              <a:t>techniek. Zelfde rangen, bord met drie schoppen: 36,6% tegen 8,0%. Op de river 94,1%</a:t>
+            </a:r>
+          </a:p>
+          <a:p>
+            <a:r>
+              <a:t>tegen 0,0%. Dezelfde kaarten qua waarde, een compleet andere hand.</a:t>
+            </a:r>
+          </a:p>
+          <a:p/>
+          <a:p>
+            <a:r>
+              <a:t>En de opzoektabel houdt op te werken: binnen "een paar" op de flop loopt de echte</a:t>
+            </a:r>
+          </a:p>
+          <a:p>
+            <a:r>
+              <a:t>winkans van 8,5% tot 75,5%. Elke tabelwaarde zit in beide richtingen ver mis.</a:t>
+            </a:r>
+          </a:p>
+        </p:txBody>
+      </p:sp>
+      <p:sp>
+        <p:nvSpPr>
+          <p:cNvPr id="4" name="Slide Number Placeholder 3"/>
+          <p:cNvSpPr>
+            <a:spLocks noGrp="1"/>
+          </p:cNvSpPr>
+          <p:nvPr>
+            <p:ph type="sldNum"/>
+          </p:nvPr>
+        </p:nvSpPr>
+        <p:spPr/>
+      </p:sp>
+    </p:spTree>
+  </p:cSld>
+  <p:clrMapOvr>
+    <a:masterClrMapping/>
+  </p:clrMapOvr>
+</p:notes>
+</file>
+
+<file path=ppt/notesSlides/notesSlide7.xml><?xml version="1.0" encoding="utf-8"?>
+<p:notes xmlns:a="http://schemas.openxmlformats.org/drawingml/2006/main" xmlns:p="http://schemas.openxmlformats.org/presentationml/2006/main" xmlns:r="http://schemas.openxmlformats.org/officeDocument/2006/relationships">
+  <p:cSld>
+    <p:spTree>
+      <p:nvGrpSpPr>
+        <p:cNvPr id="1" name=""/>
+        <p:cNvGrpSpPr/>
+        <p:nvPr/>
+      </p:nvGrpSpPr>
+      <p:grpSpPr>
+        <a:xfrm>
+          <a:off x="0" y="0"/>
+          <a:ext cx="0" cy="0"/>
+          <a:chOff x="0" y="0"/>
+          <a:chExt cx="0" cy="0"/>
+        </a:xfrm>
+      </p:grpSpPr>
+      <p:sp>
+        <p:nvSpPr>
+          <p:cNvPr id="2" name="Slide Image Placeholder 1"/>
+          <p:cNvSpPr>
+            <a:spLocks noGrp="1"/>
+          </p:cNvSpPr>
+          <p:nvPr>
+            <p:ph type="sldImg"/>
+          </p:nvPr>
+        </p:nvSpPr>
+        <p:spPr/>
+      </p:sp>
+      <p:sp>
+        <p:nvSpPr>
+          <p:cNvPr id="3" name="Notes Placeholder 2"/>
+          <p:cNvSpPr>
+            <a:spLocks noGrp="1"/>
+          </p:cNvSpPr>
+          <p:nvPr>
+            <p:ph type="body"/>
+          </p:nvPr>
+        </p:nvSpPr>
+        <p:spPr/>
+        <p:txBody>
+          <a:bodyPr/>
+          <a:lstStyle/>
+          <a:p>
+            <a:r>
+              <a:t>Loop de verplichte regel langzaam langs. De</a:t>
+            </a:r>
+          </a:p>
+          <a:p>
+            <a:r>
+              <a:t>engine kijkt naar je PARAMETERNAMEN; verkeerd gespeld betekent dat je die informatie</a:t>
+            </a:r>
+          </a:p>
+          <a:p>
+            <a:r>
+              <a:t>niet krijgt, zonder foutmelding. Dat is de stilste fout in het hele vak.</a:t>
+            </a:r>
+          </a:p>
+        </p:txBody>
+      </p:sp>
+      <p:sp>
+        <p:nvSpPr>
+          <p:cNvPr id="4" name="Slide Number Placeholder 3"/>
+          <p:cNvSpPr>
+            <a:spLocks noGrp="1"/>
+          </p:cNvSpPr>
+          <p:nvPr>
+            <p:ph type="sldNum"/>
+          </p:nvPr>
+        </p:nvSpPr>
+        <p:spPr/>
+      </p:sp>
+    </p:spTree>
+  </p:cSld>
+  <p:clrMapOvr>
+    <a:masterClrMapping/>
+  </p:clrMapOvr>
+</p:notes>
+</file>
+
+<file path=ppt/notesSlides/notesSlide8.xml><?xml version="1.0" encoding="utf-8"?>
+<p:notes xmlns:a="http://schemas.openxmlformats.org/drawingml/2006/main" xmlns:p="http://schemas.openxmlformats.org/presentationml/2006/main" xmlns:r="http://schemas.openxmlformats.org/officeDocument/2006/relationships">
+  <p:cSld>
+    <p:spTree>
+      <p:nvGrpSpPr>
+        <p:cNvPr id="1" name=""/>
+        <p:cNvGrpSpPr/>
+        <p:nvPr/>
+      </p:nvGrpSpPr>
+      <p:grpSpPr>
+        <a:xfrm>
+          <a:off x="0" y="0"/>
+          <a:ext cx="0" cy="0"/>
+          <a:chOff x="0" y="0"/>
+          <a:chExt cx="0" cy="0"/>
+        </a:xfrm>
+      </p:grpSpPr>
+      <p:sp>
+        <p:nvSpPr>
+          <p:cNvPr id="2" name="Slide Image Placeholder 1"/>
+          <p:cNvSpPr>
+            <a:spLocks noGrp="1"/>
+          </p:cNvSpPr>
+          <p:nvPr>
+            <p:ph type="sldImg"/>
+          </p:nvPr>
+        </p:nvSpPr>
+        <p:spPr/>
+      </p:sp>
+      <p:sp>
+        <p:nvSpPr>
+          <p:cNvPr id="3" name="Notes Placeholder 2"/>
+          <p:cNvSpPr>
+            <a:spLocks noGrp="1"/>
+          </p:cNvSpPr>
+          <p:nvPr>
+            <p:ph type="body"/>
+          </p:nvPr>
+        </p:nvSpPr>
+        <p:spPr/>
+        <p:txBody>
+          <a:bodyPr/>
+          <a:lstStyle/>
+          <a:p>
+            <a:r>
+              <a:t>[Blok 3 - het gesprek van vandaag] Laat ze de</a:t>
+            </a:r>
+          </a:p>
+          <a:p>
+            <a:r>
+              <a:t>tabel zelf lezen voordat je iets zegt.</a:t>
+            </a:r>
+          </a:p>
+          <a:p/>
+          <a:p>
+            <a:r>
+              <a:t>De vraag is niet "waarom foldt de klas zoveel" maar "waarom levert elke andere actie</a:t>
+            </a:r>
+          </a:p>
+          <a:p>
+            <a:r>
+              <a:t>gemiddeld geld op, en doet niemand het". Antwoord: aan een tafel van folders wint de</a:t>
+            </a:r>
+          </a:p>
+          <a:p>
+            <a:r>
+              <a:t>big blind de small blind. Folden kost je bijna niets - en levert je ook niets op.</a:t>
+            </a:r>
+          </a:p>
+          <a:p/>
+          <a:p>
+            <a:r>
+              <a:t>Let op bij het navolgen: filter op aan_zet, anders tel je handen mee waarin de bot</a:t>
+            </a:r>
+          </a:p>
+          <a:p>
+            <a:r>
+              <a:t>nooit iets koos en komt elk percentage te laag uit.</a:t>
+            </a:r>
+          </a:p>
+        </p:txBody>
+      </p:sp>
+      <p:sp>
+        <p:nvSpPr>
+          <p:cNvPr id="4" name="Slide Number Placeholder 3"/>
+          <p:cNvSpPr>
+            <a:spLocks noGrp="1"/>
+          </p:cNvSpPr>
+          <p:nvPr>
+            <p:ph type="sldNum"/>
+          </p:nvPr>
+        </p:nvSpPr>
+        <p:spPr/>
+      </p:sp>
+    </p:spTree>
+  </p:cSld>
+  <p:clrMapOvr>
+    <a:masterClrMapping/>
+  </p:clrMapOvr>
+</p:notes>
+</file>
+
+<file path=ppt/notesSlides/notesSlide9.xml><?xml version="1.0" encoding="utf-8"?>
+<p:notes xmlns:a="http://schemas.openxmlformats.org/drawingml/2006/main" xmlns:p="http://schemas.openxmlformats.org/presentationml/2006/main" xmlns:r="http://schemas.openxmlformats.org/officeDocument/2006/relationships">
+  <p:cSld>
+    <p:spTree>
+      <p:nvGrpSpPr>
+        <p:cNvPr id="1" name=""/>
+        <p:cNvGrpSpPr/>
+        <p:nvPr/>
+      </p:nvGrpSpPr>
+      <p:grpSpPr>
+        <a:xfrm>
+          <a:off x="0" y="0"/>
+          <a:ext cx="0" cy="0"/>
+          <a:chOff x="0" y="0"/>
+          <a:chExt cx="0" cy="0"/>
+        </a:xfrm>
+      </p:grpSpPr>
+      <p:sp>
+        <p:nvSpPr>
+          <p:cNvPr id="2" name="Slide Image Placeholder 1"/>
+          <p:cNvSpPr>
+            <a:spLocks noGrp="1"/>
+          </p:cNvSpPr>
+          <p:nvPr>
+            <p:ph type="sldImg"/>
+          </p:nvPr>
+        </p:nvSpPr>
+        <p:spPr/>
+      </p:sp>
+      <p:sp>
+        <p:nvSpPr>
+          <p:cNvPr id="3" name="Notes Placeholder 2"/>
+          <p:cNvSpPr>
+            <a:spLocks noGrp="1"/>
+          </p:cNvSpPr>
+          <p:nvPr>
+            <p:ph type="body"/>
+          </p:nvPr>
+        </p:nvSpPr>
+        <p:spPr/>
+        <p:txBody>
+          <a:bodyPr/>
+          <a:lstStyle/>
+          <a:p>
+            <a:r>
+              <a:t>[Blok 4 - hier eindig je] Laat de uitslag</a:t>
+            </a:r>
+          </a:p>
+          <a:p>
+            <a:r>
+              <a:t>even staan voordat je hem uitlegt.</a:t>
+            </a:r>
+          </a:p>
+          <a:p/>
+          <a:p>
+            <a:r>
+              <a:t>Tien chips verschil, over 6750 beslissingen. Dat is geen klinkende overwinning en dat</a:t>
+            </a:r>
+          </a:p>
+          <a:p>
+            <a:r>
+              <a:t>is precies goed: het gaat niet om "de domme bot wint", het gaat om "jullie drempels</a:t>
+            </a:r>
+          </a:p>
+          <a:p>
+            <a:r>
+              <a:t>staan zo hoog dat niet meedoen bijna net zo goed werkt als meedoen".</a:t>
+            </a:r>
+          </a:p>
+          <a:p/>
+          <a:p>
+            <a:r>
+              <a:t>Correlatie fold% met eindstand: -0,69. Niet doorslaan - vier bots dragen dat getal en</a:t>
+            </a:r>
+          </a:p>
+          <a:p>
+            <a:r>
+              <a:t>27 punten is weinig. Dat onderscheid, zie ik een verband tegenover heb ik iets</a:t>
+            </a:r>
+          </a:p>
+          <a:p>
+            <a:r>
+              <a:t>aangetoond, is precies wat het criterium Analyse van Case 2 beoordeelt.</a:t>
+            </a:r>
+          </a:p>
+          <a:p/>
+          <a:p>
+            <a:r>
+              <a:t>De vraag voor donderdag is niet "moet ik minder folden" maar "waar liggen mijn</a:t>
+            </a:r>
+          </a:p>
+          <a:p>
+            <a:r>
+              <a:t>drempels, en waarom daar".</a:t>
+            </a:r>
+          </a:p>
+        </p:txBody>
+      </p:sp>
+      <p:sp>
+        <p:nvSpPr>
+          <p:cNvPr id="4" name="Slide Number Placeholder 3"/>
+          <p:cNvSpPr>
+            <a:spLocks noGrp="1"/>
+          </p:cNvSpPr>
+          <p:nvPr>
+            <p:ph type="sldNum"/>
+          </p:nvPr>
+        </p:nvSpPr>
+        <p:spPr/>
       </p:sp>
     </p:spTree>
   </p:cSld>
@@ -12133,7 +13864,7 @@
               </a:defRPr>
             </a:pPr>
             <a:r>
-              <a:t>Wat je bot tot nu toe kon: alleen de openingshand</a:t>
+              <a:t>Deze week in twee werkcolleges</a:t>
             </a:r>
           </a:p>
         </p:txBody>
@@ -12163,13 +13894,13 @@
             <a:pPr>
               <a:defRPr sz="1700" b="1">
                 <a:solidFill>
-                  <a:srgbClr val="000000"/>
+                  <a:srgbClr val="25167A"/>
                 </a:solidFill>
                 <a:latin typeface="Arial"/>
               </a:defRPr>
             </a:pPr>
             <a:r>
-              <a:t>In week 3 rekent je bot met twee kaarten en verder niets.</a:t>
+              <a:t>Werkcollege 4 — de stapeling</a:t>
             </a:r>
           </a:p>
           <a:p>
@@ -12182,7 +13913,7 @@
               </a:defRPr>
             </a:pPr>
             <a:r>
-              <a:t>schat_winkans(["A", "K"], tegenstanders=5) → één getal, vóór de flop</a:t>
+              <a:t>standaardwaarde in een functie · dictionary als opzoektabel · filteren en groeperen</a:t>
             </a:r>
           </a:p>
           <a:p>
@@ -12195,7 +13926,20 @@
               </a:defRPr>
             </a:pPr>
             <a:r>
-              <a:t>Dat getal verandert de hele hand niet meer — ook niet als er drie schoppen vallen</a:t>
+              <a:t>de spelregels: vier straten, dus je bot beslist vier keer per hand</a:t>
+            </a:r>
+          </a:p>
+          <a:p>
+            <a:pPr lvl="1">
+              <a:defRPr sz="1400" b="0">
+                <a:solidFill>
+                  <a:srgbClr val="1B4D3E"/>
+                </a:solidFill>
+                <a:latin typeface="Arial"/>
+              </a:defRPr>
+            </a:pPr>
+            <a:r>
+              <a:t>handsterkte · winkans · pot odds — en die laatste twee naast elkaar is een beslisregel</a:t>
             </a:r>
           </a:p>
           <a:p>
@@ -12205,13 +13949,13 @@
               </a:spcBef>
               <a:defRPr sz="1700" b="1">
                 <a:solidFill>
-                  <a:srgbClr val="000000"/>
+                  <a:srgbClr val="25167A"/>
                 </a:solidFill>
                 <a:latin typeface="Arial"/>
               </a:defRPr>
             </a:pPr>
             <a:r>
-              <a:t>Waarom dat kon: winkansen preflop veranderen nooit.</a:t>
+              <a:t>Werkcollege 5 — van bot naar data</a:t>
             </a:r>
           </a:p>
           <a:p>
@@ -12224,7 +13968,7 @@
               </a:defRPr>
             </a:pPr>
             <a:r>
-              <a:t>169 mogelijke starthanden, dus je rekent ze één keer uit en plakt de tabel in je bot</a:t>
+              <a:t>live testen tegen een klasgenoot · v2 naast v1 · de spelregels terugvinden in je eigen log</a:t>
             </a:r>
           </a:p>
           <a:p>
@@ -12237,7 +13981,7 @@
               </a:defRPr>
             </a:pPr>
             <a:r>
-              <a:t>Precies waar een dictionary voor bedoeld is: sleutel → waarde</a:t>
+              <a:t>peer review · aftrap Case 2 · twee tabellen samenvoegen · van notebook naar Streamlit</a:t>
             </a:r>
           </a:p>
           <a:p>
@@ -12253,20 +13997,7 @@
               </a:defRPr>
             </a:pPr>
             <a:r>
-              <a:t>Wat je bot dus niet weet:</a:t>
-            </a:r>
-          </a:p>
-          <a:p>
-            <a:pPr lvl="1">
-              <a:defRPr sz="1400" b="0">
-                <a:solidFill>
-                  <a:srgbClr val="505A64"/>
-                </a:solidFill>
-                <a:latin typeface="Arial"/>
-              </a:defRPr>
-            </a:pPr>
-            <a:r>
-              <a:t>of het bord bij zijn kaarten past, of iemand anders aan een flush werkt</a:t>
+              <a:t>Het hoofdwerk zit in het huiswerk: reken op 4 tot 8 uur eigen botwerk.</a:t>
             </a:r>
           </a:p>
         </p:txBody>
@@ -12356,7 +14087,7 @@
               </a:defRPr>
             </a:pPr>
             <a:r>
-              <a:t>Vanaf week 5: per straat opnieuw rekenen</a:t>
+              <a:t>Wat je bot tot nu toe kon: alleen de openingshand</a:t>
             </a:r>
           </a:p>
         </p:txBody>
@@ -12392,20 +14123,20 @@
               </a:defRPr>
             </a:pPr>
             <a:r>
-              <a:t>Je bot krijgt het bord erbij, en zijn eigen kaarten mét kleur.</a:t>
+              <a:t>In week 3 rekent je bot met twee kaarten en verder niets.</a:t>
             </a:r>
           </a:p>
           <a:p>
             <a:pPr lvl="1">
               <a:defRPr sz="1400" b="0">
                 <a:solidFill>
-                  <a:srgbClr val="1B4D3E"/>
+                  <a:srgbClr val="000000"/>
                 </a:solidFill>
                 <a:latin typeface="Arial"/>
               </a:defRPr>
             </a:pPr>
             <a:r>
-              <a:t>schat_winkans(hand_met_kleur, bord=bord, tegenstanders=3)</a:t>
+              <a:t>schat_winkans(["A", "K"], tegenstanders=5) → één getal, vóór de flop</a:t>
             </a:r>
           </a:p>
           <a:p>
@@ -12418,7 +14149,7 @@
               </a:defRPr>
             </a:pPr>
             <a:r>
-              <a:t>De ontbrekende kaarten worden om jouw bord heen gedeeld — geen willekeurig bord meer</a:t>
+              <a:t>Dat getal verandert de hele hand niet meer — ook niet als er drie schoppen vallen</a:t>
             </a:r>
           </a:p>
           <a:p>
@@ -12434,33 +14165,33 @@
               </a:defRPr>
             </a:pPr>
             <a:r>
-              <a:t>Kleur is hier niet optioneel. Zelfde rangen, bord met drie schoppen:</a:t>
+              <a:t>Waarom dat kon: winkansen preflop veranderen nooit.</a:t>
             </a:r>
           </a:p>
           <a:p>
             <a:pPr lvl="1">
               <a:defRPr sz="1400" b="0">
                 <a:solidFill>
-                  <a:srgbClr val="1B4D3E"/>
+                  <a:srgbClr val="000000"/>
                 </a:solidFill>
                 <a:latin typeface="Arial"/>
               </a:defRPr>
             </a:pPr>
             <a:r>
-              <a:t>S7 S8, allebei schoppen: 36,6% op de flop — en 94,1% op de river, met de flush</a:t>
+              <a:t>169 mogelijke starthanden, dus je rekent ze één keer uit en plakt de tabel in je bot</a:t>
             </a:r>
           </a:p>
           <a:p>
             <a:pPr lvl="1">
               <a:defRPr sz="1400" b="0">
                 <a:solidFill>
-                  <a:srgbClr val="505A64"/>
+                  <a:srgbClr val="000000"/>
                 </a:solidFill>
                 <a:latin typeface="Arial"/>
               </a:defRPr>
             </a:pPr>
             <a:r>
-              <a:t>H7 C8, gemengde kleuren: 8,0% op de flop — en 0,0% op de river</a:t>
+              <a:t>Precies waar een dictionary voor bedoeld is: sleutel → waarde</a:t>
             </a:r>
           </a:p>
           <a:p>
@@ -12476,33 +14207,20 @@
               </a:defRPr>
             </a:pPr>
             <a:r>
-              <a:t>En een opzoektabel werkt hier niet meer.</a:t>
+              <a:t>Wat je bot dus niet weet:</a:t>
             </a:r>
           </a:p>
           <a:p>
             <a:pPr lvl="1">
               <a:defRPr sz="1400" b="0">
                 <a:solidFill>
-                  <a:srgbClr val="000000"/>
+                  <a:srgbClr val="505A64"/>
                 </a:solidFill>
                 <a:latin typeface="Arial"/>
               </a:defRPr>
             </a:pPr>
             <a:r>
-              <a:t>Binnen de categorie "één paar" op de flop loopt de echte winkans van 8,5% tot 75,5%</a:t>
-            </a:r>
-          </a:p>
-          <a:p>
-            <a:pPr lvl="1">
-              <a:defRPr sz="1400" b="0">
-                <a:solidFill>
-                  <a:srgbClr val="505A64"/>
-                </a:solidFill>
-                <a:latin typeface="Arial"/>
-              </a:defRPr>
-            </a:pPr>
-            <a:r>
-              <a:t>Een tabelwaarde van gemiddeld 33,8% zit dan in beide richtingen ver mis</a:t>
+              <a:t>of het bord bij zijn kaarten past, of iemand anders aan een flush werkt</a:t>
             </a:r>
           </a:p>
         </p:txBody>
@@ -12592,7 +14310,7 @@
               </a:defRPr>
             </a:pPr>
             <a:r>
-              <a:t>Wat moest, en wat mocht — week 3</a:t>
+              <a:t>Vanaf week 5: per straat opnieuw rekenen</a:t>
             </a:r>
           </a:p>
         </p:txBody>
@@ -12622,26 +14340,26 @@
             <a:pPr>
               <a:defRPr sz="1700" b="1">
                 <a:solidFill>
-                  <a:srgbClr val="25167A"/>
+                  <a:srgbClr val="000000"/>
                 </a:solidFill>
                 <a:latin typeface="Arial"/>
               </a:defRPr>
             </a:pPr>
             <a:r>
-              <a:t>VERPLICHT — zonder dit wordt je inzending afgekeurd</a:t>
+              <a:t>Je bot krijgt het bord erbij, en zijn eigen kaarten mét kleur.</a:t>
             </a:r>
           </a:p>
           <a:p>
             <a:pPr lvl="1">
               <a:defRPr sz="1400" b="0">
                 <a:solidFill>
-                  <a:srgbClr val="000000"/>
+                  <a:srgbClr val="1B4D3E"/>
                 </a:solidFill>
                 <a:latin typeface="Arial"/>
               </a:defRPr>
             </a:pPr>
             <a:r>
-              <a:t>kies_actie(hand, stack)   — die twee namen, exact zo gespeld</a:t>
+              <a:t>schat_winkans(hand_met_kleur, bord=bord, tegenstanders=3)</a:t>
             </a:r>
           </a:p>
           <a:p>
@@ -12654,7 +14372,7 @@
               </a:defRPr>
             </a:pPr>
             <a:r>
-              <a:t>je bot geeft één string terug: fold, call, raise, all_in of grote_raise</a:t>
+              <a:t>De ontbrekende kaarten worden om jouw bord heen gedeeld — geen willekeurig bord meer</a:t>
             </a:r>
           </a:p>
           <a:p>
@@ -12664,13 +14382,13 @@
               </a:spcBef>
               <a:defRPr sz="1700" b="1">
                 <a:solidFill>
-                  <a:srgbClr val="1B4D3E"/>
+                  <a:srgbClr val="000000"/>
                 </a:solidFill>
                 <a:latin typeface="Arial"/>
               </a:defRPr>
             </a:pPr>
             <a:r>
-              <a:t>OPTIONEEL — je krijgt ze alleen als je ze zelf opschrijft</a:t>
+              <a:t>Kleur is hier niet optioneel. Zelfde rangen, bord met drie schoppen:</a:t>
             </a:r>
           </a:p>
           <a:p>
@@ -12683,20 +14401,20 @@
               </a:defRPr>
             </a:pPr>
             <a:r>
-              <a:t>ronde · pot · inzet_om_te_callen · tegenstander_acties_deze_hand</a:t>
+              <a:t>S7 S8, allebei schoppen: 36,6% op de flop — en 94,1% op de river, met de flush</a:t>
             </a:r>
           </a:p>
           <a:p>
             <a:pPr lvl="1">
               <a:defRPr sz="1400" b="0">
                 <a:solidFill>
-                  <a:srgbClr val="000000"/>
+                  <a:srgbClr val="505A64"/>
                 </a:solidFill>
                 <a:latin typeface="Arial"/>
               </a:defRPr>
             </a:pPr>
             <a:r>
-              <a:t>De engine kijkt naar je parameternamen. Verkeerd gespeld = je krijgt hem niet.</a:t>
+              <a:t>H7 C8, gemengde kleuren: 8,0% op de flop — en 0,0% op de river</a:t>
             </a:r>
           </a:p>
           <a:p>
@@ -12712,7 +14430,7 @@
               </a:defRPr>
             </a:pPr>
             <a:r>
-              <a:t>Twee dingen die pas aangaan mét stack:</a:t>
+              <a:t>En een opzoektabel werkt hier niet meer.</a:t>
             </a:r>
           </a:p>
           <a:p>
@@ -12725,20 +14443,20 @@
               </a:defRPr>
             </a:pPr>
             <a:r>
-              <a:t>all_in en grote_raise mogen dan pas: zonder je stack kun je dat niet afwegen</a:t>
+              <a:t>Binnen de categorie "één paar" op de flop loopt de echte winkans van 8,5% tot 75,5%</a:t>
             </a:r>
           </a:p>
           <a:p>
             <a:pPr lvl="1">
               <a:defRPr sz="1400" b="0">
                 <a:solidFill>
-                  <a:srgbClr val="000000"/>
+                  <a:srgbClr val="505A64"/>
                 </a:solidFill>
                 <a:latin typeface="Arial"/>
               </a:defRPr>
             </a:pPr>
             <a:r>
-              <a:t>en de cap van twee raises per straat gaat gelden</a:t>
+              <a:t>Een tabelwaarde van gemiddeld 33,8% zit dan in beide richtingen ver mis</a:t>
             </a:r>
           </a:p>
         </p:txBody>
@@ -12828,7 +14546,7 @@
               </a:defRPr>
             </a:pPr>
             <a:r>
-              <a:t>De bot die niet nadenkt werd eerste</a:t>
+              <a:t>Wat moest, en wat mocht — week 3</a:t>
             </a:r>
           </a:p>
         </p:txBody>
@@ -12858,26 +14576,26 @@
             <a:pPr>
               <a:defRPr sz="1700" b="1">
                 <a:solidFill>
-                  <a:srgbClr val="000000"/>
+                  <a:srgbClr val="25167A"/>
                 </a:solidFill>
                 <a:latin typeface="Arial"/>
               </a:defRPr>
             </a:pPr>
             <a:r>
-              <a:t>Toernooi week 3, 27 bots. De uitslag bovenaan:</a:t>
+              <a:t>VERPLICHT — zonder dit wordt je inzending afgekeurd</a:t>
             </a:r>
           </a:p>
           <a:p>
             <a:pPr lvl="1">
               <a:defRPr sz="1400" b="0">
                 <a:solidFill>
-                  <a:srgbClr val="1B4D3E"/>
+                  <a:srgbClr val="000000"/>
                 </a:solidFill>
                 <a:latin typeface="Arial"/>
               </a:defRPr>
             </a:pPr>
             <a:r>
-              <a:t>1.  Testbot_CalltAlles — 1748 chips, foldt 0,0%</a:t>
+              <a:t>kies_actie(hand, stack)   — die twee namen, exact zo gespeld</a:t>
             </a:r>
           </a:p>
           <a:p>
@@ -12890,20 +14608,7 @@
               </a:defRPr>
             </a:pPr>
             <a:r>
-              <a:t>2.  een van jullie — 1738 chips, foldt 82,5%</a:t>
-            </a:r>
-          </a:p>
-          <a:p>
-            <a:pPr lvl="1">
-              <a:defRPr sz="1400" b="0">
-                <a:solidFill>
-                  <a:srgbClr val="000000"/>
-                </a:solidFill>
-                <a:latin typeface="Arial"/>
-              </a:defRPr>
-            </a:pPr>
-            <a:r>
-              <a:t>3.  een van jullie — 1256 chips, foldt 58,7%</a:t>
+              <a:t>je bot geeft één string terug: fold, call, raise, all_in of grote_raise</a:t>
             </a:r>
           </a:p>
           <a:p>
@@ -12913,26 +14618,26 @@
               </a:spcBef>
               <a:defRPr sz="1700" b="1">
                 <a:solidFill>
-                  <a:srgbClr val="000000"/>
+                  <a:srgbClr val="1B4D3E"/>
                 </a:solidFill>
                 <a:latin typeface="Arial"/>
               </a:defRPr>
             </a:pPr>
             <a:r>
-              <a:t>Die eerste is één regel: geef altijd "call" terug, wat je ook hebt.</a:t>
+              <a:t>OPTIONEEL — je krijgt ze alleen als je ze zelf opschrijft</a:t>
             </a:r>
           </a:p>
           <a:p>
             <a:pPr lvl="1">
               <a:defRPr sz="1400" b="0">
                 <a:solidFill>
-                  <a:srgbClr val="000000"/>
+                  <a:srgbClr val="1B4D3E"/>
                 </a:solidFill>
                 <a:latin typeface="Arial"/>
               </a:defRPr>
             </a:pPr>
             <a:r>
-              <a:t>Geen winkans, geen pot odds, kijkt niet eens naar zijn kaarten</a:t>
+              <a:t>ronde · pot · inzet_om_te_callen · tegenstander_acties_deze_hand</a:t>
             </a:r>
           </a:p>
           <a:p>
@@ -12945,20 +14650,7 @@
               </a:defRPr>
             </a:pPr>
             <a:r>
-              <a:t>De klas foldde 92,2% van alle beslissingen; negen bots foldden 99% of meer</a:t>
-            </a:r>
-          </a:p>
-          <a:p>
-            <a:pPr lvl="1">
-              <a:defRPr sz="1400" b="0">
-                <a:solidFill>
-                  <a:srgbClr val="505A64"/>
-                </a:solidFill>
-                <a:latin typeface="Arial"/>
-              </a:defRPr>
-            </a:pPr>
-            <a:r>
-              <a:t>Correlatie tussen fold% en eindstand: -0,69 — meer folden is minder eindigen</a:t>
+              <a:t>De engine kijkt naar je parameternamen. Verkeerd gespeld = je krijgt hem niet.</a:t>
             </a:r>
           </a:p>
           <a:p>
@@ -12968,13 +14660,39 @@
               </a:spcBef>
               <a:defRPr sz="1700" b="1">
                 <a:solidFill>
-                  <a:srgbClr val="25167A"/>
+                  <a:srgbClr val="000000"/>
                 </a:solidFill>
                 <a:latin typeface="Arial"/>
               </a:defRPr>
             </a:pPr>
             <a:r>
-              <a:t>Waarom verliest een bot mét regels van een bot zonder regels?</a:t>
+              <a:t>Twee dingen die pas aangaan mét stack:</a:t>
+            </a:r>
+          </a:p>
+          <a:p>
+            <a:pPr lvl="1">
+              <a:defRPr sz="1400" b="0">
+                <a:solidFill>
+                  <a:srgbClr val="000000"/>
+                </a:solidFill>
+                <a:latin typeface="Arial"/>
+              </a:defRPr>
+            </a:pPr>
+            <a:r>
+              <a:t>all_in en grote_raise mogen dan pas: zonder je stack kun je dat niet afwegen</a:t>
+            </a:r>
+          </a:p>
+          <a:p>
+            <a:pPr lvl="1">
+              <a:defRPr sz="1400" b="0">
+                <a:solidFill>
+                  <a:srgbClr val="000000"/>
+                </a:solidFill>
+                <a:latin typeface="Arial"/>
+              </a:defRPr>
+            </a:pPr>
+            <a:r>
+              <a:t>en de cap van twee raises per straat gaat gelden</a:t>
             </a:r>
           </a:p>
         </p:txBody>
@@ -13064,7 +14782,7 @@
               </a:defRPr>
             </a:pPr>
             <a:r>
-              <a:t>Groepscase 2 — wat je oplevert</a:t>
+              <a:t>Wat het log over de klas zegt</a:t>
             </a:r>
           </a:p>
         </p:txBody>
@@ -13100,7 +14818,7 @@
               </a:defRPr>
             </a:pPr>
             <a:r>
-              <a:t>Een Streamlit-dashboard over een onderwerp dat je zelf kiest.</a:t>
+              <a:t>6750 beslissingen: 27 bots, 50 handen, 5 zittingen.</a:t>
             </a:r>
           </a:p>
           <a:p>
@@ -13113,20 +14831,20 @@
               </a:defRPr>
             </a:pPr>
             <a:r>
-              <a:t>Gepubliceerd via GitHub op share.streamlit.io, te openen met een link</a:t>
+              <a:t>fold · 92,2% van alle beslissingen · gemiddeld -3 chips</a:t>
             </a:r>
           </a:p>
           <a:p>
             <a:pPr lvl="1">
               <a:defRPr sz="1400" b="0">
                 <a:solidFill>
-                  <a:srgbClr val="000000"/>
+                  <a:srgbClr val="1B4D3E"/>
                 </a:solidFill>
                 <a:latin typeface="Arial"/>
               </a:defRPr>
             </a:pPr>
             <a:r>
-              <a:t>De app haalt de data zelf op bij een openbare API — niet met de hand gedownload</a:t>
+              <a:t>call · 5,9% · gemiddeld +10 chips</a:t>
             </a:r>
           </a:p>
           <a:p>
@@ -13139,7 +14857,20 @@
               </a:defRPr>
             </a:pPr>
             <a:r>
-              <a:t>Minimaal één join: twee bronnen die je tot één tabel samenvoegt</a:t>
+              <a:t>raise · 1,3% · gemiddeld +65 chips</a:t>
+            </a:r>
+          </a:p>
+          <a:p>
+            <a:pPr lvl="1">
+              <a:defRPr sz="1400" b="0">
+                <a:solidFill>
+                  <a:srgbClr val="1B4D3E"/>
+                </a:solidFill>
+                <a:latin typeface="Arial"/>
+              </a:defRPr>
+            </a:pPr>
+            <a:r>
+              <a:t>grote_raise · 0,6% · gemiddeld +19 chips</a:t>
             </a:r>
           </a:p>
           <a:p>
@@ -13149,39 +14880,13 @@
               </a:spcBef>
               <a:defRPr sz="1700" b="1">
                 <a:solidFill>
-                  <a:srgbClr val="000000"/>
+                  <a:srgbClr val="25167A"/>
                 </a:solidFill>
                 <a:latin typeface="Arial"/>
               </a:defRPr>
             </a:pPr>
             <a:r>
-              <a:t>Loopt over week 3 en week 4. Dat is kort.</a:t>
-            </a:r>
-          </a:p>
-          <a:p>
-            <a:pPr lvl="1">
-              <a:defRPr sz="1400" b="0">
-                <a:solidFill>
-                  <a:srgbClr val="000000"/>
-                </a:solidFill>
-                <a:latin typeface="Arial"/>
-              </a:defRPr>
-            </a:pPr>
-            <a:r>
-              <a:t>Donderdag 18:00 staat je onderwerp vast: welke vraag, welke twee bronnen,</a:t>
-            </a:r>
-          </a:p>
-          <a:p>
-            <a:pPr lvl="1">
-              <a:defRPr sz="1400" b="0">
-                <a:solidFill>
-                  <a:srgbClr val="000000"/>
-                </a:solidFill>
-                <a:latin typeface="Arial"/>
-              </a:defRPr>
-            </a:pPr>
-            <a:r>
-              <a:t>op welke kolom die aan elkaar passen, en wie in de groep wat doet</a:t>
+              <a:t>Elke actie behalve fold levert gemiddeld geld op.</a:t>
             </a:r>
           </a:p>
           <a:p>
@@ -13191,26 +14896,39 @@
               </a:spcBef>
               <a:defRPr sz="1700" b="1">
                 <a:solidFill>
-                  <a:srgbClr val="25167A"/>
+                  <a:srgbClr val="000000"/>
                 </a:solidFill>
                 <a:latin typeface="Arial"/>
               </a:defRPr>
             </a:pPr>
             <a:r>
-              <a:t>Zoek nu al op of die twee bronnen écht een gemeenschappelijke kolom hebben.</a:t>
+              <a:t>En toch is de mediaan van alle handen 0.</a:t>
             </a:r>
           </a:p>
           <a:p>
             <a:pPr lvl="1">
               <a:defRPr sz="1400" b="0">
                 <a:solidFill>
-                  <a:srgbClr val="505A64"/>
+                  <a:srgbClr val="000000"/>
                 </a:solidFill>
                 <a:latin typeface="Arial"/>
               </a:defRPr>
             </a:pPr>
             <a:r>
-              <a:t>"Den Haag" en "'s-Gravenhage" passen niet op elkaar zonder werk</a:t>
+              <a:t>4838 van de 6750 handen leveren tussen 0 en 20 chips op — dat is de blind, niet het spel</a:t>
+            </a:r>
+          </a:p>
+          <a:p>
+            <a:pPr lvl="1">
+              <a:defRPr sz="1400" b="0">
+                <a:solidFill>
+                  <a:srgbClr val="505A64"/>
+                </a:solidFill>
+                <a:latin typeface="Arial"/>
+              </a:defRPr>
+            </a:pPr>
+            <a:r>
+              <a:t>Zeven handen maken de hele staart. Die zie je in geen enkel samenvattend getal terug.</a:t>
             </a:r>
           </a:p>
         </p:txBody>
@@ -13300,7 +15018,7 @@
               </a:defRPr>
             </a:pPr>
             <a:r>
-              <a:t>Waar je cijfer vandaan komt</a:t>
+              <a:t>De bot die niet nadenkt werd eerste</a:t>
             </a:r>
           </a:p>
         </p:txBody>
@@ -13330,26 +15048,26 @@
             <a:pPr>
               <a:defRPr sz="1700" b="1">
                 <a:solidFill>
-                  <a:srgbClr val="25167A"/>
+                  <a:srgbClr val="000000"/>
                 </a:solidFill>
                 <a:latin typeface="Arial"/>
               </a:defRPr>
             </a:pPr>
             <a:r>
-              <a:t>Drie criteria voor IDS — de data-kant</a:t>
+              <a:t>Toernooi week 3, 27 bots. De uitslag bovenaan:</a:t>
             </a:r>
           </a:p>
           <a:p>
             <a:pPr lvl="1">
               <a:defRPr sz="1400" b="0">
                 <a:solidFill>
-                  <a:srgbClr val="000000"/>
+                  <a:srgbClr val="1B4D3E"/>
                 </a:solidFill>
                 <a:latin typeface="Arial"/>
               </a:defRPr>
             </a:pPr>
             <a:r>
-              <a:t>Data verzameling · twee bronnen, plus de sleutel en de rijen vóór en ná de join</a:t>
+              <a:t>1.  Testbot_CalltAlles — 1748 chips, foldt 0,0%</a:t>
             </a:r>
           </a:p>
           <a:p>
@@ -13362,7 +15080,7 @@
               </a:defRPr>
             </a:pPr>
             <a:r>
-              <a:t>Data verkenning · lege waarden, bereik, dubbele rijen — en wat je ermee deed</a:t>
+              <a:t>2.  een van jullie — 1738 chips, foldt 82,5%</a:t>
             </a:r>
           </a:p>
           <a:p>
@@ -13375,7 +15093,7 @@
               </a:defRPr>
             </a:pPr>
             <a:r>
-              <a:t>Analyse · een conclusie die de data draagt, niet meer dan dat</a:t>
+              <a:t>3.  een van jullie — 1256 chips, foldt 58,7%</a:t>
             </a:r>
           </a:p>
           <a:p>
@@ -13385,13 +15103,13 @@
               </a:spcBef>
               <a:defRPr sz="1700" b="1">
                 <a:solidFill>
-                  <a:srgbClr val="25167A"/>
+                  <a:srgbClr val="000000"/>
                 </a:solidFill>
                 <a:latin typeface="Arial"/>
               </a:defRPr>
             </a:pPr>
             <a:r>
-              <a:t>Vier criteria voor VA — de verhaalkant</a:t>
+              <a:t>Die eerste is één regel: geef altijd "call" terug, wat je ook hebt.</a:t>
             </a:r>
           </a:p>
           <a:p>
@@ -13404,7 +15122,7 @@
               </a:defRPr>
             </a:pPr>
             <a:r>
-              <a:t>Opbouw en verhaallijn · Interactiviteit · Dashboardontwerp</a:t>
+              <a:t>Geen winkans, geen pot odds, kijkt niet eens naar zijn kaarten</a:t>
             </a:r>
           </a:p>
           <a:p>
@@ -13417,20 +15135,20 @@
               </a:defRPr>
             </a:pPr>
             <a:r>
-              <a:t>Vergelijken en annoteren · het verschil, het opgetelde verloop, of de waarde</a:t>
+              <a:t>De klas foldde 92,2% van alle beslissingen; negen bots foldden 99% of meer</a:t>
             </a:r>
           </a:p>
           <a:p>
             <a:pPr lvl="1">
               <a:defRPr sz="1400" b="0">
                 <a:solidFill>
-                  <a:srgbClr val="1B4D3E"/>
+                  <a:srgbClr val="505A64"/>
                 </a:solidFill>
                 <a:latin typeface="Arial"/>
               </a:defRPr>
             </a:pPr>
             <a:r>
-              <a:t>ten opzichte van het moment ervoor — diff, cumsum, shift</a:t>
+              <a:t>Correlatie tussen fold% en eindstand: -0,69 — meer folden is minder eindigen</a:t>
             </a:r>
           </a:p>
           <a:p>
@@ -13440,13 +15158,13 @@
               </a:spcBef>
               <a:defRPr sz="1700" b="1">
                 <a:solidFill>
-                  <a:srgbClr val="000000"/>
+                  <a:srgbClr val="25167A"/>
                 </a:solidFill>
                 <a:latin typeface="Arial"/>
               </a:defRPr>
             </a:pPr>
             <a:r>
-              <a:t>Vijf niveaus, van Ontbreekt (1) tot Uitstekend (9).</a:t>
+              <a:t>Waarom verliest een bot mét regels van een bot zonder regels?</a:t>
             </a:r>
           </a:p>
         </p:txBody>
@@ -13536,7 +15254,7 @@
               </a:defRPr>
             </a:pPr>
             <a:r>
-              <a:t>Vijf voorwaarden — die gaan van je cijfer af</a:t>
+              <a:t>Groepscase 2 — wat je oplevert</a:t>
             </a:r>
           </a:p>
         </p:txBody>
@@ -13572,7 +15290,7 @@
               </a:defRPr>
             </a:pPr>
             <a:r>
-              <a:t>Dit zijn geen criteria maar drempels. Beide cijfers, IDS en VA.</a:t>
+              <a:t>Een Streamlit-dashboard over een onderwerp dat je zelf kiest.</a:t>
             </a:r>
           </a:p>
           <a:p>
@@ -13585,72 +15303,33 @@
               </a:defRPr>
             </a:pPr>
             <a:r>
-              <a:t>App niet online, of een schone clone draait niet zonder handwerk</a:t>
+              <a:t>Gepubliceerd via GitHub op share.streamlit.io, te openen met een link</a:t>
             </a:r>
           </a:p>
           <a:p>
             <a:pPr lvl="1">
               <a:defRPr sz="1400" b="0">
                 <a:solidFill>
-                  <a:srgbClr val="25167A"/>
+                  <a:srgbClr val="000000"/>
                 </a:solidFill>
                 <a:latin typeface="Arial"/>
               </a:defRPr>
             </a:pPr>
             <a:r>
-              <a:t>     -1,0</a:t>
+              <a:t>De app haalt de data zelf op bij een openbare API — niet met de hand gedownload</a:t>
             </a:r>
           </a:p>
           <a:p>
             <a:pPr lvl="1">
               <a:defRPr sz="1400" b="0">
                 <a:solidFill>
-                  <a:srgbClr val="000000"/>
+                  <a:srgbClr val="1B4D3E"/>
                 </a:solidFill>
                 <a:latin typeface="Arial"/>
               </a:defRPr>
             </a:pPr>
             <a:r>
-              <a:t>Presentatie langer dan 10 minuten, exclusief vragen</a:t>
-            </a:r>
-          </a:p>
-          <a:p>
-            <a:pPr lvl="1">
-              <a:defRPr sz="1400" b="0">
-                <a:solidFill>
-                  <a:srgbClr val="25167A"/>
-                </a:solidFill>
-                <a:latin typeface="Arial"/>
-              </a:defRPr>
-            </a:pPr>
-            <a:r>
-              <a:t>     -1,0</a:t>
-            </a:r>
-          </a:p>
-          <a:p>
-            <a:pPr lvl="1">
-              <a:defRPr sz="1400" b="0">
-                <a:solidFill>
-                  <a:srgbClr val="000000"/>
-                </a:solidFill>
-                <a:latin typeface="Arial"/>
-              </a:defRPr>
-            </a:pPr>
-            <a:r>
-              <a:t>Geen slider, checkbox én dropdown, elk gekoppeld aan een tabel of grafiek</a:t>
-            </a:r>
-          </a:p>
-          <a:p>
-            <a:pPr lvl="1">
-              <a:defRPr sz="1400" b="0">
-                <a:solidFill>
-                  <a:srgbClr val="25167A"/>
-                </a:solidFill>
-                <a:latin typeface="Arial"/>
-              </a:defRPr>
-            </a:pPr>
-            <a:r>
-              <a:t>     -0,5</a:t>
+              <a:t>Minimaal één join: twee bronnen die je tot één tabel samenvoegt</a:t>
             </a:r>
           </a:p>
           <a:p>
@@ -13666,20 +15345,62 @@
               </a:defRPr>
             </a:pPr>
             <a:r>
-              <a:t>En twee zonder aftrek, maar niet vrijblijvend:</a:t>
+              <a:t>Loopt over week 3 en week 4. Dat is kort.</a:t>
             </a:r>
           </a:p>
           <a:p>
             <a:pPr lvl="1">
               <a:defRPr sz="1400" b="0">
                 <a:solidFill>
-                  <a:srgbClr val="505A64"/>
+                  <a:srgbClr val="000000"/>
                 </a:solidFill>
                 <a:latin typeface="Arial"/>
               </a:defRPr>
             </a:pPr>
             <a:r>
-              <a:t>Onderwerp op tijd gemeld · code van anderen met bron erbij, en uit te leggen</a:t>
+              <a:t>Donderdag 18:00 staat je onderwerp vast: welke vraag, welke twee bronnen,</a:t>
+            </a:r>
+          </a:p>
+          <a:p>
+            <a:pPr lvl="1">
+              <a:defRPr sz="1400" b="0">
+                <a:solidFill>
+                  <a:srgbClr val="000000"/>
+                </a:solidFill>
+                <a:latin typeface="Arial"/>
+              </a:defRPr>
+            </a:pPr>
+            <a:r>
+              <a:t>op welke kolom die aan elkaar passen, en wie in de groep wat doet</a:t>
+            </a:r>
+          </a:p>
+          <a:p>
+            <a:pPr>
+              <a:spcBef>
+                <a:spcPts val="1300"/>
+              </a:spcBef>
+              <a:defRPr sz="1700" b="1">
+                <a:solidFill>
+                  <a:srgbClr val="25167A"/>
+                </a:solidFill>
+                <a:latin typeface="Arial"/>
+              </a:defRPr>
+            </a:pPr>
+            <a:r>
+              <a:t>Zoek nu al op of die twee bronnen écht een gemeenschappelijke kolom hebben.</a:t>
+            </a:r>
+          </a:p>
+          <a:p>
+            <a:pPr lvl="1">
+              <a:defRPr sz="1400" b="0">
+                <a:solidFill>
+                  <a:srgbClr val="505A64"/>
+                </a:solidFill>
+                <a:latin typeface="Arial"/>
+              </a:defRPr>
+            </a:pPr>
+            <a:r>
+              <a:t>"Den Haag" en "'s-Gravenhage" passen niet op elkaar zonder werk</a:t>
             </a:r>
           </a:p>
         </p:txBody>
@@ -13769,7 +15490,7 @@
               </a:defRPr>
             </a:pPr>
             <a:r>
-              <a:t>Dat heb je vanmiddag al gedaan</a:t>
+              <a:t>Waar je cijfer vandaan komt</a:t>
             </a:r>
           </a:p>
         </p:txBody>
@@ -13799,26 +15520,26 @@
             <a:pPr>
               <a:defRPr sz="1700" b="1">
                 <a:solidFill>
-                  <a:srgbClr val="000000"/>
+                  <a:srgbClr val="25167A"/>
                 </a:solidFill>
                 <a:latin typeface="Arial"/>
               </a:defRPr>
             </a:pPr>
             <a:r>
-              <a:t>De demo van zojuist was Case 2 in het klein:</a:t>
+              <a:t>Drie criteria voor IDS — de data-kant</a:t>
             </a:r>
           </a:p>
           <a:p>
             <a:pPr lvl="1">
               <a:defRPr sz="1400" b="0">
                 <a:solidFill>
-                  <a:srgbClr val="1B4D3E"/>
+                  <a:srgbClr val="000000"/>
                 </a:solidFill>
                 <a:latin typeface="Arial"/>
               </a:defRPr>
             </a:pPr>
             <a:r>
-              <a:t>twee tabellen op bot_naam samengevoegd, rijen geteld vóór en ná</a:t>
+              <a:t>Data verzameling · twee bronnen, plus de sleutel en de rijen vóór en ná de join</a:t>
             </a:r>
           </a:p>
           <a:p>
@@ -13831,59 +15552,20 @@
               </a:defRPr>
             </a:pPr>
             <a:r>
-              <a:t>     → criterium Data verzameling</a:t>
+              <a:t>Data verkenning · lege waarden, bereik, dubbele rijen — en wat je ermee deed</a:t>
             </a:r>
           </a:p>
           <a:p>
             <a:pPr lvl="1">
               <a:defRPr sz="1400" b="0">
                 <a:solidFill>
-                  <a:srgbClr val="1B4D3E"/>
+                  <a:srgbClr val="000000"/>
                 </a:solidFill>
                 <a:latin typeface="Arial"/>
               </a:defRPr>
             </a:pPr>
             <a:r>
-              <a:t>928 lege waarden gevonden, en gezien wat ze met je percentage deden</a:t>
-            </a:r>
-          </a:p>
-          <a:p>
-            <a:pPr lvl="1">
-              <a:defRPr sz="1400" b="0">
-                <a:solidFill>
-                  <a:srgbClr val="000000"/>
-                </a:solidFill>
-                <a:latin typeface="Arial"/>
-              </a:defRPr>
-            </a:pPr>
-            <a:r>
-              <a:t>     → criterium Data verkenning</a:t>
-            </a:r>
-          </a:p>
-          <a:p>
-            <a:pPr lvl="1">
-              <a:defRPr sz="1400" b="0">
-                <a:solidFill>
-                  <a:srgbClr val="1B4D3E"/>
-                </a:solidFill>
-                <a:latin typeface="Arial"/>
-              </a:defRPr>
-            </a:pPr>
-            <a:r>
-              <a:t>diff en cumsum over het verloop van een stack</a:t>
-            </a:r>
-          </a:p>
-          <a:p>
-            <a:pPr lvl="1">
-              <a:defRPr sz="1400" b="0">
-                <a:solidFill>
-                  <a:srgbClr val="000000"/>
-                </a:solidFill>
-                <a:latin typeface="Arial"/>
-              </a:defRPr>
-            </a:pPr>
-            <a:r>
-              <a:t>     → criterium Vergelijken en annoteren</a:t>
+              <a:t>Analyse · een conclusie die de data draagt, niet meer dan dat</a:t>
             </a:r>
           </a:p>
           <a:p>
@@ -13893,26 +15575,68 @@
               </a:spcBef>
               <a:defRPr sz="1700" b="1">
                 <a:solidFill>
-                  <a:srgbClr val="000000"/>
+                  <a:srgbClr val="25167A"/>
                 </a:solidFill>
                 <a:latin typeface="Arial"/>
               </a:defRPr>
             </a:pPr>
             <a:r>
-              <a:t>Het verschil met de case: daar kiest niemand de dataset voor je,</a:t>
+              <a:t>Vier criteria voor VA — de verhaalkant</a:t>
             </a:r>
           </a:p>
           <a:p>
             <a:pPr lvl="1">
               <a:defRPr sz="1400" b="0">
                 <a:solidFill>
-                  <a:srgbClr val="505A64"/>
+                  <a:srgbClr val="000000"/>
                 </a:solidFill>
                 <a:latin typeface="Arial"/>
               </a:defRPr>
             </a:pPr>
             <a:r>
-              <a:t>en staat er geen kolom aan_zet klaar om je fout te laten zien.</a:t>
+              <a:t>Opbouw en verhaallijn · Interactiviteit · Dashboardontwerp</a:t>
+            </a:r>
+          </a:p>
+          <a:p>
+            <a:pPr lvl="1">
+              <a:defRPr sz="1400" b="0">
+                <a:solidFill>
+                  <a:srgbClr val="000000"/>
+                </a:solidFill>
+                <a:latin typeface="Arial"/>
+              </a:defRPr>
+            </a:pPr>
+            <a:r>
+              <a:t>Vergelijken en annoteren · het verschil, het opgetelde verloop, of de waarde</a:t>
+            </a:r>
+          </a:p>
+          <a:p>
+            <a:pPr lvl="1">
+              <a:defRPr sz="1400" b="0">
+                <a:solidFill>
+                  <a:srgbClr val="1B4D3E"/>
+                </a:solidFill>
+                <a:latin typeface="Arial"/>
+              </a:defRPr>
+            </a:pPr>
+            <a:r>
+              <a:t>ten opzichte van het moment ervoor — diff, cumsum, shift</a:t>
+            </a:r>
+          </a:p>
+          <a:p>
+            <a:pPr>
+              <a:spcBef>
+                <a:spcPts val="1300"/>
+              </a:spcBef>
+              <a:defRPr sz="1700" b="1">
+                <a:solidFill>
+                  <a:srgbClr val="000000"/>
+                </a:solidFill>
+                <a:latin typeface="Arial"/>
+              </a:defRPr>
+            </a:pPr>
+            <a:r>
+              <a:t>Vijf niveaus, van Ontbreekt (1) tot Uitstekend (9).</a:t>
             </a:r>
           </a:p>
         </p:txBody>
@@ -14200,6 +15924,472 @@
             <a:endParaRPr lang="en-US" sz="1000" spc="-1">
               <a:latin typeface="Calibri"/>
             </a:endParaRPr>
+          </a:p>
+        </p:txBody>
+      </p:sp>
+    </p:spTree>
+  </p:cSld>
+  <p:clrMapOvr>
+    <a:masterClrMapping/>
+  </p:clrMapOvr>
+</p:sld>
+</file>
+
+<file path=ppt/slides/slide30.xml><?xml version="1.0" encoding="utf-8"?>
+<p:sld xmlns:a="http://schemas.openxmlformats.org/drawingml/2006/main" xmlns:p="http://schemas.openxmlformats.org/presentationml/2006/main" xmlns:r="http://schemas.openxmlformats.org/officeDocument/2006/relationships">
+  <p:cSld>
+    <p:spTree>
+      <p:nvGrpSpPr>
+        <p:cNvPr id="1" name=""/>
+        <p:cNvGrpSpPr/>
+        <p:nvPr/>
+      </p:nvGrpSpPr>
+      <p:grpSpPr/>
+      <p:sp>
+        <p:nvSpPr>
+          <p:cNvPr id="2" name="TextBox 1"/>
+          <p:cNvSpPr txBox="1"/>
+          <p:nvPr/>
+        </p:nvSpPr>
+        <p:spPr>
+          <a:xfrm>
+            <a:off x="1984248" y="941832"/>
+            <a:ext cx="8229600" cy="1143000"/>
+          </a:xfrm>
+          <a:prstGeom prst="rect">
+            <a:avLst/>
+          </a:prstGeom>
+          <a:noFill/>
+        </p:spPr>
+        <p:txBody>
+          <a:bodyPr wrap="square">
+            <a:spAutoFit/>
+          </a:bodyPr>
+          <a:lstStyle/>
+          <a:p>
+            <a:pPr>
+              <a:defRPr sz="3200">
+                <a:solidFill>
+                  <a:srgbClr val="25167A"/>
+                </a:solidFill>
+                <a:latin typeface="Arial"/>
+              </a:defRPr>
+            </a:pPr>
+            <a:r>
+              <a:t>Vijf voorwaarden — die gaan van je cijfer af</a:t>
+            </a:r>
+          </a:p>
+        </p:txBody>
+      </p:sp>
+      <p:sp>
+        <p:nvSpPr>
+          <p:cNvPr id="3" name="TextBox 2"/>
+          <p:cNvSpPr txBox="1"/>
+          <p:nvPr/>
+        </p:nvSpPr>
+        <p:spPr>
+          <a:xfrm>
+            <a:off x="1984248" y="2084831"/>
+            <a:ext cx="8778240" cy="4041648"/>
+          </a:xfrm>
+          <a:prstGeom prst="rect">
+            <a:avLst/>
+          </a:prstGeom>
+          <a:noFill/>
+        </p:spPr>
+        <p:txBody>
+          <a:bodyPr wrap="square">
+            <a:spAutoFit/>
+          </a:bodyPr>
+          <a:lstStyle/>
+          <a:p>
+            <a:pPr>
+              <a:defRPr sz="1700" b="1">
+                <a:solidFill>
+                  <a:srgbClr val="000000"/>
+                </a:solidFill>
+                <a:latin typeface="Arial"/>
+              </a:defRPr>
+            </a:pPr>
+            <a:r>
+              <a:t>Dit zijn geen criteria maar drempels. Beide cijfers, IDS en VA.</a:t>
+            </a:r>
+          </a:p>
+          <a:p>
+            <a:pPr lvl="1">
+              <a:defRPr sz="1400" b="0">
+                <a:solidFill>
+                  <a:srgbClr val="000000"/>
+                </a:solidFill>
+                <a:latin typeface="Arial"/>
+              </a:defRPr>
+            </a:pPr>
+            <a:r>
+              <a:t>App niet online, of een schone clone draait niet zonder handwerk</a:t>
+            </a:r>
+          </a:p>
+          <a:p>
+            <a:pPr lvl="1">
+              <a:defRPr sz="1400" b="0">
+                <a:solidFill>
+                  <a:srgbClr val="25167A"/>
+                </a:solidFill>
+                <a:latin typeface="Arial"/>
+              </a:defRPr>
+            </a:pPr>
+            <a:r>
+              <a:t>     -1,0</a:t>
+            </a:r>
+          </a:p>
+          <a:p>
+            <a:pPr lvl="1">
+              <a:defRPr sz="1400" b="0">
+                <a:solidFill>
+                  <a:srgbClr val="000000"/>
+                </a:solidFill>
+                <a:latin typeface="Arial"/>
+              </a:defRPr>
+            </a:pPr>
+            <a:r>
+              <a:t>Presentatie langer dan 10 minuten, exclusief vragen</a:t>
+            </a:r>
+          </a:p>
+          <a:p>
+            <a:pPr lvl="1">
+              <a:defRPr sz="1400" b="0">
+                <a:solidFill>
+                  <a:srgbClr val="25167A"/>
+                </a:solidFill>
+                <a:latin typeface="Arial"/>
+              </a:defRPr>
+            </a:pPr>
+            <a:r>
+              <a:t>     -1,0</a:t>
+            </a:r>
+          </a:p>
+          <a:p>
+            <a:pPr lvl="1">
+              <a:defRPr sz="1400" b="0">
+                <a:solidFill>
+                  <a:srgbClr val="000000"/>
+                </a:solidFill>
+                <a:latin typeface="Arial"/>
+              </a:defRPr>
+            </a:pPr>
+            <a:r>
+              <a:t>Geen slider, checkbox én dropdown, elk gekoppeld aan een tabel of grafiek</a:t>
+            </a:r>
+          </a:p>
+          <a:p>
+            <a:pPr lvl="1">
+              <a:defRPr sz="1400" b="0">
+                <a:solidFill>
+                  <a:srgbClr val="25167A"/>
+                </a:solidFill>
+                <a:latin typeface="Arial"/>
+              </a:defRPr>
+            </a:pPr>
+            <a:r>
+              <a:t>     -0,5</a:t>
+            </a:r>
+          </a:p>
+          <a:p>
+            <a:pPr>
+              <a:spcBef>
+                <a:spcPts val="1300"/>
+              </a:spcBef>
+              <a:defRPr sz="1700" b="1">
+                <a:solidFill>
+                  <a:srgbClr val="000000"/>
+                </a:solidFill>
+                <a:latin typeface="Arial"/>
+              </a:defRPr>
+            </a:pPr>
+            <a:r>
+              <a:t>En twee zonder aftrek, maar niet vrijblijvend:</a:t>
+            </a:r>
+          </a:p>
+          <a:p>
+            <a:pPr lvl="1">
+              <a:defRPr sz="1400" b="0">
+                <a:solidFill>
+                  <a:srgbClr val="505A64"/>
+                </a:solidFill>
+                <a:latin typeface="Arial"/>
+              </a:defRPr>
+            </a:pPr>
+            <a:r>
+              <a:t>Onderwerp op tijd gemeld · code van anderen met bron erbij, en uit te leggen</a:t>
+            </a:r>
+          </a:p>
+        </p:txBody>
+      </p:sp>
+      <p:sp>
+        <p:nvSpPr>
+          <p:cNvPr id="4" name="TextBox 3"/>
+          <p:cNvSpPr txBox="1"/>
+          <p:nvPr/>
+        </p:nvSpPr>
+        <p:spPr>
+          <a:xfrm>
+            <a:off x="9774936" y="6126480"/>
+            <a:ext cx="630936" cy="365760"/>
+          </a:xfrm>
+          <a:prstGeom prst="rect">
+            <a:avLst/>
+          </a:prstGeom>
+          <a:noFill/>
+        </p:spPr>
+        <p:txBody>
+          <a:bodyPr wrap="none">
+            <a:spAutoFit/>
+          </a:bodyPr>
+          <a:lstStyle/>
+          <a:p>
+            <a:pPr>
+              <a:defRPr sz="1200">
+                <a:solidFill>
+                  <a:srgbClr val="505A64"/>
+                </a:solidFill>
+                <a:latin typeface="Arial"/>
+              </a:defRPr>
+            </a:pPr>
+            <a:r>
+              <a:t>30</a:t>
+            </a:r>
+          </a:p>
+        </p:txBody>
+      </p:sp>
+    </p:spTree>
+  </p:cSld>
+  <p:clrMapOvr>
+    <a:masterClrMapping/>
+  </p:clrMapOvr>
+</p:sld>
+</file>
+
+<file path=ppt/slides/slide31.xml><?xml version="1.0" encoding="utf-8"?>
+<p:sld xmlns:a="http://schemas.openxmlformats.org/drawingml/2006/main" xmlns:p="http://schemas.openxmlformats.org/presentationml/2006/main" xmlns:r="http://schemas.openxmlformats.org/officeDocument/2006/relationships">
+  <p:cSld>
+    <p:spTree>
+      <p:nvGrpSpPr>
+        <p:cNvPr id="1" name=""/>
+        <p:cNvGrpSpPr/>
+        <p:nvPr/>
+      </p:nvGrpSpPr>
+      <p:grpSpPr/>
+      <p:sp>
+        <p:nvSpPr>
+          <p:cNvPr id="2" name="TextBox 1"/>
+          <p:cNvSpPr txBox="1"/>
+          <p:nvPr/>
+        </p:nvSpPr>
+        <p:spPr>
+          <a:xfrm>
+            <a:off x="1984248" y="941832"/>
+            <a:ext cx="8229600" cy="1143000"/>
+          </a:xfrm>
+          <a:prstGeom prst="rect">
+            <a:avLst/>
+          </a:prstGeom>
+          <a:noFill/>
+        </p:spPr>
+        <p:txBody>
+          <a:bodyPr wrap="square">
+            <a:spAutoFit/>
+          </a:bodyPr>
+          <a:lstStyle/>
+          <a:p>
+            <a:pPr>
+              <a:defRPr sz="3200">
+                <a:solidFill>
+                  <a:srgbClr val="25167A"/>
+                </a:solidFill>
+                <a:latin typeface="Arial"/>
+              </a:defRPr>
+            </a:pPr>
+            <a:r>
+              <a:t>Dat heb je vanmiddag al gedaan</a:t>
+            </a:r>
+          </a:p>
+        </p:txBody>
+      </p:sp>
+      <p:sp>
+        <p:nvSpPr>
+          <p:cNvPr id="3" name="TextBox 2"/>
+          <p:cNvSpPr txBox="1"/>
+          <p:nvPr/>
+        </p:nvSpPr>
+        <p:spPr>
+          <a:xfrm>
+            <a:off x="1984248" y="2084831"/>
+            <a:ext cx="8778240" cy="4041648"/>
+          </a:xfrm>
+          <a:prstGeom prst="rect">
+            <a:avLst/>
+          </a:prstGeom>
+          <a:noFill/>
+        </p:spPr>
+        <p:txBody>
+          <a:bodyPr wrap="square">
+            <a:spAutoFit/>
+          </a:bodyPr>
+          <a:lstStyle/>
+          <a:p>
+            <a:pPr>
+              <a:defRPr sz="1700" b="1">
+                <a:solidFill>
+                  <a:srgbClr val="000000"/>
+                </a:solidFill>
+                <a:latin typeface="Arial"/>
+              </a:defRPr>
+            </a:pPr>
+            <a:r>
+              <a:t>De demo van zojuist was Case 2 in het klein:</a:t>
+            </a:r>
+          </a:p>
+          <a:p>
+            <a:pPr lvl="1">
+              <a:defRPr sz="1400" b="0">
+                <a:solidFill>
+                  <a:srgbClr val="1B4D3E"/>
+                </a:solidFill>
+                <a:latin typeface="Arial"/>
+              </a:defRPr>
+            </a:pPr>
+            <a:r>
+              <a:t>twee tabellen op bot_naam samengevoegd, rijen geteld vóór en ná</a:t>
+            </a:r>
+          </a:p>
+          <a:p>
+            <a:pPr lvl="1">
+              <a:defRPr sz="1400" b="0">
+                <a:solidFill>
+                  <a:srgbClr val="000000"/>
+                </a:solidFill>
+                <a:latin typeface="Arial"/>
+              </a:defRPr>
+            </a:pPr>
+            <a:r>
+              <a:t>     → criterium Data verzameling</a:t>
+            </a:r>
+          </a:p>
+          <a:p>
+            <a:pPr lvl="1">
+              <a:defRPr sz="1400" b="0">
+                <a:solidFill>
+                  <a:srgbClr val="1B4D3E"/>
+                </a:solidFill>
+                <a:latin typeface="Arial"/>
+              </a:defRPr>
+            </a:pPr>
+            <a:r>
+              <a:t>928 lege waarden gevonden, en gezien wat ze met je percentage deden</a:t>
+            </a:r>
+          </a:p>
+          <a:p>
+            <a:pPr lvl="1">
+              <a:defRPr sz="1400" b="0">
+                <a:solidFill>
+                  <a:srgbClr val="000000"/>
+                </a:solidFill>
+                <a:latin typeface="Arial"/>
+              </a:defRPr>
+            </a:pPr>
+            <a:r>
+              <a:t>     → criterium Data verkenning</a:t>
+            </a:r>
+          </a:p>
+          <a:p>
+            <a:pPr lvl="1">
+              <a:defRPr sz="1400" b="0">
+                <a:solidFill>
+                  <a:srgbClr val="1B4D3E"/>
+                </a:solidFill>
+                <a:latin typeface="Arial"/>
+              </a:defRPr>
+            </a:pPr>
+            <a:r>
+              <a:t>diff en cumsum over het verloop van een stack</a:t>
+            </a:r>
+          </a:p>
+          <a:p>
+            <a:pPr lvl="1">
+              <a:defRPr sz="1400" b="0">
+                <a:solidFill>
+                  <a:srgbClr val="000000"/>
+                </a:solidFill>
+                <a:latin typeface="Arial"/>
+              </a:defRPr>
+            </a:pPr>
+            <a:r>
+              <a:t>     → criterium Vergelijken en annoteren</a:t>
+            </a:r>
+          </a:p>
+          <a:p>
+            <a:pPr>
+              <a:spcBef>
+                <a:spcPts val="1300"/>
+              </a:spcBef>
+              <a:defRPr sz="1700" b="1">
+                <a:solidFill>
+                  <a:srgbClr val="000000"/>
+                </a:solidFill>
+                <a:latin typeface="Arial"/>
+              </a:defRPr>
+            </a:pPr>
+            <a:r>
+              <a:t>Het verschil met de case: daar kiest niemand de dataset voor je,</a:t>
+            </a:r>
+          </a:p>
+          <a:p>
+            <a:pPr lvl="1">
+              <a:defRPr sz="1400" b="0">
+                <a:solidFill>
+                  <a:srgbClr val="505A64"/>
+                </a:solidFill>
+                <a:latin typeface="Arial"/>
+              </a:defRPr>
+            </a:pPr>
+            <a:r>
+              <a:t>en staat er geen kolom aan_zet klaar om je fout te laten zien.</a:t>
+            </a:r>
+          </a:p>
+        </p:txBody>
+      </p:sp>
+      <p:sp>
+        <p:nvSpPr>
+          <p:cNvPr id="4" name="TextBox 3"/>
+          <p:cNvSpPr txBox="1"/>
+          <p:nvPr/>
+        </p:nvSpPr>
+        <p:spPr>
+          <a:xfrm>
+            <a:off x="9774936" y="6126480"/>
+            <a:ext cx="630936" cy="365760"/>
+          </a:xfrm>
+          <a:prstGeom prst="rect">
+            <a:avLst/>
+          </a:prstGeom>
+          <a:noFill/>
+        </p:spPr>
+        <p:txBody>
+          <a:bodyPr wrap="none">
+            <a:spAutoFit/>
+          </a:bodyPr>
+          <a:lstStyle/>
+          <a:p>
+            <a:pPr>
+              <a:defRPr sz="1200">
+                <a:solidFill>
+                  <a:srgbClr val="505A64"/>
+                </a:solidFill>
+                <a:latin typeface="Arial"/>
+              </a:defRPr>
+            </a:pPr>
+            <a:r>
+              <a:t>31</a:t>
+            </a:r>
           </a:p>
         </p:txBody>
       </p:sp>

--- a/powerpoints/hoorcollege/03_Exploring_Manipulating_Data_aangevuld.pptx
+++ b/powerpoints/hoorcollege/03_Exploring_Manipulating_Data_aangevuld.pptx
@@ -41,6 +41,9 @@
     <p:sldId id="909" r:id="rId42"/>
     <p:sldId id="910" r:id="rId43"/>
     <p:sldId id="911" r:id="rId44"/>
+    <p:sldId id="912" r:id="rId45"/>
+    <p:sldId id="913" r:id="rId46"/>
+    <p:sldId id="914" r:id="rId47"/>
   </p:sldIdLst>
   <p:sldSz cx="12192000" cy="6858000"/>
   <p:notesSz cx="6858000" cy="9144000"/>
@@ -2105,33 +2108,33 @@
           <a:lstStyle/>
           <a:p>
             <a:r>
-              <a:t>De deadline is donderdag 18:00 en dat is geen</a:t>
-            </a:r>
-          </a:p>
-          <a:p>
-            <a:r>
-              <a:t>inlevermoment maar een BESLUIT: welke vraag, welke twee bronnen, op welke kolom die</a:t>
-            </a:r>
-          </a:p>
-          <a:p>
-            <a:r>
-              <a:t>aan elkaar passen, wie doet wat.</a:t>
+              <a:t>De y-as is logaritmisch, en dat is geen truc maar de</a:t>
+            </a:r>
+          </a:p>
+          <a:p>
+            <a:r>
+              <a:t>enige manier om allebei te zien: de piek is duizenden handen hoog en de staart is</a:t>
+            </a:r>
+          </a:p>
+          <a:p>
+            <a:r>
+              <a:t>één hand. Lineair zie je één balk en verder wit.</a:t>
             </a:r>
           </a:p>
           <a:p/>
           <a:p>
             <a:r>
-              <a:t>Het zinnetje over Den Haag en 's-Gravenhage is niet grappig bedoeld. Laat ze nu al</a:t>
-            </a:r>
-          </a:p>
-          <a:p>
-            <a:r>
-              <a:t>een keer kijken of hun twee bronnen echt een gemeenschappelijke kolom hebben met</a:t>
-            </a:r>
-          </a:p>
-          <a:p>
-            <a:r>
-              <a:t>dezelfde schrijfwijze.</a:t>
+              <a:t>Goede vraag aan de zaal: df["winst"].hist(bins=40) geeft precies dat lege plaatje.</a:t>
+            </a:r>
+          </a:p>
+          <a:p>
+            <a:r>
+              <a:t>Wie had gemerkt dat er iets ontbrak? De standaardinstelling van een grafiek is een</a:t>
+            </a:r>
+          </a:p>
+          <a:p>
+            <a:r>
+              <a:t>keuze die iemand anders voor je heeft gemaakt.</a:t>
             </a:r>
           </a:p>
         </p:txBody>
@@ -2201,22 +2204,44 @@
           <a:lstStyle/>
           <a:p>
             <a:r>
-              <a:t>Vergelijken en annoteren is het criterium waar</a:t>
-            </a:r>
-          </a:p>
-          <a:p>
-            <a:r>
-              <a:t>groepen punten laten liggen. Het vraagt diff, cumsum of shift - het verschil met het</a:t>
-            </a:r>
-          </a:p>
-          <a:p>
-            <a:r>
-              <a:t>moment ervoor, niet alleen de waarde. Ze hebben diff vanmiddag al gebruikt om de</a:t>
-            </a:r>
-          </a:p>
-          <a:p>
-            <a:r>
-              <a:t>winst-kolom te maken; zeg dat er hardop bij.</a:t>
+              <a:t>[Blok 3 - het gesprek van vandaag] Laat ze de</a:t>
+            </a:r>
+          </a:p>
+          <a:p>
+            <a:r>
+              <a:t>tabel zelf lezen voordat je iets zegt.</a:t>
+            </a:r>
+          </a:p>
+          <a:p/>
+          <a:p>
+            <a:r>
+              <a:t>De vraag is niet "waarom foldt de klas zoveel" maar "waarom levert elke andere actie</a:t>
+            </a:r>
+          </a:p>
+          <a:p>
+            <a:r>
+              <a:t>gemiddeld geld op, en doet niemand het". Antwoord: aan een tafel van folders wint de</a:t>
+            </a:r>
+          </a:p>
+          <a:p>
+            <a:r>
+              <a:t>big blind de small blind. Folden kost je bijna niets - en levert je ook niets op.</a:t>
+            </a:r>
+          </a:p>
+          <a:p/>
+          <a:p>
+            <a:r>
+              <a:t>Let op bij het navolgen: filter op aan_zet, anders tel je handen mee waarin de bot</a:t>
+            </a:r>
+          </a:p>
+          <a:p>
+            <a:r>
+              <a:t>nooit iets koos en komt elk percentage te laag uit. Dat is dezelfde val als in de</a:t>
+            </a:r>
+          </a:p>
+          <a:p>
+            <a:r>
+              <a:t>demo van vanmiddag.</a:t>
             </a:r>
           </a:p>
         </p:txBody>
@@ -2286,23 +2311,55 @@
           <a:lstStyle/>
           <a:p>
             <a:r>
-              <a:t>Deze dia is saai en bespaart je</a:t>
-            </a:r>
-          </a:p>
-          <a:p>
-            <a:r>
-              <a:t>in week 4 een half uur discussie. De aftrek gaat van BEIDE cijfers af, IDS en VA.</a:t>
+              <a:t>[Blok 4 - hier eindig je] Laat de uitslag</a:t>
+            </a:r>
+          </a:p>
+          <a:p>
+            <a:r>
+              <a:t>even staan voordat je hem uitlegt.</a:t>
             </a:r>
           </a:p>
           <a:p/>
           <a:p>
             <a:r>
-              <a:t>"Een schone clone draait zonder handmatige stappen" is de zwaarste: hun app moet het</a:t>
-            </a:r>
-          </a:p>
-          <a:p>
-            <a:r>
-              <a:t>doen op een computer die hun notebook nooit heeft gezien.</a:t>
+              <a:t>Het gaat niet om "de domme bot wint". Het gaat om: jullie drempels staan zo hoog dat</a:t>
+            </a:r>
+          </a:p>
+          <a:p>
+            <a:r>
+              <a:t>niet meedoen bijna net zo goed werkt als meedoen. Kijk naar nummer twee - die foldt</a:t>
+            </a:r>
+          </a:p>
+          <a:p>
+            <a:r>
+              <a:t>ruim tachtig procent en niet negenennegentig, en dat is het verschil.</a:t>
+            </a:r>
+          </a:p>
+          <a:p/>
+          <a:p>
+            <a:r>
+              <a:t>Over de correlatie: niet doorslaan. Een handvol bots draagt dat getal en een paar</a:t>
+            </a:r>
+          </a:p>
+          <a:p>
+            <a:r>
+              <a:t>tientallen punten is weinig. Dat onderscheid, zie ik een verband tegenover heb ik</a:t>
+            </a:r>
+          </a:p>
+          <a:p>
+            <a:r>
+              <a:t>iets aangetoond, is precies wat het criterium Analyse van Case 2 beoordeelt.</a:t>
+            </a:r>
+          </a:p>
+          <a:p/>
+          <a:p>
+            <a:r>
+              <a:t>De vraag voor donderdag is niet "moet ik minder folden" maar "waar liggen mijn</a:t>
+            </a:r>
+          </a:p>
+          <a:p>
+            <a:r>
+              <a:t>drempels, en waarom daar".</a:t>
             </a:r>
           </a:p>
         </p:txBody>
@@ -2372,22 +2429,33 @@
           <a:lstStyle/>
           <a:p>
             <a:r>
-              <a:t>Dit is de dia die de curriculum-audit vroeg.</a:t>
-            </a:r>
-          </a:p>
-          <a:p>
-            <a:r>
-              <a:t>Studenten leggen de koppeling tussen werkcollege en rubric zelf niet. Een zin - dit</a:t>
-            </a:r>
-          </a:p>
-          <a:p>
-            <a:r>
-              <a:t>is het criterium waarop je case wordt beoordeeld - is het verschil tussen een</a:t>
-            </a:r>
-          </a:p>
-          <a:p>
-            <a:r>
-              <a:t>oefening en een reden.</a:t>
+              <a:t>De deadline is donderdag 18:00 en dat is geen</a:t>
+            </a:r>
+          </a:p>
+          <a:p>
+            <a:r>
+              <a:t>inlevermoment maar een BESLUIT: welke vraag, welke twee bronnen, op welke kolom die</a:t>
+            </a:r>
+          </a:p>
+          <a:p>
+            <a:r>
+              <a:t>aan elkaar passen, wie doet wat.</a:t>
+            </a:r>
+          </a:p>
+          <a:p/>
+          <a:p>
+            <a:r>
+              <a:t>Het zinnetje over Den Haag en 's-Gravenhage is niet grappig bedoeld. Laat ze nu al</a:t>
+            </a:r>
+          </a:p>
+          <a:p>
+            <a:r>
+              <a:t>een keer kijken of hun twee bronnen echt een gemeenschappelijke kolom hebben met</a:t>
+            </a:r>
+          </a:p>
+          <a:p>
+            <a:r>
+              <a:t>dezelfde schrijfwijze.</a:t>
             </a:r>
           </a:p>
         </p:txBody>
@@ -2457,17 +2525,22 @@
           <a:lstStyle/>
           <a:p>
             <a:r>
-              <a:t>[EDA-recept] Dit recept is precies de volgorde van de demo straks:</a:t>
-            </a:r>
-          </a:p>
-          <a:p>
-            <a:r>
-              <a:t>describe -&gt; univariaat -&gt; bivariaat. Blok 1 is describe, blok 3 is bivariaat.</a:t>
-            </a:r>
-          </a:p>
-          <a:p>
-            <a:r>
-              <a:t>Zeg dat je het zo meteen op hun eigen toernooi doet, dan luisteren ze anders.</a:t>
+              <a:t>Vergelijken en annoteren is het criterium waar</a:t>
+            </a:r>
+          </a:p>
+          <a:p>
+            <a:r>
+              <a:t>groepen punten laten liggen. Het vraagt diff, cumsum of shift - het verschil met het</a:t>
+            </a:r>
+          </a:p>
+          <a:p>
+            <a:r>
+              <a:t>moment ervoor, niet alleen de waarde. Ze hebben diff vanmiddag al gebruikt om de</a:t>
+            </a:r>
+          </a:p>
+          <a:p>
+            <a:r>
+              <a:t>winst-kolom te maken; zeg dat er hardop bij.</a:t>
             </a:r>
           </a:p>
         </p:txBody>
@@ -2537,39 +2610,23 @@
           <a:lstStyle/>
           <a:p>
             <a:r>
-              <a:t>[Blok 1 - wat de samenvatting verbergt] Op het toernooi van deze week:</a:t>
-            </a:r>
-          </a:p>
-          <a:p>
-            <a:r>
-              <a:t>gemiddelde 0,0 - mediaan 0,0 - std 39 - laagste -1030 - hoogste +1750.</a:t>
+              <a:t>Deze dia is saai en bespaart je</a:t>
+            </a:r>
+          </a:p>
+          <a:p>
+            <a:r>
+              <a:t>in week 4 een half uur discussie. De aftrek gaat van BEIDE cijfers af, IDS en VA.</a:t>
             </a:r>
           </a:p>
           <a:p/>
           <a:p>
             <a:r>
-              <a:t>Het gemiddelde is exact nul en dat is geen toeval: poker is een nulsom, wat de</a:t>
-            </a:r>
-          </a:p>
-          <a:p>
-            <a:r>
-              <a:t>een wint verliest de ander. Dat is meteen je controle. Komt er geen nul uit je</a:t>
-            </a:r>
-          </a:p>
-          <a:p>
-            <a:r>
-              <a:t>eigen berekening, dan klopt je groepering niet.</a:t>
-            </a:r>
-          </a:p>
-          <a:p/>
-          <a:p>
-            <a:r>
-              <a:t>Mediaan nul betekent: in de meeste handen gebeurt er niets. En toch ging er in</a:t>
-            </a:r>
-          </a:p>
-          <a:p>
-            <a:r>
-              <a:t>een van die handen 1750 chips om. Vier getallen, en geen van de vier vertelt dat.</a:t>
+              <a:t>"Een schone clone draait zonder handmatige stappen" is de zwaarste: hun app moet het</a:t>
+            </a:r>
+          </a:p>
+          <a:p>
+            <a:r>
+              <a:t>doen op een computer die hun notebook nooit heeft gezien.</a:t>
             </a:r>
           </a:p>
         </p:txBody>
@@ -2639,33 +2696,22 @@
           <a:lstStyle/>
           <a:p>
             <a:r>
-              <a:t>[Blok 2 - de verdeling] Op hun data: 4838 van de 6750 handen vallen</a:t>
-            </a:r>
-          </a:p>
-          <a:p>
-            <a:r>
-              <a:t>tussen 0 en 20 chips. 1488 tussen -20 en -1. En dan de staarten: 53 handen tussen</a:t>
-            </a:r>
-          </a:p>
-          <a:p>
-            <a:r>
-              <a:t>-100 en -20, negen onder de -200, zeven boven de +200.</a:t>
-            </a:r>
-          </a:p>
-          <a:p/>
-          <a:p>
-            <a:r>
-              <a:t>Die ene piek rond nul zijn handen die zijn weggelegd zonder in de blinds te zitten.</a:t>
-            </a:r>
-          </a:p>
-          <a:p>
-            <a:r>
-              <a:t>Het echte spel zit in de zeven handen rechts. Vraag aan de zaal: welk van de vier</a:t>
-            </a:r>
-          </a:p>
-          <a:p>
-            <a:r>
-              <a:t>getallen van de vorige dia had je dat verteld? Geen enkel.</a:t>
+              <a:t>Dit is de dia die de curriculum-audit vroeg.</a:t>
+            </a:r>
+          </a:p>
+          <a:p>
+            <a:r>
+              <a:t>Studenten leggen de koppeling tussen werkcollege en rubric zelf niet. Een zin - dit</a:t>
+            </a:r>
+          </a:p>
+          <a:p>
+            <a:r>
+              <a:t>is het criterium waarop je case wordt beoordeeld - is het verschil tussen een</a:t>
+            </a:r>
+          </a:p>
+          <a:p>
+            <a:r>
+              <a:t>oefening en een reden.</a:t>
             </a:r>
           </a:p>
         </p:txBody>
@@ -2735,33 +2781,17 @@
           <a:lstStyle/>
           <a:p>
             <a:r>
-              <a:t>[Central tendency] Hier maakt de keuze het verschil tussen twee conclusies,</a:t>
-            </a:r>
-          </a:p>
-          <a:p>
-            <a:r>
-              <a:t>en dat kun je op hun data laten zien. Gemiddelde winst per hand: 0. Mediaan: 0.</a:t>
-            </a:r>
-          </a:p>
-          <a:p>
-            <a:r>
-              <a:t>Allebei nul, allebei waar, en samen verbergen ze een hand van +1750.</a:t>
-            </a:r>
-          </a:p>
-          <a:p/>
-          <a:p>
-            <a:r>
-              <a:t>Bij de bots ligt het andersom: de mediaan van de eindstand is 946, het gemiddelde</a:t>
-            </a:r>
-          </a:p>
-          <a:p>
-            <a:r>
-              <a:t>1000 (want nulsom). Dat verschil van 54 chips is de scheefheid - een paar bots</a:t>
-            </a:r>
-          </a:p>
-          <a:p>
-            <a:r>
-              <a:t>hebben veel, de meeste iets minder dan waarmee ze begonnen.</a:t>
+              <a:t>[EDA-recept] Dit recept is precies de volgorde van de demo straks:</a:t>
+            </a:r>
+          </a:p>
+          <a:p>
+            <a:r>
+              <a:t>describe -&gt; univariaat -&gt; bivariaat. Blok 1 is describe, blok 3 is bivariaat.</a:t>
+            </a:r>
+          </a:p>
+          <a:p>
+            <a:r>
+              <a:t>Zeg dat je het zo meteen op hun eigen toernooi doet, dan luisteren ze anders.</a:t>
             </a:r>
           </a:p>
         </p:txBody>
@@ -2831,39 +2861,39 @@
           <a:lstStyle/>
           <a:p>
             <a:r>
-              <a:t>[Filteren] De twee filters uit de demo:</a:t>
+              <a:t>[Blok 1 - wat de samenvatting verbergt] Op het toernooi van deze week:</a:t>
+            </a:r>
+          </a:p>
+          <a:p>
+            <a:r>
+              <a:t>gemiddelde 0,0 - mediaan 0,0 - std 39 - laagste -1030 - hoogste +1750.</a:t>
             </a:r>
           </a:p>
           <a:p/>
           <a:p>
             <a:r>
-              <a:t>  handen[handen["bot_naam"] == "500959250"]      -- rijen op inhoud</a:t>
-            </a:r>
-          </a:p>
-          <a:p>
-            <a:r>
-              <a:t>  handen.loc[handen["aan_zet"], "actie"]         -- boolean mask</a:t>
+              <a:t>Het gemiddelde is exact nul en dat is geen toeval: poker is een nulsom, wat de</a:t>
+            </a:r>
+          </a:p>
+          <a:p>
+            <a:r>
+              <a:t>een wint verliest de ander. Dat is meteen je controle. Komt er geen nul uit je</a:t>
+            </a:r>
+          </a:p>
+          <a:p>
+            <a:r>
+              <a:t>eigen berekening, dan klopt je groepering niet.</a:t>
             </a:r>
           </a:p>
           <a:p/>
           <a:p>
             <a:r>
-              <a:t>Die tweede is de belangrijkste regel van het college. aan_zet is een kolom vol</a:t>
-            </a:r>
-          </a:p>
-          <a:p>
-            <a:r>
-              <a:t>True/False; in .loc zetten houdt alleen de rijen waar hij True is. 928 van de 6750</a:t>
-            </a:r>
-          </a:p>
-          <a:p>
-            <a:r>
-              <a:t>logregels zijn handen waarin de bot nooit iets koos - hij zat in de blinds en de</a:t>
-            </a:r>
-          </a:p>
-          <a:p>
-            <a:r>
-              <a:t>hand was al voorbij.</a:t>
+              <a:t>Mediaan nul betekent: in de meeste handen gebeurt er niets. En toch ging er in</a:t>
+            </a:r>
+          </a:p>
+          <a:p>
+            <a:r>
+              <a:t>een van die handen 1750 chips om. Vier getallen, en geen van de vier vertelt dat.</a:t>
             </a:r>
           </a:p>
         </p:txBody>
@@ -2933,50 +2963,33 @@
           <a:lstStyle/>
           <a:p>
             <a:r>
-              <a:t>[Nieuwe variabelen] De winst-kolom is hier het voorbeeld, en hij komt</a:t>
-            </a:r>
-          </a:p>
-          <a:p>
-            <a:r>
-              <a:t>niet uit het log maar reken je zelf uit:</a:t>
+              <a:t>[Blok 2 - de verdeling] Op hun data: 4838 van de 6750 handen vallen</a:t>
+            </a:r>
+          </a:p>
+          <a:p>
+            <a:r>
+              <a:t>tussen 0 en 20 chips. 1488 tussen -20 en -1. En dan de staarten: 53 handen tussen</a:t>
+            </a:r>
+          </a:p>
+          <a:p>
+            <a:r>
+              <a:t>-100 en -20, negen onder de -200, zeven boven de +200.</a:t>
             </a:r>
           </a:p>
           <a:p/>
           <a:p>
             <a:r>
-              <a:t>  handen["winst"] = handen.groupby(["bot_naam","simulatie"])["stack"].diff()</a:t>
-            </a:r>
-          </a:p>
-          <a:p>
-            <a:r>
-              <a:t>                          .fillna(handen["stack"] - 1000)</a:t>
-            </a:r>
-          </a:p>
-          <a:p/>
-          <a:p>
-            <a:r>
-              <a:t>Het log bewaart de stack NA elke hand, dus winst is het verschil met de hand</a:t>
-            </a:r>
-          </a:p>
-          <a:p>
-            <a:r>
-              <a:t>ervoor. Twee dingen die misgaan: groeperen zonder simulatie (dan trek je de</a:t>
-            </a:r>
-          </a:p>
-          <a:p>
-            <a:r>
-              <a:t>eerste hand van zitting 1 af van de laatste van zitting 0), en de NaN van de</a:t>
-            </a:r>
-          </a:p>
-          <a:p>
-            <a:r>
-              <a:t>eerste hand laten staan.</a:t>
-            </a:r>
-          </a:p>
-          <a:p/>
-          <a:p>
-            <a:r>
-              <a:t>Controle: alle winst samen is precies 0.</a:t>
+              <a:t>Die ene piek rond nul zijn handen die zijn weggelegd zonder in de blinds te zitten.</a:t>
+            </a:r>
+          </a:p>
+          <a:p>
+            <a:r>
+              <a:t>Het echte spel zit in de zeven handen rechts. Vraag aan de zaal: welk van de vier</a:t>
+            </a:r>
+          </a:p>
+          <a:p>
+            <a:r>
+              <a:t>getallen van de vorige dia had je dat verteld? Geen enkel.</a:t>
             </a:r>
           </a:p>
         </p:txBody>
@@ -3200,46 +3213,33 @@
           <a:lstStyle/>
           <a:p>
             <a:r>
-              <a:t>[Groupby] Een-op-een met de vorige dia:</a:t>
+              <a:t>[Central tendency] Hier maakt de keuze het verschil tussen twee conclusies,</a:t>
+            </a:r>
+          </a:p>
+          <a:p>
+            <a:r>
+              <a:t>en dat kun je op hun data laten zien. Gemiddelde winst per hand: 0. Mediaan: 0.</a:t>
+            </a:r>
+          </a:p>
+          <a:p>
+            <a:r>
+              <a:t>Allebei nul, allebei waar, en samen verbergen ze een hand van +1750.</a:t>
             </a:r>
           </a:p>
           <a:p/>
           <a:p>
             <a:r>
-              <a:t>  gapminder.groupby('continent')['pop'].sum()</a:t>
-            </a:r>
-          </a:p>
-          <a:p>
-            <a:r>
-              <a:t>  handen.groupby('bot_naam')['winst'].sum()</a:t>
-            </a:r>
-          </a:p>
-          <a:p/>
-          <a:p>
-            <a:r>
-              <a:t>Letterlijk dezelfde regel. En dan de valkuil, die je moet laten zien:</a:t>
-            </a:r>
-          </a:p>
-          <a:p/>
-          <a:p>
-            <a:r>
-              <a:t>  handen.groupby('bot_naam')['stack'].sum()   -&gt;  258.550 chips</a:t>
-            </a:r>
-          </a:p>
-          <a:p/>
-          <a:p>
-            <a:r>
-              <a:t>Geen foutmelding, keurig getal, volslagen onzin. Een stack is een STAND, geen</a:t>
-            </a:r>
-          </a:p>
-          <a:p>
-            <a:r>
-              <a:t>stroom. Dat over 250 handen optellen is hetzelfde als de bevolking van Europa</a:t>
-            </a:r>
-          </a:p>
-          <a:p>
-            <a:r>
-              <a:t>over alle twaalf gapminder-jaren optellen. Voor een stand wil je .last().</a:t>
+              <a:t>Bij de bots ligt het andersom: de mediaan van de eindstand is 946, het gemiddelde</a:t>
+            </a:r>
+          </a:p>
+          <a:p>
+            <a:r>
+              <a:t>1000 (want nulsom). Dat verschil van 54 chips is de scheefheid - een paar bots</a:t>
+            </a:r>
+          </a:p>
+          <a:p>
+            <a:r>
+              <a:t>hebben veel, de meeste iets minder dan waarmee ze begonnen.</a:t>
             </a:r>
           </a:p>
         </p:txBody>
@@ -3309,6 +3309,330 @@
           <a:lstStyle/>
           <a:p>
             <a:r>
+              <a:t>[Filteren] De twee filters uit de demo:</a:t>
+            </a:r>
+          </a:p>
+          <a:p/>
+          <a:p>
+            <a:r>
+              <a:t>  handen[handen["bot_naam"] == "500959250"]      -- rijen op inhoud</a:t>
+            </a:r>
+          </a:p>
+          <a:p>
+            <a:r>
+              <a:t>  handen.loc[handen["aan_zet"], "actie"]         -- boolean mask</a:t>
+            </a:r>
+          </a:p>
+          <a:p/>
+          <a:p>
+            <a:r>
+              <a:t>Die tweede is de belangrijkste regel van het college. aan_zet is een kolom vol</a:t>
+            </a:r>
+          </a:p>
+          <a:p>
+            <a:r>
+              <a:t>True/False; in .loc zetten houdt alleen de rijen waar hij True is. 928 van de 6750</a:t>
+            </a:r>
+          </a:p>
+          <a:p>
+            <a:r>
+              <a:t>logregels zijn handen waarin de bot nooit iets koos - hij zat in de blinds en de</a:t>
+            </a:r>
+          </a:p>
+          <a:p>
+            <a:r>
+              <a:t>hand was al voorbij.</a:t>
+            </a:r>
+          </a:p>
+        </p:txBody>
+      </p:sp>
+      <p:sp>
+        <p:nvSpPr>
+          <p:cNvPr id="4" name="Slide Number Placeholder 3"/>
+          <p:cNvSpPr>
+            <a:spLocks noGrp="1"/>
+          </p:cNvSpPr>
+          <p:nvPr>
+            <p:ph type="sldNum"/>
+          </p:nvPr>
+        </p:nvSpPr>
+        <p:spPr/>
+      </p:sp>
+    </p:spTree>
+  </p:cSld>
+  <p:clrMapOvr>
+    <a:masterClrMapping/>
+  </p:clrMapOvr>
+</p:notes>
+</file>
+
+<file path=ppt/notesSlides/notesSlide22.xml><?xml version="1.0" encoding="utf-8"?>
+<p:notes xmlns:a="http://schemas.openxmlformats.org/drawingml/2006/main" xmlns:p="http://schemas.openxmlformats.org/presentationml/2006/main" xmlns:r="http://schemas.openxmlformats.org/officeDocument/2006/relationships">
+  <p:cSld>
+    <p:spTree>
+      <p:nvGrpSpPr>
+        <p:cNvPr id="1" name=""/>
+        <p:cNvGrpSpPr/>
+        <p:nvPr/>
+      </p:nvGrpSpPr>
+      <p:grpSpPr>
+        <a:xfrm>
+          <a:off x="0" y="0"/>
+          <a:ext cx="0" cy="0"/>
+          <a:chOff x="0" y="0"/>
+          <a:chExt cx="0" cy="0"/>
+        </a:xfrm>
+      </p:grpSpPr>
+      <p:sp>
+        <p:nvSpPr>
+          <p:cNvPr id="2" name="Slide Image Placeholder 1"/>
+          <p:cNvSpPr>
+            <a:spLocks noGrp="1"/>
+          </p:cNvSpPr>
+          <p:nvPr>
+            <p:ph type="sldImg"/>
+          </p:nvPr>
+        </p:nvSpPr>
+        <p:spPr/>
+      </p:sp>
+      <p:sp>
+        <p:nvSpPr>
+          <p:cNvPr id="3" name="Notes Placeholder 2"/>
+          <p:cNvSpPr>
+            <a:spLocks noGrp="1"/>
+          </p:cNvSpPr>
+          <p:nvPr>
+            <p:ph type="body"/>
+          </p:nvPr>
+        </p:nvSpPr>
+        <p:spPr/>
+        <p:txBody>
+          <a:bodyPr/>
+          <a:lstStyle/>
+          <a:p>
+            <a:r>
+              <a:t>[Nieuwe variabelen] De winst-kolom is hier het voorbeeld, en hij komt</a:t>
+            </a:r>
+          </a:p>
+          <a:p>
+            <a:r>
+              <a:t>niet uit het log maar reken je zelf uit:</a:t>
+            </a:r>
+          </a:p>
+          <a:p/>
+          <a:p>
+            <a:r>
+              <a:t>  handen["winst"] = handen.groupby(["bot_naam","simulatie"])["stack"].diff()</a:t>
+            </a:r>
+          </a:p>
+          <a:p>
+            <a:r>
+              <a:t>                          .fillna(handen["stack"] - 1000)</a:t>
+            </a:r>
+          </a:p>
+          <a:p/>
+          <a:p>
+            <a:r>
+              <a:t>Het log bewaart de stack NA elke hand, dus winst is het verschil met de hand</a:t>
+            </a:r>
+          </a:p>
+          <a:p>
+            <a:r>
+              <a:t>ervoor. Twee dingen die misgaan: groeperen zonder simulatie (dan trek je de</a:t>
+            </a:r>
+          </a:p>
+          <a:p>
+            <a:r>
+              <a:t>eerste hand van zitting 1 af van de laatste van zitting 0), en de NaN van de</a:t>
+            </a:r>
+          </a:p>
+          <a:p>
+            <a:r>
+              <a:t>eerste hand laten staan.</a:t>
+            </a:r>
+          </a:p>
+          <a:p/>
+          <a:p>
+            <a:r>
+              <a:t>Controle: alle winst samen is precies 0.</a:t>
+            </a:r>
+          </a:p>
+        </p:txBody>
+      </p:sp>
+      <p:sp>
+        <p:nvSpPr>
+          <p:cNvPr id="4" name="Slide Number Placeholder 3"/>
+          <p:cNvSpPr>
+            <a:spLocks noGrp="1"/>
+          </p:cNvSpPr>
+          <p:nvPr>
+            <p:ph type="sldNum"/>
+          </p:nvPr>
+        </p:nvSpPr>
+        <p:spPr/>
+      </p:sp>
+    </p:spTree>
+  </p:cSld>
+  <p:clrMapOvr>
+    <a:masterClrMapping/>
+  </p:clrMapOvr>
+</p:notes>
+</file>
+
+<file path=ppt/notesSlides/notesSlide23.xml><?xml version="1.0" encoding="utf-8"?>
+<p:notes xmlns:a="http://schemas.openxmlformats.org/drawingml/2006/main" xmlns:p="http://schemas.openxmlformats.org/presentationml/2006/main" xmlns:r="http://schemas.openxmlformats.org/officeDocument/2006/relationships">
+  <p:cSld>
+    <p:spTree>
+      <p:nvGrpSpPr>
+        <p:cNvPr id="1" name=""/>
+        <p:cNvGrpSpPr/>
+        <p:nvPr/>
+      </p:nvGrpSpPr>
+      <p:grpSpPr>
+        <a:xfrm>
+          <a:off x="0" y="0"/>
+          <a:ext cx="0" cy="0"/>
+          <a:chOff x="0" y="0"/>
+          <a:chExt cx="0" cy="0"/>
+        </a:xfrm>
+      </p:grpSpPr>
+      <p:sp>
+        <p:nvSpPr>
+          <p:cNvPr id="2" name="Slide Image Placeholder 1"/>
+          <p:cNvSpPr>
+            <a:spLocks noGrp="1"/>
+          </p:cNvSpPr>
+          <p:nvPr>
+            <p:ph type="sldImg"/>
+          </p:nvPr>
+        </p:nvSpPr>
+        <p:spPr/>
+      </p:sp>
+      <p:sp>
+        <p:nvSpPr>
+          <p:cNvPr id="3" name="Notes Placeholder 2"/>
+          <p:cNvSpPr>
+            <a:spLocks noGrp="1"/>
+          </p:cNvSpPr>
+          <p:nvPr>
+            <p:ph type="body"/>
+          </p:nvPr>
+        </p:nvSpPr>
+        <p:spPr/>
+        <p:txBody>
+          <a:bodyPr/>
+          <a:lstStyle/>
+          <a:p>
+            <a:r>
+              <a:t>[Groupby] Een-op-een met de vorige dia:</a:t>
+            </a:r>
+          </a:p>
+          <a:p/>
+          <a:p>
+            <a:r>
+              <a:t>  gapminder.groupby('continent')['pop'].sum()</a:t>
+            </a:r>
+          </a:p>
+          <a:p>
+            <a:r>
+              <a:t>  handen.groupby('bot_naam')['winst'].sum()</a:t>
+            </a:r>
+          </a:p>
+          <a:p/>
+          <a:p>
+            <a:r>
+              <a:t>Letterlijk dezelfde regel. En dan de valkuil, die je moet laten zien:</a:t>
+            </a:r>
+          </a:p>
+          <a:p/>
+          <a:p>
+            <a:r>
+              <a:t>  handen.groupby('bot_naam')['stack'].sum()   -&gt;  258.550 chips</a:t>
+            </a:r>
+          </a:p>
+          <a:p/>
+          <a:p>
+            <a:r>
+              <a:t>Geen foutmelding, keurig getal, volslagen onzin. Een stack is een STAND, geen</a:t>
+            </a:r>
+          </a:p>
+          <a:p>
+            <a:r>
+              <a:t>stroom. Dat over 250 handen optellen is hetzelfde als de bevolking van Europa</a:t>
+            </a:r>
+          </a:p>
+          <a:p>
+            <a:r>
+              <a:t>over alle twaalf gapminder-jaren optellen. Voor een stand wil je .last().</a:t>
+            </a:r>
+          </a:p>
+        </p:txBody>
+      </p:sp>
+      <p:sp>
+        <p:nvSpPr>
+          <p:cNvPr id="4" name="Slide Number Placeholder 3"/>
+          <p:cNvSpPr>
+            <a:spLocks noGrp="1"/>
+          </p:cNvSpPr>
+          <p:nvPr>
+            <p:ph type="sldNum"/>
+          </p:nvPr>
+        </p:nvSpPr>
+        <p:spPr/>
+      </p:sp>
+    </p:spTree>
+  </p:cSld>
+  <p:clrMapOvr>
+    <a:masterClrMapping/>
+  </p:clrMapOvr>
+</p:notes>
+</file>
+
+<file path=ppt/notesSlides/notesSlide24.xml><?xml version="1.0" encoding="utf-8"?>
+<p:notes xmlns:a="http://schemas.openxmlformats.org/drawingml/2006/main" xmlns:p="http://schemas.openxmlformats.org/presentationml/2006/main" xmlns:r="http://schemas.openxmlformats.org/officeDocument/2006/relationships">
+  <p:cSld>
+    <p:spTree>
+      <p:nvGrpSpPr>
+        <p:cNvPr id="1" name=""/>
+        <p:cNvGrpSpPr/>
+        <p:nvPr/>
+      </p:nvGrpSpPr>
+      <p:grpSpPr>
+        <a:xfrm>
+          <a:off x="0" y="0"/>
+          <a:ext cx="0" cy="0"/>
+          <a:chOff x="0" y="0"/>
+          <a:chExt cx="0" cy="0"/>
+        </a:xfrm>
+      </p:grpSpPr>
+      <p:sp>
+        <p:nvSpPr>
+          <p:cNvPr id="2" name="Slide Image Placeholder 1"/>
+          <p:cNvSpPr>
+            <a:spLocks noGrp="1"/>
+          </p:cNvSpPr>
+          <p:nvPr>
+            <p:ph type="sldImg"/>
+          </p:nvPr>
+        </p:nvSpPr>
+        <p:spPr/>
+      </p:sp>
+      <p:sp>
+        <p:nvSpPr>
+          <p:cNvPr id="3" name="Notes Placeholder 2"/>
+          <p:cNvSpPr>
+            <a:spLocks noGrp="1"/>
+          </p:cNvSpPr>
+          <p:nvPr>
+            <p:ph type="body"/>
+          </p:nvPr>
+        </p:nvSpPr>
+        <p:spPr/>
+        <p:txBody>
+          <a:bodyPr/>
+          <a:lstStyle/>
+          <a:p>
+            <a:r>
               <a:t>[Opdracht] De opdracht is dit jaar niet gapminder maar hun eigen</a:t>
             </a:r>
           </a:p>
@@ -3882,39 +4206,39 @@
           <a:lstStyle/>
           <a:p>
             <a:r>
-              <a:t>[Blok 3 - het gesprek van vandaag] Laat ze de</a:t>
-            </a:r>
-          </a:p>
-          <a:p>
-            <a:r>
-              <a:t>tabel zelf lezen voordat je iets zegt.</a:t>
+              <a:t>[Blok 1] Vier getallen op tafel en dan stil zijn.</a:t>
             </a:r>
           </a:p>
           <a:p/>
           <a:p>
             <a:r>
-              <a:t>De vraag is niet "waarom foldt de klas zoveel" maar "waarom levert elke andere actie</a:t>
-            </a:r>
-          </a:p>
-          <a:p>
-            <a:r>
-              <a:t>gemiddeld geld op, en doet niemand het". Antwoord: aan een tafel van folders wint de</a:t>
-            </a:r>
-          </a:p>
-          <a:p>
-            <a:r>
-              <a:t>big blind de small blind. Folden kost je bijna niets - en levert je ook niets op.</a:t>
+              <a:t>Het gemiddelde is exact nul en dat is geen toeval: poker is een nulsom, wat de een</a:t>
+            </a:r>
+          </a:p>
+          <a:p>
+            <a:r>
+              <a:t>wint verliest de ander. Daarmee is het meteen je controle -- komt er geen nul uit je</a:t>
+            </a:r>
+          </a:p>
+          <a:p>
+            <a:r>
+              <a:t>eigen berekening, dan klopt je groepering niet en is alles daarna onzin.</a:t>
             </a:r>
           </a:p>
           <a:p/>
           <a:p>
             <a:r>
-              <a:t>Let op bij het navolgen: filter op aan_zet, anders tel je handen mee waarin de bot</a:t>
-            </a:r>
-          </a:p>
-          <a:p>
-            <a:r>
-              <a:t>nooit iets koos en komt elk percentage te laag uit.</a:t>
+              <a:t>Mediaan nul betekent: in de meeste handen gebeurt er niets. En toch ging er in een</a:t>
+            </a:r>
+          </a:p>
+          <a:p>
+            <a:r>
+              <a:t>van die handen meer dan duizend chips om. Vraag het aan de zaal voordat je het zegt:</a:t>
+            </a:r>
+          </a:p>
+          <a:p>
+            <a:r>
+              <a:t>welk van deze vier getallen had je dat verteld?</a:t>
             </a:r>
           </a:p>
         </p:txBody>
@@ -3984,55 +4308,33 @@
           <a:lstStyle/>
           <a:p>
             <a:r>
-              <a:t>[Blok 4 - hier eindig je] Laat de uitslag</a:t>
-            </a:r>
-          </a:p>
-          <a:p>
-            <a:r>
-              <a:t>even staan voordat je hem uitlegt.</a:t>
+              <a:t>[Blok 2] De bakjes zijn met opzet ongelijk.</a:t>
+            </a:r>
+          </a:p>
+          <a:p>
+            <a:r>
+              <a:t>Rond nul zit bijna alles, dus daar wil je fijn verdelen; de staarten zijn zo dun dat</a:t>
+            </a:r>
+          </a:p>
+          <a:p>
+            <a:r>
+              <a:t>ze alleen als één bakje zichtbaar blijven.</a:t>
             </a:r>
           </a:p>
           <a:p/>
           <a:p>
             <a:r>
-              <a:t>Tien chips verschil, over 6750 beslissingen. Dat is geen klinkende overwinning en dat</a:t>
-            </a:r>
-          </a:p>
-          <a:p>
-            <a:r>
-              <a:t>is precies goed: het gaat niet om "de domme bot wint", het gaat om "jullie drempels</a:t>
-            </a:r>
-          </a:p>
-          <a:p>
-            <a:r>
-              <a:t>staan zo hoog dat niet meedoen bijna net zo goed werkt als meedoen".</a:t>
-            </a:r>
-          </a:p>
-          <a:p/>
-          <a:p>
-            <a:r>
-              <a:t>Correlatie fold% met eindstand: -0,69. Niet doorslaan - vier bots dragen dat getal en</a:t>
-            </a:r>
-          </a:p>
-          <a:p>
-            <a:r>
-              <a:t>27 punten is weinig. Dat onderscheid, zie ik een verband tegenover heb ik iets</a:t>
-            </a:r>
-          </a:p>
-          <a:p>
-            <a:r>
-              <a:t>aangetoond, is precies wat het criterium Analyse van Case 2 beoordeelt.</a:t>
-            </a:r>
-          </a:p>
-          <a:p/>
-          <a:p>
-            <a:r>
-              <a:t>De vraag voor donderdag is niet "moet ik minder folden" maar "waar liggen mijn</a:t>
-            </a:r>
-          </a:p>
-          <a:p>
-            <a:r>
-              <a:t>drempels, en waarom daar".</a:t>
+              <a:t>Die piek rond nul zijn handen die zijn weggelegd zonder in de blinds te zitten: je</a:t>
+            </a:r>
+          </a:p>
+          <a:p>
+            <a:r>
+              <a:t>verliest niets en je wint niets. Het spel gebeurt in de handen aan de randen, en dat</a:t>
+            </a:r>
+          </a:p>
+          <a:p>
+            <a:r>
+              <a:t>zijn er een paar van de duizenden.</a:t>
             </a:r>
           </a:p>
         </p:txBody>
@@ -13939,7 +14241,7 @@
               </a:defRPr>
             </a:pPr>
             <a:r>
-              <a:t>handsterkte · winkans · pot odds — en die laatste twee naast elkaar is een beslisregel</a:t>
+              <a:t>handsterkte · winkans · pot odds — die laatste twee naast elkaar is een beslisregel</a:t>
             </a:r>
           </a:p>
           <a:p>
@@ -13968,7 +14270,7 @@
               </a:defRPr>
             </a:pPr>
             <a:r>
-              <a:t>live testen tegen een klasgenoot · v2 naast v1 · de spelregels terugvinden in je eigen log</a:t>
+              <a:t>live testen tegen een klasgenoot · v2 naast v1 · de spelregels in je eigen log</a:t>
             </a:r>
           </a:p>
           <a:p>
@@ -14782,7 +15084,7 @@
               </a:defRPr>
             </a:pPr>
             <a:r>
-              <a:t>Wat het log over de klas zegt</a:t>
+              <a:t>Wat de samenvatting verbergt</a:t>
             </a:r>
           </a:p>
         </p:txBody>
@@ -14812,13 +15114,13 @@
             <a:pPr>
               <a:defRPr sz="1700" b="1">
                 <a:solidFill>
-                  <a:srgbClr val="000000"/>
+                  <a:srgbClr val="1B4D3E"/>
                 </a:solidFill>
                 <a:latin typeface="Arial"/>
               </a:defRPr>
             </a:pPr>
             <a:r>
-              <a:t>6750 beslissingen: 27 bots, 50 handen, 5 zittingen.</a:t>
+              <a:t>df["winst"].describe()</a:t>
             </a:r>
           </a:p>
           <a:p>
@@ -14831,46 +15133,46 @@
               </a:defRPr>
             </a:pPr>
             <a:r>
-              <a:t>fold · 92,2% van alle beslissingen · gemiddeld -3 chips</a:t>
+              <a:t>gemiddelde 0,0 · nulsom: wat de een wint, verliest de ander</a:t>
             </a:r>
           </a:p>
           <a:p>
             <a:pPr lvl="1">
               <a:defRPr sz="1400" b="0">
                 <a:solidFill>
-                  <a:srgbClr val="1B4D3E"/>
+                  <a:srgbClr val="000000"/>
                 </a:solidFill>
                 <a:latin typeface="Arial"/>
               </a:defRPr>
             </a:pPr>
             <a:r>
-              <a:t>call · 5,9% · gemiddeld +10 chips</a:t>
+              <a:t>mediaan 0,0 · in de meeste handen gebeurt er niets</a:t>
             </a:r>
           </a:p>
           <a:p>
             <a:pPr lvl="1">
               <a:defRPr sz="1400" b="0">
                 <a:solidFill>
-                  <a:srgbClr val="1B4D3E"/>
+                  <a:srgbClr val="000000"/>
                 </a:solidFill>
                 <a:latin typeface="Arial"/>
               </a:defRPr>
             </a:pPr>
             <a:r>
-              <a:t>raise · 1,3% · gemiddeld +65 chips</a:t>
+              <a:t>standaarddeviatie 39</a:t>
             </a:r>
           </a:p>
           <a:p>
             <a:pPr lvl="1">
               <a:defRPr sz="1400" b="0">
                 <a:solidFill>
-                  <a:srgbClr val="1B4D3E"/>
+                  <a:srgbClr val="000000"/>
                 </a:solidFill>
                 <a:latin typeface="Arial"/>
               </a:defRPr>
             </a:pPr>
             <a:r>
-              <a:t>grote_raise · 0,6% · gemiddeld +19 chips</a:t>
+              <a:t>laagste -1030 · hoogste +1750 — iemand verloor zijn hele stack in één hand</a:t>
             </a:r>
           </a:p>
           <a:p>
@@ -14886,15 +15188,12 @@
               </a:defRPr>
             </a:pPr>
             <a:r>
-              <a:t>Elke actie behalve fold levert gemiddeld geld op.</a:t>
-            </a:r>
-          </a:p>
-          <a:p>
-            <a:pPr>
-              <a:spcBef>
-                <a:spcPts val="1300"/>
-              </a:spcBef>
-              <a:defRPr sz="1700" b="1">
+              <a:t>Gemiddelde nul, mediaan nul. Maar in één hand ging er 1750 om.</a:t>
+            </a:r>
+          </a:p>
+          <a:p>
+            <a:pPr lvl="1">
+              <a:defRPr sz="1400" b="0">
                 <a:solidFill>
                   <a:srgbClr val="000000"/>
                 </a:solidFill>
@@ -14902,33 +15201,7 @@
               </a:defRPr>
             </a:pPr>
             <a:r>
-              <a:t>En toch is de mediaan van alle handen 0.</a:t>
-            </a:r>
-          </a:p>
-          <a:p>
-            <a:pPr lvl="1">
-              <a:defRPr sz="1400" b="0">
-                <a:solidFill>
-                  <a:srgbClr val="000000"/>
-                </a:solidFill>
-                <a:latin typeface="Arial"/>
-              </a:defRPr>
-            </a:pPr>
-            <a:r>
-              <a:t>4838 van de 6750 handen leveren tussen 0 en 20 chips op — dat is de blind, niet het spel</a:t>
-            </a:r>
-          </a:p>
-          <a:p>
-            <a:pPr lvl="1">
-              <a:defRPr sz="1400" b="0">
-                <a:solidFill>
-                  <a:srgbClr val="505A64"/>
-                </a:solidFill>
-                <a:latin typeface="Arial"/>
-              </a:defRPr>
-            </a:pPr>
-            <a:r>
-              <a:t>Zeven handen maken de hele staart. Die zie je in geen enkel samenvattend getal terug.</a:t>
+              <a:t>Wat zeggen die drie getallen dan eigenlijk?</a:t>
             </a:r>
           </a:p>
         </p:txBody>
@@ -15018,7 +15291,7 @@
               </a:defRPr>
             </a:pPr>
             <a:r>
-              <a:t>De bot die niet nadenkt werd eerste</a:t>
+              <a:t>En dat zie je in het histogram</a:t>
             </a:r>
           </a:p>
         </p:txBody>
@@ -15048,26 +15321,26 @@
             <a:pPr>
               <a:defRPr sz="1700" b="1">
                 <a:solidFill>
-                  <a:srgbClr val="000000"/>
+                  <a:srgbClr val="1B4D3E"/>
                 </a:solidFill>
                 <a:latin typeface="Arial"/>
               </a:defRPr>
             </a:pPr>
             <a:r>
-              <a:t>Toernooi week 3, 27 bots. De uitslag bovenaan:</a:t>
+              <a:t>df["winst"].hist(bins=40)</a:t>
             </a:r>
           </a:p>
           <a:p>
             <a:pPr lvl="1">
               <a:defRPr sz="1400" b="0">
                 <a:solidFill>
-                  <a:srgbClr val="1B4D3E"/>
+                  <a:srgbClr val="000000"/>
                 </a:solidFill>
                 <a:latin typeface="Arial"/>
               </a:defRPr>
             </a:pPr>
             <a:r>
-              <a:t>1.  Testbot_CalltAlles — 1748 chips, foldt 0,0%</a:t>
+              <a:t>-200 en lager · 9 handen</a:t>
             </a:r>
           </a:p>
           <a:p>
@@ -15080,7 +15353,7 @@
               </a:defRPr>
             </a:pPr>
             <a:r>
-              <a:t>2.  een van jullie — 1738 chips, foldt 82,5%</a:t>
+              <a:t>-100 tot -20 · 53 handen</a:t>
             </a:r>
           </a:p>
           <a:p>
@@ -15093,7 +15366,46 @@
               </a:defRPr>
             </a:pPr>
             <a:r>
-              <a:t>3.  een van jullie — 1256 chips, foldt 58,7%</a:t>
+              <a:t>-20 tot -1 · 1488 handen</a:t>
+            </a:r>
+          </a:p>
+          <a:p>
+            <a:pPr lvl="1">
+              <a:defRPr sz="1400" b="0">
+                <a:solidFill>
+                  <a:srgbClr val="000000"/>
+                </a:solidFill>
+                <a:latin typeface="Arial"/>
+              </a:defRPr>
+            </a:pPr>
+            <a:r>
+              <a:t>0 tot 20 · 4838 handen</a:t>
+            </a:r>
+          </a:p>
+          <a:p>
+            <a:pPr lvl="1">
+              <a:defRPr sz="1400" b="0">
+                <a:solidFill>
+                  <a:srgbClr val="000000"/>
+                </a:solidFill>
+                <a:latin typeface="Arial"/>
+              </a:defRPr>
+            </a:pPr>
+            <a:r>
+              <a:t>20 tot 50 · 310 handen</a:t>
+            </a:r>
+          </a:p>
+          <a:p>
+            <a:pPr lvl="1">
+              <a:defRPr sz="1400" b="0">
+                <a:solidFill>
+                  <a:srgbClr val="000000"/>
+                </a:solidFill>
+                <a:latin typeface="Arial"/>
+              </a:defRPr>
+            </a:pPr>
+            <a:r>
+              <a:t>200 en hoger · 7 handen</a:t>
             </a:r>
           </a:p>
           <a:p>
@@ -15109,7 +15421,7 @@
               </a:defRPr>
             </a:pPr>
             <a:r>
-              <a:t>Die eerste is één regel: geef altijd "call" terug, wat je ook hebt.</a:t>
+              <a:t>Bijna alles zit in één bakje rond nul: weggelegd zonder in de blinds te zitten.</a:t>
             </a:r>
           </a:p>
           <a:p>
@@ -15122,49 +15434,20 @@
               </a:defRPr>
             </a:pPr>
             <a:r>
-              <a:t>Geen winkans, geen pot odds, kijkt niet eens naar zijn kaarten</a:t>
+              <a:t>7 handen van de 6750 bepalen het hele beeld —</a:t>
             </a:r>
           </a:p>
           <a:p>
             <a:pPr lvl="1">
               <a:defRPr sz="1400" b="0">
                 <a:solidFill>
-                  <a:srgbClr val="000000"/>
+                  <a:srgbClr val="505A64"/>
                 </a:solidFill>
                 <a:latin typeface="Arial"/>
               </a:defRPr>
             </a:pPr>
             <a:r>
-              <a:t>De klas foldde 92,2% van alle beslissingen; negen bots foldden 99% of meer</a:t>
-            </a:r>
-          </a:p>
-          <a:p>
-            <a:pPr lvl="1">
-              <a:defRPr sz="1400" b="0">
-                <a:solidFill>
-                  <a:srgbClr val="505A64"/>
-                </a:solidFill>
-                <a:latin typeface="Arial"/>
-              </a:defRPr>
-            </a:pPr>
-            <a:r>
-              <a:t>Correlatie tussen fold% en eindstand: -0,69 — meer folden is minder eindigen</a:t>
-            </a:r>
-          </a:p>
-          <a:p>
-            <a:pPr>
-              <a:spcBef>
-                <a:spcPts val="1300"/>
-              </a:spcBef>
-              <a:defRPr sz="1700" b="1">
-                <a:solidFill>
-                  <a:srgbClr val="25167A"/>
-                </a:solidFill>
-                <a:latin typeface="Arial"/>
-              </a:defRPr>
-            </a:pPr>
-            <a:r>
-              <a:t>Waarom verliest een bot mét regels van een bot zonder regels?</a:t>
+              <a:t>en die zie je in geen enkel samenvattend getal terug</a:t>
             </a:r>
           </a:p>
         </p:txBody>
@@ -15254,7 +15537,7 @@
               </a:defRPr>
             </a:pPr>
             <a:r>
-              <a:t>Groepscase 2 — wat je oplevert</a:t>
+              <a:t>Hetzelfde, getekend</a:t>
             </a:r>
           </a:p>
         </p:txBody>
@@ -15280,134 +15563,36 @@
             <a:spAutoFit/>
           </a:bodyPr>
           <a:lstStyle/>
-          <a:p>
-            <a:pPr>
-              <a:defRPr sz="1700" b="1">
-                <a:solidFill>
-                  <a:srgbClr val="000000"/>
-                </a:solidFill>
-                <a:latin typeface="Arial"/>
-              </a:defRPr>
-            </a:pPr>
-            <a:r>
-              <a:t>Een Streamlit-dashboard over een onderwerp dat je zelf kiest.</a:t>
-            </a:r>
-          </a:p>
-          <a:p>
-            <a:pPr lvl="1">
-              <a:defRPr sz="1400" b="0">
-                <a:solidFill>
-                  <a:srgbClr val="000000"/>
-                </a:solidFill>
-                <a:latin typeface="Arial"/>
-              </a:defRPr>
-            </a:pPr>
-            <a:r>
-              <a:t>Gepubliceerd via GitHub op share.streamlit.io, te openen met een link</a:t>
-            </a:r>
-          </a:p>
-          <a:p>
-            <a:pPr lvl="1">
-              <a:defRPr sz="1400" b="0">
-                <a:solidFill>
-                  <a:srgbClr val="000000"/>
-                </a:solidFill>
-                <a:latin typeface="Arial"/>
-              </a:defRPr>
-            </a:pPr>
-            <a:r>
-              <a:t>De app haalt de data zelf op bij een openbare API — niet met de hand gedownload</a:t>
-            </a:r>
-          </a:p>
-          <a:p>
-            <a:pPr lvl="1">
-              <a:defRPr sz="1400" b="0">
-                <a:solidFill>
-                  <a:srgbClr val="1B4D3E"/>
-                </a:solidFill>
-                <a:latin typeface="Arial"/>
-              </a:defRPr>
-            </a:pPr>
-            <a:r>
-              <a:t>Minimaal één join: twee bronnen die je tot één tabel samenvoegt</a:t>
-            </a:r>
-          </a:p>
-          <a:p>
-            <a:pPr>
-              <a:spcBef>
-                <a:spcPts val="1300"/>
-              </a:spcBef>
-              <a:defRPr sz="1700" b="1">
-                <a:solidFill>
-                  <a:srgbClr val="000000"/>
-                </a:solidFill>
-                <a:latin typeface="Arial"/>
-              </a:defRPr>
-            </a:pPr>
-            <a:r>
-              <a:t>Loopt over week 3 en week 4. Dat is kort.</a:t>
-            </a:r>
-          </a:p>
-          <a:p>
-            <a:pPr lvl="1">
-              <a:defRPr sz="1400" b="0">
-                <a:solidFill>
-                  <a:srgbClr val="000000"/>
-                </a:solidFill>
-                <a:latin typeface="Arial"/>
-              </a:defRPr>
-            </a:pPr>
-            <a:r>
-              <a:t>Donderdag 18:00 staat je onderwerp vast: welke vraag, welke twee bronnen,</a:t>
-            </a:r>
-          </a:p>
-          <a:p>
-            <a:pPr lvl="1">
-              <a:defRPr sz="1400" b="0">
-                <a:solidFill>
-                  <a:srgbClr val="000000"/>
-                </a:solidFill>
-                <a:latin typeface="Arial"/>
-              </a:defRPr>
-            </a:pPr>
-            <a:r>
-              <a:t>op welke kolom die aan elkaar passen, en wie in de groep wat doet</a:t>
-            </a:r>
-          </a:p>
-          <a:p>
-            <a:pPr>
-              <a:spcBef>
-                <a:spcPts val="1300"/>
-              </a:spcBef>
-              <a:defRPr sz="1700" b="1">
-                <a:solidFill>
-                  <a:srgbClr val="25167A"/>
-                </a:solidFill>
-                <a:latin typeface="Arial"/>
-              </a:defRPr>
-            </a:pPr>
-            <a:r>
-              <a:t>Zoek nu al op of die twee bronnen écht een gemeenschappelijke kolom hebben.</a:t>
-            </a:r>
-          </a:p>
-          <a:p>
-            <a:pPr lvl="1">
-              <a:defRPr sz="1400" b="0">
-                <a:solidFill>
-                  <a:srgbClr val="505A64"/>
-                </a:solidFill>
-                <a:latin typeface="Arial"/>
-              </a:defRPr>
-            </a:pPr>
-            <a:r>
-              <a:t>"Den Haag" en "'s-Gravenhage" passen niet op elkaar zonder werk</a:t>
-            </a:r>
-          </a:p>
-        </p:txBody>
-      </p:sp>
-      <p:sp>
-        <p:nvSpPr>
-          <p:cNvPr id="4" name="TextBox 3"/>
+          <a:p/>
+        </p:txBody>
+      </p:sp>
+      <p:pic>
+        <p:nvPicPr>
+          <p:cNvPr id="4" name="Picture 3" descr="winst_histogram.png"/>
+          <p:cNvPicPr>
+            <a:picLocks noChangeAspect="1"/>
+          </p:cNvPicPr>
+          <p:nvPr/>
+        </p:nvPicPr>
+        <p:blipFill>
+          <a:blip r:embed="rId2"/>
+          <a:stretch>
+            <a:fillRect/>
+          </a:stretch>
+        </p:blipFill>
+        <p:spPr>
+          <a:xfrm>
+            <a:off x="2441448" y="1920240"/>
+            <a:ext cx="7863840" cy="3677489"/>
+          </a:xfrm>
+          <a:prstGeom prst="rect">
+            <a:avLst/>
+          </a:prstGeom>
+        </p:spPr>
+      </p:pic>
+      <p:sp>
+        <p:nvSpPr>
+          <p:cNvPr id="5" name="TextBox 4"/>
           <p:cNvSpPr txBox="1"/>
           <p:nvPr/>
         </p:nvSpPr>
@@ -15490,7 +15675,7 @@
               </a:defRPr>
             </a:pPr>
             <a:r>
-              <a:t>Waar je cijfer vandaan komt</a:t>
+              <a:t>Categorisch, dan bivariaat</a:t>
             </a:r>
           </a:p>
         </p:txBody>
@@ -15520,52 +15705,13 @@
             <a:pPr>
               <a:defRPr sz="1700" b="1">
                 <a:solidFill>
-                  <a:srgbClr val="25167A"/>
+                  <a:srgbClr val="1B4D3E"/>
                 </a:solidFill>
                 <a:latin typeface="Arial"/>
               </a:defRPr>
             </a:pPr>
             <a:r>
-              <a:t>Drie criteria voor IDS — de data-kant</a:t>
-            </a:r>
-          </a:p>
-          <a:p>
-            <a:pPr lvl="1">
-              <a:defRPr sz="1400" b="0">
-                <a:solidFill>
-                  <a:srgbClr val="000000"/>
-                </a:solidFill>
-                <a:latin typeface="Arial"/>
-              </a:defRPr>
-            </a:pPr>
-            <a:r>
-              <a:t>Data verzameling · twee bronnen, plus de sleutel en de rijen vóór en ná de join</a:t>
-            </a:r>
-          </a:p>
-          <a:p>
-            <a:pPr lvl="1">
-              <a:defRPr sz="1400" b="0">
-                <a:solidFill>
-                  <a:srgbClr val="000000"/>
-                </a:solidFill>
-                <a:latin typeface="Arial"/>
-              </a:defRPr>
-            </a:pPr>
-            <a:r>
-              <a:t>Data verkenning · lege waarden, bereik, dubbele rijen — en wat je ermee deed</a:t>
-            </a:r>
-          </a:p>
-          <a:p>
-            <a:pPr lvl="1">
-              <a:defRPr sz="1400" b="0">
-                <a:solidFill>
-                  <a:srgbClr val="000000"/>
-                </a:solidFill>
-                <a:latin typeface="Arial"/>
-              </a:defRPr>
-            </a:pPr>
-            <a:r>
-              <a:t>Analyse · een conclusie die de data draagt, niet meer dan dat</a:t>
+              <a:t>az = df[df["aan_zet"]]</a:t>
             </a:r>
           </a:p>
           <a:p>
@@ -15575,13 +15721,13 @@
               </a:spcBef>
               <a:defRPr sz="1700" b="1">
                 <a:solidFill>
-                  <a:srgbClr val="25167A"/>
+                  <a:srgbClr val="1B4D3E"/>
                 </a:solidFill>
                 <a:latin typeface="Arial"/>
               </a:defRPr>
             </a:pPr>
             <a:r>
-              <a:t>Vier criteria voor VA — de verhaalkant</a:t>
+              <a:t>az["actie"].value_counts(normalize=True)</a:t>
             </a:r>
           </a:p>
           <a:p>
@@ -15594,20 +15740,20 @@
               </a:defRPr>
             </a:pPr>
             <a:r>
-              <a:t>Opbouw en verhaallijn · Interactiviteit · Dashboardontwerp</a:t>
+              <a:t>fold · 92,2% van alle beslissingen · gemiddeld -3 chips, mediaan 0</a:t>
             </a:r>
           </a:p>
           <a:p>
             <a:pPr lvl="1">
               <a:defRPr sz="1400" b="0">
                 <a:solidFill>
-                  <a:srgbClr val="000000"/>
+                  <a:srgbClr val="1B4D3E"/>
                 </a:solidFill>
                 <a:latin typeface="Arial"/>
               </a:defRPr>
             </a:pPr>
             <a:r>
-              <a:t>Vergelijken en annoteren · het verschil, het opgetelde verloop, of de waarde</a:t>
+              <a:t>call · 5,9% van alle beslissingen · gemiddeld +10 chips, mediaan +30</a:t>
             </a:r>
           </a:p>
           <a:p>
@@ -15620,7 +15766,20 @@
               </a:defRPr>
             </a:pPr>
             <a:r>
-              <a:t>ten opzichte van het moment ervoor — diff, cumsum, shift</a:t>
+              <a:t>raise · 1,3% van alle beslissingen · gemiddeld +65 chips, mediaan +30</a:t>
+            </a:r>
+          </a:p>
+          <a:p>
+            <a:pPr lvl="1">
+              <a:defRPr sz="1400" b="0">
+                <a:solidFill>
+                  <a:srgbClr val="1B4D3E"/>
+                </a:solidFill>
+                <a:latin typeface="Arial"/>
+              </a:defRPr>
+            </a:pPr>
+            <a:r>
+              <a:t>grote_raise · 0,6% van alle beslissingen · gemiddeld +19 chips, mediaan +30</a:t>
             </a:r>
           </a:p>
           <a:p>
@@ -15630,13 +15789,26 @@
               </a:spcBef>
               <a:defRPr sz="1700" b="1">
                 <a:solidFill>
-                  <a:srgbClr val="000000"/>
+                  <a:srgbClr val="25167A"/>
                 </a:solidFill>
                 <a:latin typeface="Arial"/>
               </a:defRPr>
             </a:pPr>
             <a:r>
-              <a:t>Vijf niveaus, van Ontbreekt (1) tot Uitstekend (9).</a:t>
+              <a:t>De klas foldt 92,2% van alles. En elke andere actie levert gemiddeld géld op.</a:t>
+            </a:r>
+          </a:p>
+          <a:p>
+            <a:pPr lvl="1">
+              <a:defRPr sz="1400" b="0">
+                <a:solidFill>
+                  <a:srgbClr val="505A64"/>
+                </a:solidFill>
+                <a:latin typeface="Arial"/>
+              </a:defRPr>
+            </a:pPr>
+            <a:r>
+              <a:t>Let op aan_zet: zonder dat filter tel je handen mee waarin de bot nooit iets koos</a:t>
             </a:r>
           </a:p>
         </p:txBody>
@@ -15976,7 +16148,7 @@
               </a:defRPr>
             </a:pPr>
             <a:r>
-              <a:t>Vijf voorwaarden — die gaan van je cijfer af</a:t>
+              <a:t>De bot die niet nadenkt wint</a:t>
             </a:r>
           </a:p>
         </p:txBody>
@@ -16006,39 +16178,39 @@
             <a:pPr>
               <a:defRPr sz="1700" b="1">
                 <a:solidFill>
-                  <a:srgbClr val="000000"/>
+                  <a:srgbClr val="1B4D3E"/>
                 </a:solidFill>
                 <a:latin typeface="Arial"/>
               </a:defRPr>
             </a:pPr>
             <a:r>
-              <a:t>Dit zijn geen criteria maar drempels. Beide cijfers, IDS en VA.</a:t>
+              <a:t>df.groupby("bot_naam")["stack"].last()</a:t>
             </a:r>
           </a:p>
           <a:p>
             <a:pPr lvl="1">
               <a:defRPr sz="1400" b="0">
                 <a:solidFill>
-                  <a:srgbClr val="000000"/>
+                  <a:srgbClr val="1B4D3E"/>
                 </a:solidFill>
                 <a:latin typeface="Arial"/>
               </a:defRPr>
             </a:pPr>
             <a:r>
-              <a:t>App niet online, of een schone clone draait niet zonder handwerk</a:t>
+              <a:t>1.  Testbot_CalltAlles · 1748 chips · foldt 0%</a:t>
             </a:r>
           </a:p>
           <a:p>
             <a:pPr lvl="1">
               <a:defRPr sz="1400" b="0">
                 <a:solidFill>
-                  <a:srgbClr val="25167A"/>
+                  <a:srgbClr val="000000"/>
                 </a:solidFill>
                 <a:latin typeface="Arial"/>
               </a:defRPr>
             </a:pPr>
             <a:r>
-              <a:t>     -1,0</a:t>
+              <a:t>2.  501011284 · 1738 chips · foldt 82,5%</a:t>
             </a:r>
           </a:p>
           <a:p>
@@ -16051,46 +16223,20 @@
               </a:defRPr>
             </a:pPr>
             <a:r>
-              <a:t>Presentatie langer dan 10 minuten, exclusief vragen</a:t>
+              <a:t>3.  500959250 · 1256 chips · foldt 58,7%</a:t>
             </a:r>
           </a:p>
           <a:p>
             <a:pPr lvl="1">
               <a:defRPr sz="1400" b="0">
                 <a:solidFill>
-                  <a:srgbClr val="25167A"/>
+                  <a:srgbClr val="000000"/>
                 </a:solidFill>
                 <a:latin typeface="Arial"/>
               </a:defRPr>
             </a:pPr>
             <a:r>
-              <a:t>     -1,0</a:t>
-            </a:r>
-          </a:p>
-          <a:p>
-            <a:pPr lvl="1">
-              <a:defRPr sz="1400" b="0">
-                <a:solidFill>
-                  <a:srgbClr val="000000"/>
-                </a:solidFill>
-                <a:latin typeface="Arial"/>
-              </a:defRPr>
-            </a:pPr>
-            <a:r>
-              <a:t>Geen slider, checkbox én dropdown, elk gekoppeld aan een tabel of grafiek</a:t>
-            </a:r>
-          </a:p>
-          <a:p>
-            <a:pPr lvl="1">
-              <a:defRPr sz="1400" b="0">
-                <a:solidFill>
-                  <a:srgbClr val="25167A"/>
-                </a:solidFill>
-                <a:latin typeface="Arial"/>
-              </a:defRPr>
-            </a:pPr>
-            <a:r>
-              <a:t>     -0,5</a:t>
+              <a:t>4.  500851324 · 1202 chips · foldt 96,3%</a:t>
             </a:r>
           </a:p>
           <a:p>
@@ -16106,20 +16252,49 @@
               </a:defRPr>
             </a:pPr>
             <a:r>
-              <a:t>En twee zonder aftrek, maar niet vrijblijvend:</a:t>
+              <a:t>Kijkt niet naar zijn kaarten, rekent geen winkans uit, kent geen pot odds.</a:t>
             </a:r>
           </a:p>
           <a:p>
             <a:pPr lvl="1">
               <a:defRPr sz="1400" b="0">
                 <a:solidFill>
-                  <a:srgbClr val="505A64"/>
+                  <a:srgbClr val="000000"/>
                 </a:solidFill>
                 <a:latin typeface="Arial"/>
               </a:defRPr>
             </a:pPr>
             <a:r>
-              <a:t>Onderwerp op tijd gemeld · code van anderen met bron erbij, en uit te leggen</a:t>
+              <a:t>Hij wint van 26 bots waar uren aan is gewerkt, met 10 chips voorsprong</a:t>
+            </a:r>
+          </a:p>
+          <a:p>
+            <a:pPr lvl="1">
+              <a:defRPr sz="1400" b="0">
+                <a:solidFill>
+                  <a:srgbClr val="000000"/>
+                </a:solidFill>
+                <a:latin typeface="Arial"/>
+              </a:defRPr>
+            </a:pPr>
+            <a:r>
+              <a:t>En die ene die bijna won foldt 82,5%, niet 99%</a:t>
+            </a:r>
+          </a:p>
+          <a:p>
+            <a:pPr>
+              <a:spcBef>
+                <a:spcPts val="1300"/>
+              </a:spcBef>
+              <a:defRPr sz="1700" b="1">
+                <a:solidFill>
+                  <a:srgbClr val="25167A"/>
+                </a:solidFill>
+                <a:latin typeface="Arial"/>
+              </a:defRPr>
+            </a:pPr>
+            <a:r>
+              <a:t>Correlatie fold% met eindstand: -0,69</a:t>
             </a:r>
           </a:p>
         </p:txBody>
@@ -16209,7 +16384,7 @@
               </a:defRPr>
             </a:pPr>
             <a:r>
-              <a:t>Dat heb je vanmiddag al gedaan</a:t>
+              <a:t>Groepscase 2 — wat je oplevert</a:t>
             </a:r>
           </a:p>
         </p:txBody>
@@ -16245,20 +16420,20 @@
               </a:defRPr>
             </a:pPr>
             <a:r>
-              <a:t>De demo van zojuist was Case 2 in het klein:</a:t>
+              <a:t>Een Streamlit-dashboard over een onderwerp dat je zelf kiest.</a:t>
             </a:r>
           </a:p>
           <a:p>
             <a:pPr lvl="1">
               <a:defRPr sz="1400" b="0">
                 <a:solidFill>
-                  <a:srgbClr val="1B4D3E"/>
+                  <a:srgbClr val="000000"/>
                 </a:solidFill>
                 <a:latin typeface="Arial"/>
               </a:defRPr>
             </a:pPr>
             <a:r>
-              <a:t>twee tabellen op bot_naam samengevoegd, rijen geteld vóór en ná</a:t>
+              <a:t>Gepubliceerd via GitHub op share.streamlit.io, te openen met een link</a:t>
             </a:r>
           </a:p>
           <a:p>
@@ -16271,7 +16446,7 @@
               </a:defRPr>
             </a:pPr>
             <a:r>
-              <a:t>     → criterium Data verzameling</a:t>
+              <a:t>De app haalt de data zelf op bij een openbare API — niet met de hand gedownload</a:t>
             </a:r>
           </a:p>
           <a:p>
@@ -16284,46 +16459,7 @@
               </a:defRPr>
             </a:pPr>
             <a:r>
-              <a:t>928 lege waarden gevonden, en gezien wat ze met je percentage deden</a:t>
-            </a:r>
-          </a:p>
-          <a:p>
-            <a:pPr lvl="1">
-              <a:defRPr sz="1400" b="0">
-                <a:solidFill>
-                  <a:srgbClr val="000000"/>
-                </a:solidFill>
-                <a:latin typeface="Arial"/>
-              </a:defRPr>
-            </a:pPr>
-            <a:r>
-              <a:t>     → criterium Data verkenning</a:t>
-            </a:r>
-          </a:p>
-          <a:p>
-            <a:pPr lvl="1">
-              <a:defRPr sz="1400" b="0">
-                <a:solidFill>
-                  <a:srgbClr val="1B4D3E"/>
-                </a:solidFill>
-                <a:latin typeface="Arial"/>
-              </a:defRPr>
-            </a:pPr>
-            <a:r>
-              <a:t>diff en cumsum over het verloop van een stack</a:t>
-            </a:r>
-          </a:p>
-          <a:p>
-            <a:pPr lvl="1">
-              <a:defRPr sz="1400" b="0">
-                <a:solidFill>
-                  <a:srgbClr val="000000"/>
-                </a:solidFill>
-                <a:latin typeface="Arial"/>
-              </a:defRPr>
-            </a:pPr>
-            <a:r>
-              <a:t>     → criterium Vergelijken en annoteren</a:t>
+              <a:t>Minimaal één join: twee bronnen die je tot één tabel samenvoegt</a:t>
             </a:r>
           </a:p>
           <a:p>
@@ -16339,20 +16475,62 @@
               </a:defRPr>
             </a:pPr>
             <a:r>
-              <a:t>Het verschil met de case: daar kiest niemand de dataset voor je,</a:t>
+              <a:t>Loopt over week 3 en week 4. Dat is kort.</a:t>
             </a:r>
           </a:p>
           <a:p>
             <a:pPr lvl="1">
               <a:defRPr sz="1400" b="0">
                 <a:solidFill>
-                  <a:srgbClr val="505A64"/>
+                  <a:srgbClr val="000000"/>
                 </a:solidFill>
                 <a:latin typeface="Arial"/>
               </a:defRPr>
             </a:pPr>
             <a:r>
-              <a:t>en staat er geen kolom aan_zet klaar om je fout te laten zien.</a:t>
+              <a:t>Donderdag 18:00 staat je onderwerp vast: welke vraag, welke twee bronnen,</a:t>
+            </a:r>
+          </a:p>
+          <a:p>
+            <a:pPr lvl="1">
+              <a:defRPr sz="1400" b="0">
+                <a:solidFill>
+                  <a:srgbClr val="000000"/>
+                </a:solidFill>
+                <a:latin typeface="Arial"/>
+              </a:defRPr>
+            </a:pPr>
+            <a:r>
+              <a:t>op welke kolom die aan elkaar passen, en wie in de groep wat doet</a:t>
+            </a:r>
+          </a:p>
+          <a:p>
+            <a:pPr>
+              <a:spcBef>
+                <a:spcPts val="1300"/>
+              </a:spcBef>
+              <a:defRPr sz="1700" b="1">
+                <a:solidFill>
+                  <a:srgbClr val="25167A"/>
+                </a:solidFill>
+                <a:latin typeface="Arial"/>
+              </a:defRPr>
+            </a:pPr>
+            <a:r>
+              <a:t>Zoek nu al op of die twee bronnen écht een gemeenschappelijke kolom hebben.</a:t>
+            </a:r>
+          </a:p>
+          <a:p>
+            <a:pPr lvl="1">
+              <a:defRPr sz="1400" b="0">
+                <a:solidFill>
+                  <a:srgbClr val="505A64"/>
+                </a:solidFill>
+                <a:latin typeface="Arial"/>
+              </a:defRPr>
+            </a:pPr>
+            <a:r>
+              <a:t>"Den Haag" en "'s-Gravenhage" passen niet op elkaar zonder werk</a:t>
             </a:r>
           </a:p>
         </p:txBody>
@@ -16389,6 +16567,708 @@
             </a:pPr>
             <a:r>
               <a:t>31</a:t>
+            </a:r>
+          </a:p>
+        </p:txBody>
+      </p:sp>
+    </p:spTree>
+  </p:cSld>
+  <p:clrMapOvr>
+    <a:masterClrMapping/>
+  </p:clrMapOvr>
+</p:sld>
+</file>
+
+<file path=ppt/slides/slide32.xml><?xml version="1.0" encoding="utf-8"?>
+<p:sld xmlns:a="http://schemas.openxmlformats.org/drawingml/2006/main" xmlns:p="http://schemas.openxmlformats.org/presentationml/2006/main" xmlns:r="http://schemas.openxmlformats.org/officeDocument/2006/relationships">
+  <p:cSld>
+    <p:spTree>
+      <p:nvGrpSpPr>
+        <p:cNvPr id="1" name=""/>
+        <p:cNvGrpSpPr/>
+        <p:nvPr/>
+      </p:nvGrpSpPr>
+      <p:grpSpPr/>
+      <p:sp>
+        <p:nvSpPr>
+          <p:cNvPr id="2" name="TextBox 1"/>
+          <p:cNvSpPr txBox="1"/>
+          <p:nvPr/>
+        </p:nvSpPr>
+        <p:spPr>
+          <a:xfrm>
+            <a:off x="1984248" y="941832"/>
+            <a:ext cx="8229600" cy="1143000"/>
+          </a:xfrm>
+          <a:prstGeom prst="rect">
+            <a:avLst/>
+          </a:prstGeom>
+          <a:noFill/>
+        </p:spPr>
+        <p:txBody>
+          <a:bodyPr wrap="square">
+            <a:spAutoFit/>
+          </a:bodyPr>
+          <a:lstStyle/>
+          <a:p>
+            <a:pPr>
+              <a:defRPr sz="3200">
+                <a:solidFill>
+                  <a:srgbClr val="25167A"/>
+                </a:solidFill>
+                <a:latin typeface="Arial"/>
+              </a:defRPr>
+            </a:pPr>
+            <a:r>
+              <a:t>Waar je cijfer vandaan komt</a:t>
+            </a:r>
+          </a:p>
+        </p:txBody>
+      </p:sp>
+      <p:sp>
+        <p:nvSpPr>
+          <p:cNvPr id="3" name="TextBox 2"/>
+          <p:cNvSpPr txBox="1"/>
+          <p:nvPr/>
+        </p:nvSpPr>
+        <p:spPr>
+          <a:xfrm>
+            <a:off x="1984248" y="2084831"/>
+            <a:ext cx="8778240" cy="4041648"/>
+          </a:xfrm>
+          <a:prstGeom prst="rect">
+            <a:avLst/>
+          </a:prstGeom>
+          <a:noFill/>
+        </p:spPr>
+        <p:txBody>
+          <a:bodyPr wrap="square">
+            <a:spAutoFit/>
+          </a:bodyPr>
+          <a:lstStyle/>
+          <a:p>
+            <a:pPr>
+              <a:defRPr sz="1700" b="1">
+                <a:solidFill>
+                  <a:srgbClr val="25167A"/>
+                </a:solidFill>
+                <a:latin typeface="Arial"/>
+              </a:defRPr>
+            </a:pPr>
+            <a:r>
+              <a:t>Drie criteria voor IDS — de data-kant</a:t>
+            </a:r>
+          </a:p>
+          <a:p>
+            <a:pPr lvl="1">
+              <a:defRPr sz="1400" b="0">
+                <a:solidFill>
+                  <a:srgbClr val="000000"/>
+                </a:solidFill>
+                <a:latin typeface="Arial"/>
+              </a:defRPr>
+            </a:pPr>
+            <a:r>
+              <a:t>Data verzameling · twee bronnen, plus de sleutel en de rijen vóór en ná de join</a:t>
+            </a:r>
+          </a:p>
+          <a:p>
+            <a:pPr lvl="1">
+              <a:defRPr sz="1400" b="0">
+                <a:solidFill>
+                  <a:srgbClr val="000000"/>
+                </a:solidFill>
+                <a:latin typeface="Arial"/>
+              </a:defRPr>
+            </a:pPr>
+            <a:r>
+              <a:t>Data verkenning · lege waarden, bereik, dubbele rijen — en wat je ermee deed</a:t>
+            </a:r>
+          </a:p>
+          <a:p>
+            <a:pPr lvl="1">
+              <a:defRPr sz="1400" b="0">
+                <a:solidFill>
+                  <a:srgbClr val="000000"/>
+                </a:solidFill>
+                <a:latin typeface="Arial"/>
+              </a:defRPr>
+            </a:pPr>
+            <a:r>
+              <a:t>Analyse · een conclusie die de data draagt, niet meer dan dat</a:t>
+            </a:r>
+          </a:p>
+          <a:p>
+            <a:pPr>
+              <a:spcBef>
+                <a:spcPts val="1300"/>
+              </a:spcBef>
+              <a:defRPr sz="1700" b="1">
+                <a:solidFill>
+                  <a:srgbClr val="25167A"/>
+                </a:solidFill>
+                <a:latin typeface="Arial"/>
+              </a:defRPr>
+            </a:pPr>
+            <a:r>
+              <a:t>Vier criteria voor VA — de verhaalkant</a:t>
+            </a:r>
+          </a:p>
+          <a:p>
+            <a:pPr lvl="1">
+              <a:defRPr sz="1400" b="0">
+                <a:solidFill>
+                  <a:srgbClr val="000000"/>
+                </a:solidFill>
+                <a:latin typeface="Arial"/>
+              </a:defRPr>
+            </a:pPr>
+            <a:r>
+              <a:t>Opbouw en verhaallijn · Interactiviteit · Dashboardontwerp</a:t>
+            </a:r>
+          </a:p>
+          <a:p>
+            <a:pPr lvl="1">
+              <a:defRPr sz="1400" b="0">
+                <a:solidFill>
+                  <a:srgbClr val="000000"/>
+                </a:solidFill>
+                <a:latin typeface="Arial"/>
+              </a:defRPr>
+            </a:pPr>
+            <a:r>
+              <a:t>Vergelijken en annoteren · het verschil, het opgetelde verloop, of de waarde</a:t>
+            </a:r>
+          </a:p>
+          <a:p>
+            <a:pPr lvl="1">
+              <a:defRPr sz="1400" b="0">
+                <a:solidFill>
+                  <a:srgbClr val="1B4D3E"/>
+                </a:solidFill>
+                <a:latin typeface="Arial"/>
+              </a:defRPr>
+            </a:pPr>
+            <a:r>
+              <a:t>ten opzichte van het moment ervoor — diff, cumsum, shift</a:t>
+            </a:r>
+          </a:p>
+          <a:p>
+            <a:pPr>
+              <a:spcBef>
+                <a:spcPts val="1300"/>
+              </a:spcBef>
+              <a:defRPr sz="1700" b="1">
+                <a:solidFill>
+                  <a:srgbClr val="000000"/>
+                </a:solidFill>
+                <a:latin typeface="Arial"/>
+              </a:defRPr>
+            </a:pPr>
+            <a:r>
+              <a:t>Vijf niveaus, van Ontbreekt (1) tot Uitstekend (9).</a:t>
+            </a:r>
+          </a:p>
+        </p:txBody>
+      </p:sp>
+      <p:sp>
+        <p:nvSpPr>
+          <p:cNvPr id="4" name="TextBox 3"/>
+          <p:cNvSpPr txBox="1"/>
+          <p:nvPr/>
+        </p:nvSpPr>
+        <p:spPr>
+          <a:xfrm>
+            <a:off x="9774936" y="6126480"/>
+            <a:ext cx="630936" cy="365760"/>
+          </a:xfrm>
+          <a:prstGeom prst="rect">
+            <a:avLst/>
+          </a:prstGeom>
+          <a:noFill/>
+        </p:spPr>
+        <p:txBody>
+          <a:bodyPr wrap="none">
+            <a:spAutoFit/>
+          </a:bodyPr>
+          <a:lstStyle/>
+          <a:p>
+            <a:pPr>
+              <a:defRPr sz="1200">
+                <a:solidFill>
+                  <a:srgbClr val="505A64"/>
+                </a:solidFill>
+                <a:latin typeface="Arial"/>
+              </a:defRPr>
+            </a:pPr>
+            <a:r>
+              <a:t>32</a:t>
+            </a:r>
+          </a:p>
+        </p:txBody>
+      </p:sp>
+    </p:spTree>
+  </p:cSld>
+  <p:clrMapOvr>
+    <a:masterClrMapping/>
+  </p:clrMapOvr>
+</p:sld>
+</file>
+
+<file path=ppt/slides/slide33.xml><?xml version="1.0" encoding="utf-8"?>
+<p:sld xmlns:a="http://schemas.openxmlformats.org/drawingml/2006/main" xmlns:p="http://schemas.openxmlformats.org/presentationml/2006/main" xmlns:r="http://schemas.openxmlformats.org/officeDocument/2006/relationships">
+  <p:cSld>
+    <p:spTree>
+      <p:nvGrpSpPr>
+        <p:cNvPr id="1" name=""/>
+        <p:cNvGrpSpPr/>
+        <p:nvPr/>
+      </p:nvGrpSpPr>
+      <p:grpSpPr/>
+      <p:sp>
+        <p:nvSpPr>
+          <p:cNvPr id="2" name="TextBox 1"/>
+          <p:cNvSpPr txBox="1"/>
+          <p:nvPr/>
+        </p:nvSpPr>
+        <p:spPr>
+          <a:xfrm>
+            <a:off x="1984248" y="941832"/>
+            <a:ext cx="8229600" cy="1143000"/>
+          </a:xfrm>
+          <a:prstGeom prst="rect">
+            <a:avLst/>
+          </a:prstGeom>
+          <a:noFill/>
+        </p:spPr>
+        <p:txBody>
+          <a:bodyPr wrap="square">
+            <a:spAutoFit/>
+          </a:bodyPr>
+          <a:lstStyle/>
+          <a:p>
+            <a:pPr>
+              <a:defRPr sz="3200">
+                <a:solidFill>
+                  <a:srgbClr val="25167A"/>
+                </a:solidFill>
+                <a:latin typeface="Arial"/>
+              </a:defRPr>
+            </a:pPr>
+            <a:r>
+              <a:t>Vijf voorwaarden — die gaan van je cijfer af</a:t>
+            </a:r>
+          </a:p>
+        </p:txBody>
+      </p:sp>
+      <p:sp>
+        <p:nvSpPr>
+          <p:cNvPr id="3" name="TextBox 2"/>
+          <p:cNvSpPr txBox="1"/>
+          <p:nvPr/>
+        </p:nvSpPr>
+        <p:spPr>
+          <a:xfrm>
+            <a:off x="1984248" y="2084831"/>
+            <a:ext cx="8778240" cy="4041648"/>
+          </a:xfrm>
+          <a:prstGeom prst="rect">
+            <a:avLst/>
+          </a:prstGeom>
+          <a:noFill/>
+        </p:spPr>
+        <p:txBody>
+          <a:bodyPr wrap="square">
+            <a:spAutoFit/>
+          </a:bodyPr>
+          <a:lstStyle/>
+          <a:p>
+            <a:pPr>
+              <a:defRPr sz="1700" b="1">
+                <a:solidFill>
+                  <a:srgbClr val="000000"/>
+                </a:solidFill>
+                <a:latin typeface="Arial"/>
+              </a:defRPr>
+            </a:pPr>
+            <a:r>
+              <a:t>Dit zijn geen criteria maar drempels. Beide cijfers, IDS en VA.</a:t>
+            </a:r>
+          </a:p>
+          <a:p>
+            <a:pPr lvl="1">
+              <a:defRPr sz="1400" b="0">
+                <a:solidFill>
+                  <a:srgbClr val="000000"/>
+                </a:solidFill>
+                <a:latin typeface="Arial"/>
+              </a:defRPr>
+            </a:pPr>
+            <a:r>
+              <a:t>App niet online, of een schone clone draait niet zonder handwerk</a:t>
+            </a:r>
+          </a:p>
+          <a:p>
+            <a:pPr lvl="1">
+              <a:defRPr sz="1400" b="0">
+                <a:solidFill>
+                  <a:srgbClr val="25167A"/>
+                </a:solidFill>
+                <a:latin typeface="Arial"/>
+              </a:defRPr>
+            </a:pPr>
+            <a:r>
+              <a:t>     -1,0</a:t>
+            </a:r>
+          </a:p>
+          <a:p>
+            <a:pPr lvl="1">
+              <a:defRPr sz="1400" b="0">
+                <a:solidFill>
+                  <a:srgbClr val="000000"/>
+                </a:solidFill>
+                <a:latin typeface="Arial"/>
+              </a:defRPr>
+            </a:pPr>
+            <a:r>
+              <a:t>Presentatie langer dan 10 minuten, exclusief vragen</a:t>
+            </a:r>
+          </a:p>
+          <a:p>
+            <a:pPr lvl="1">
+              <a:defRPr sz="1400" b="0">
+                <a:solidFill>
+                  <a:srgbClr val="25167A"/>
+                </a:solidFill>
+                <a:latin typeface="Arial"/>
+              </a:defRPr>
+            </a:pPr>
+            <a:r>
+              <a:t>     -1,0</a:t>
+            </a:r>
+          </a:p>
+          <a:p>
+            <a:pPr lvl="1">
+              <a:defRPr sz="1400" b="0">
+                <a:solidFill>
+                  <a:srgbClr val="000000"/>
+                </a:solidFill>
+                <a:latin typeface="Arial"/>
+              </a:defRPr>
+            </a:pPr>
+            <a:r>
+              <a:t>Geen slider, checkbox én dropdown, elk gekoppeld aan een tabel of grafiek</a:t>
+            </a:r>
+          </a:p>
+          <a:p>
+            <a:pPr lvl="1">
+              <a:defRPr sz="1400" b="0">
+                <a:solidFill>
+                  <a:srgbClr val="25167A"/>
+                </a:solidFill>
+                <a:latin typeface="Arial"/>
+              </a:defRPr>
+            </a:pPr>
+            <a:r>
+              <a:t>     -0,5</a:t>
+            </a:r>
+          </a:p>
+          <a:p>
+            <a:pPr>
+              <a:spcBef>
+                <a:spcPts val="1300"/>
+              </a:spcBef>
+              <a:defRPr sz="1700" b="1">
+                <a:solidFill>
+                  <a:srgbClr val="000000"/>
+                </a:solidFill>
+                <a:latin typeface="Arial"/>
+              </a:defRPr>
+            </a:pPr>
+            <a:r>
+              <a:t>En twee zonder aftrek, maar niet vrijblijvend:</a:t>
+            </a:r>
+          </a:p>
+          <a:p>
+            <a:pPr lvl="1">
+              <a:defRPr sz="1400" b="0">
+                <a:solidFill>
+                  <a:srgbClr val="505A64"/>
+                </a:solidFill>
+                <a:latin typeface="Arial"/>
+              </a:defRPr>
+            </a:pPr>
+            <a:r>
+              <a:t>Onderwerp op tijd gemeld · code van anderen met bron erbij, en uit te leggen</a:t>
+            </a:r>
+          </a:p>
+        </p:txBody>
+      </p:sp>
+      <p:sp>
+        <p:nvSpPr>
+          <p:cNvPr id="4" name="TextBox 3"/>
+          <p:cNvSpPr txBox="1"/>
+          <p:nvPr/>
+        </p:nvSpPr>
+        <p:spPr>
+          <a:xfrm>
+            <a:off x="9774936" y="6126480"/>
+            <a:ext cx="630936" cy="365760"/>
+          </a:xfrm>
+          <a:prstGeom prst="rect">
+            <a:avLst/>
+          </a:prstGeom>
+          <a:noFill/>
+        </p:spPr>
+        <p:txBody>
+          <a:bodyPr wrap="none">
+            <a:spAutoFit/>
+          </a:bodyPr>
+          <a:lstStyle/>
+          <a:p>
+            <a:pPr>
+              <a:defRPr sz="1200">
+                <a:solidFill>
+                  <a:srgbClr val="505A64"/>
+                </a:solidFill>
+                <a:latin typeface="Arial"/>
+              </a:defRPr>
+            </a:pPr>
+            <a:r>
+              <a:t>33</a:t>
+            </a:r>
+          </a:p>
+        </p:txBody>
+      </p:sp>
+    </p:spTree>
+  </p:cSld>
+  <p:clrMapOvr>
+    <a:masterClrMapping/>
+  </p:clrMapOvr>
+</p:sld>
+</file>
+
+<file path=ppt/slides/slide34.xml><?xml version="1.0" encoding="utf-8"?>
+<p:sld xmlns:a="http://schemas.openxmlformats.org/drawingml/2006/main" xmlns:p="http://schemas.openxmlformats.org/presentationml/2006/main" xmlns:r="http://schemas.openxmlformats.org/officeDocument/2006/relationships">
+  <p:cSld>
+    <p:spTree>
+      <p:nvGrpSpPr>
+        <p:cNvPr id="1" name=""/>
+        <p:cNvGrpSpPr/>
+        <p:nvPr/>
+      </p:nvGrpSpPr>
+      <p:grpSpPr/>
+      <p:sp>
+        <p:nvSpPr>
+          <p:cNvPr id="2" name="TextBox 1"/>
+          <p:cNvSpPr txBox="1"/>
+          <p:nvPr/>
+        </p:nvSpPr>
+        <p:spPr>
+          <a:xfrm>
+            <a:off x="1984248" y="941832"/>
+            <a:ext cx="8229600" cy="1143000"/>
+          </a:xfrm>
+          <a:prstGeom prst="rect">
+            <a:avLst/>
+          </a:prstGeom>
+          <a:noFill/>
+        </p:spPr>
+        <p:txBody>
+          <a:bodyPr wrap="square">
+            <a:spAutoFit/>
+          </a:bodyPr>
+          <a:lstStyle/>
+          <a:p>
+            <a:pPr>
+              <a:defRPr sz="3200">
+                <a:solidFill>
+                  <a:srgbClr val="25167A"/>
+                </a:solidFill>
+                <a:latin typeface="Arial"/>
+              </a:defRPr>
+            </a:pPr>
+            <a:r>
+              <a:t>Dat heb je vanmiddag al gedaan</a:t>
+            </a:r>
+          </a:p>
+        </p:txBody>
+      </p:sp>
+      <p:sp>
+        <p:nvSpPr>
+          <p:cNvPr id="3" name="TextBox 2"/>
+          <p:cNvSpPr txBox="1"/>
+          <p:nvPr/>
+        </p:nvSpPr>
+        <p:spPr>
+          <a:xfrm>
+            <a:off x="1984248" y="2084831"/>
+            <a:ext cx="8778240" cy="4041648"/>
+          </a:xfrm>
+          <a:prstGeom prst="rect">
+            <a:avLst/>
+          </a:prstGeom>
+          <a:noFill/>
+        </p:spPr>
+        <p:txBody>
+          <a:bodyPr wrap="square">
+            <a:spAutoFit/>
+          </a:bodyPr>
+          <a:lstStyle/>
+          <a:p>
+            <a:pPr>
+              <a:defRPr sz="1700" b="1">
+                <a:solidFill>
+                  <a:srgbClr val="000000"/>
+                </a:solidFill>
+                <a:latin typeface="Arial"/>
+              </a:defRPr>
+            </a:pPr>
+            <a:r>
+              <a:t>De demo van zojuist was Case 2 in het klein:</a:t>
+            </a:r>
+          </a:p>
+          <a:p>
+            <a:pPr lvl="1">
+              <a:defRPr sz="1400" b="0">
+                <a:solidFill>
+                  <a:srgbClr val="1B4D3E"/>
+                </a:solidFill>
+                <a:latin typeface="Arial"/>
+              </a:defRPr>
+            </a:pPr>
+            <a:r>
+              <a:t>twee tabellen op bot_naam samengevoegd, rijen geteld vóór en ná</a:t>
+            </a:r>
+          </a:p>
+          <a:p>
+            <a:pPr lvl="1">
+              <a:defRPr sz="1400" b="0">
+                <a:solidFill>
+                  <a:srgbClr val="000000"/>
+                </a:solidFill>
+                <a:latin typeface="Arial"/>
+              </a:defRPr>
+            </a:pPr>
+            <a:r>
+              <a:t>     → criterium Data verzameling</a:t>
+            </a:r>
+          </a:p>
+          <a:p>
+            <a:pPr lvl="1">
+              <a:defRPr sz="1400" b="0">
+                <a:solidFill>
+                  <a:srgbClr val="1B4D3E"/>
+                </a:solidFill>
+                <a:latin typeface="Arial"/>
+              </a:defRPr>
+            </a:pPr>
+            <a:r>
+              <a:t>928 lege waarden gevonden, en gezien wat ze met je percentage deden</a:t>
+            </a:r>
+          </a:p>
+          <a:p>
+            <a:pPr lvl="1">
+              <a:defRPr sz="1400" b="0">
+                <a:solidFill>
+                  <a:srgbClr val="000000"/>
+                </a:solidFill>
+                <a:latin typeface="Arial"/>
+              </a:defRPr>
+            </a:pPr>
+            <a:r>
+              <a:t>     → criterium Data verkenning</a:t>
+            </a:r>
+          </a:p>
+          <a:p>
+            <a:pPr lvl="1">
+              <a:defRPr sz="1400" b="0">
+                <a:solidFill>
+                  <a:srgbClr val="1B4D3E"/>
+                </a:solidFill>
+                <a:latin typeface="Arial"/>
+              </a:defRPr>
+            </a:pPr>
+            <a:r>
+              <a:t>diff en cumsum over het verloop van een stack</a:t>
+            </a:r>
+          </a:p>
+          <a:p>
+            <a:pPr lvl="1">
+              <a:defRPr sz="1400" b="0">
+                <a:solidFill>
+                  <a:srgbClr val="000000"/>
+                </a:solidFill>
+                <a:latin typeface="Arial"/>
+              </a:defRPr>
+            </a:pPr>
+            <a:r>
+              <a:t>     → criterium Vergelijken en annoteren</a:t>
+            </a:r>
+          </a:p>
+          <a:p>
+            <a:pPr>
+              <a:spcBef>
+                <a:spcPts val="1300"/>
+              </a:spcBef>
+              <a:defRPr sz="1700" b="1">
+                <a:solidFill>
+                  <a:srgbClr val="000000"/>
+                </a:solidFill>
+                <a:latin typeface="Arial"/>
+              </a:defRPr>
+            </a:pPr>
+            <a:r>
+              <a:t>Het verschil met de case: daar kiest niemand de dataset voor je,</a:t>
+            </a:r>
+          </a:p>
+          <a:p>
+            <a:pPr lvl="1">
+              <a:defRPr sz="1400" b="0">
+                <a:solidFill>
+                  <a:srgbClr val="505A64"/>
+                </a:solidFill>
+                <a:latin typeface="Arial"/>
+              </a:defRPr>
+            </a:pPr>
+            <a:r>
+              <a:t>en staat er geen kolom aan_zet klaar om je fout te laten zien.</a:t>
+            </a:r>
+          </a:p>
+        </p:txBody>
+      </p:sp>
+      <p:sp>
+        <p:nvSpPr>
+          <p:cNvPr id="4" name="TextBox 3"/>
+          <p:cNvSpPr txBox="1"/>
+          <p:nvPr/>
+        </p:nvSpPr>
+        <p:spPr>
+          <a:xfrm>
+            <a:off x="9774936" y="6126480"/>
+            <a:ext cx="630936" cy="365760"/>
+          </a:xfrm>
+          <a:prstGeom prst="rect">
+            <a:avLst/>
+          </a:prstGeom>
+          <a:noFill/>
+        </p:spPr>
+        <p:txBody>
+          <a:bodyPr wrap="none">
+            <a:spAutoFit/>
+          </a:bodyPr>
+          <a:lstStyle/>
+          <a:p>
+            <a:pPr>
+              <a:defRPr sz="1200">
+                <a:solidFill>
+                  <a:srgbClr val="505A64"/>
+                </a:solidFill>
+                <a:latin typeface="Arial"/>
+              </a:defRPr>
+            </a:pPr>
+            <a:r>
+              <a:t>34</a:t>
             </a:r>
           </a:p>
         </p:txBody>

--- a/powerpoints/hoorcollege/03_Exploring_Manipulating_Data_aangevuld.pptx
+++ b/powerpoints/hoorcollege/03_Exploring_Manipulating_Data_aangevuld.pptx
@@ -2108,33 +2108,49 @@
           <a:lstStyle/>
           <a:p>
             <a:r>
-              <a:t>De y-as is logaritmisch, en dat is geen truc maar de</a:t>
-            </a:r>
-          </a:p>
-          <a:p>
-            <a:r>
-              <a:t>enige manier om allebei te zien: de piek is duizenden handen hoog en de staart is</a:t>
-            </a:r>
-          </a:p>
-          <a:p>
-            <a:r>
-              <a:t>één hand. Lineair zie je één balk en verder wit.</a:t>
+              <a:t>Iedereen begon op 1000, de stippellijn.</a:t>
+            </a:r>
+          </a:p>
+          <a:p>
+            <a:r>
+              <a:t>Dertien bots eindigen tussen 900 en 1000 -- die hebben iets verloren en verder</a:t>
+            </a:r>
+          </a:p>
+          <a:p>
+            <a:r>
+              <a:t>nauwelijks gespeeld. Links één uitschieter naar beneden, rechts twee die er ver</a:t>
+            </a:r>
+          </a:p>
+          <a:p>
+            <a:r>
+              <a:t>bovenuit steken.</a:t>
             </a:r>
           </a:p>
           <a:p/>
           <a:p>
             <a:r>
-              <a:t>Goede vraag aan de zaal: df["winst"].hist(bins=40) geeft precies dat lege plaatje.</a:t>
-            </a:r>
-          </a:p>
-          <a:p>
-            <a:r>
-              <a:t>Wie had gemerkt dat er iets ontbrak? De standaardinstelling van een grafiek is een</a:t>
-            </a:r>
-          </a:p>
-          <a:p>
-            <a:r>
-              <a:t>keuze die iemand anders voor je heeft gemaakt.</a:t>
+              <a:t>Vraag aan de zaal voordat je doorklikt: wie denk je dat die twee rechts zijn? Op</a:t>
+            </a:r>
+          </a:p>
+          <a:p>
+            <a:r>
+              <a:t>de volgende dia staat het antwoord, en dat is niet wat ze verwachten.</a:t>
+            </a:r>
+          </a:p>
+          <a:p/>
+          <a:p>
+            <a:r>
+              <a:t>Waarom dit de eindstanden zijn en niet de winst per hand: dat laatste is voor 92%</a:t>
+            </a:r>
+          </a:p>
+          <a:p>
+            <a:r>
+              <a:t>een blind van tien of twintig chips, dus getekend krijg je één balk en verder wit.</a:t>
+            </a:r>
+          </a:p>
+          <a:p>
+            <a:r>
+              <a:t>Die verdeling staat als tabel op de dia hiervoor, waar hij wel leesbaar is.</a:t>
             </a:r>
           </a:p>
         </p:txBody>
@@ -15537,7 +15553,7 @@
               </a:defRPr>
             </a:pPr>
             <a:r>
-              <a:t>Hetzelfde, getekend</a:t>
+              <a:t>Waar 27 bots zijn geëindigd</a:t>
             </a:r>
           </a:p>
         </p:txBody>
@@ -15568,7 +15584,7 @@
       </p:sp>
       <p:pic>
         <p:nvPicPr>
-          <p:cNvPr id="4" name="Picture 3" descr="winst_histogram.png"/>
+          <p:cNvPr id="4" name="Picture 3" descr="eindstanden_histogram.png"/>
           <p:cNvPicPr>
             <a:picLocks noChangeAspect="1"/>
           </p:cNvPicPr>

--- a/powerpoints/hoorcollege/03_Exploring_Manipulating_Data_aangevuld.pptx
+++ b/powerpoints/hoorcollege/03_Exploring_Manipulating_Data_aangevuld.pptx
@@ -44,6 +44,7 @@
     <p:sldId id="912" r:id="rId45"/>
     <p:sldId id="913" r:id="rId46"/>
     <p:sldId id="914" r:id="rId47"/>
+    <p:sldId id="915" r:id="rId48"/>
   </p:sldIdLst>
   <p:sldSz cx="12192000" cy="6858000"/>
   <p:notesSz cx="6858000" cy="9144000"/>
@@ -2108,49 +2109,44 @@
           <a:lstStyle/>
           <a:p>
             <a:r>
-              <a:t>Iedereen begon op 1000, de stippellijn.</a:t>
-            </a:r>
-          </a:p>
-          <a:p>
-            <a:r>
-              <a:t>Dertien bots eindigen tussen 900 en 1000 -- die hebben iets verloren en verder</a:t>
-            </a:r>
-          </a:p>
-          <a:p>
-            <a:r>
-              <a:t>nauwelijks gespeeld. Links één uitschieter naar beneden, rechts twee die er ver</a:t>
-            </a:r>
-          </a:p>
-          <a:p>
-            <a:r>
-              <a:t>bovenuit steken.</a:t>
+              <a:t>De y-as is logaritmisch en dat is geen truc:</a:t>
+            </a:r>
+          </a:p>
+          <a:p>
+            <a:r>
+              <a:t>de piek is duizenden handen hoog en de staarten zijn één hand. Lineair krijg je één</a:t>
+            </a:r>
+          </a:p>
+          <a:p>
+            <a:r>
+              <a:t>balk en verder wit.</a:t>
             </a:r>
           </a:p>
           <a:p/>
           <a:p>
             <a:r>
-              <a:t>Vraag aan de zaal voordat je doorklikt: wie denk je dat die twee rechts zijn? Op</a:t>
-            </a:r>
-          </a:p>
-          <a:p>
-            <a:r>
-              <a:t>de volgende dia staat het antwoord, en dat is niet wat ze verwachten.</a:t>
+              <a:t>Dat is de vraag voor de zaal. df["winst"].hist(bins=40) geeft precies dat lege</a:t>
+            </a:r>
+          </a:p>
+          <a:p>
+            <a:r>
+              <a:t>plaatje -- wie had gemerkt dat er iets ontbrak? De standaardinstelling van een</a:t>
+            </a:r>
+          </a:p>
+          <a:p>
+            <a:r>
+              <a:t>grafiek is een keuze die iemand anders voor je heeft gemaakt.</a:t>
             </a:r>
           </a:p>
           <a:p/>
           <a:p>
             <a:r>
-              <a:t>Waarom dit de eindstanden zijn en niet de winst per hand: dat laatste is voor 92%</a:t>
-            </a:r>
-          </a:p>
-          <a:p>
-            <a:r>
-              <a:t>een blind van tien of twintig chips, dus getekend krijg je één balk en verder wit.</a:t>
-            </a:r>
-          </a:p>
-          <a:p>
-            <a:r>
-              <a:t>Die verdeling staat als tabel op de dia hiervoor, waar hij wel leesbaar is.</a:t>
+              <a:t>Wijs op de bar helemaal rechts. Dat is één hand waarin 1750 chips omgingen, en die</a:t>
+            </a:r>
+          </a:p>
+          <a:p>
+            <a:r>
+              <a:t>zit in geen enkel getal van de dia's hiervoor.</a:t>
             </a:r>
           </a:p>
         </p:txBody>
@@ -2445,33 +2441,44 @@
           <a:lstStyle/>
           <a:p>
             <a:r>
-              <a:t>De deadline is donderdag 18:00 en dat is geen</a:t>
-            </a:r>
-          </a:p>
-          <a:p>
-            <a:r>
-              <a:t>inlevermoment maar een BESLUIT: welke vraag, welke twee bronnen, op welke kolom die</a:t>
-            </a:r>
-          </a:p>
-          <a:p>
-            <a:r>
-              <a:t>aan elkaar passen, wie doet wat.</a:t>
+              <a:t>Dezelfde dataset, andere eenheid, andere as.</a:t>
+            </a:r>
+          </a:p>
+          <a:p>
+            <a:r>
+              <a:t>De winst per hand had een log-as nodig; de eindstand is één getal per bot en past</a:t>
+            </a:r>
+          </a:p>
+          <a:p>
+            <a:r>
+              <a:t>gewoon lineair.</a:t>
             </a:r>
           </a:p>
           <a:p/>
           <a:p>
             <a:r>
-              <a:t>Het zinnetje over Den Haag en 's-Gravenhage is niet grappig bedoeld. Laat ze nu al</a:t>
-            </a:r>
-          </a:p>
-          <a:p>
-            <a:r>
-              <a:t>een keer kijken of hun twee bronnen echt een gemeenschappelijke kolom hebben met</a:t>
-            </a:r>
-          </a:p>
-          <a:p>
-            <a:r>
-              <a:t>dezelfde schrijfwijze.</a:t>
+              <a:t>Iedereen begon op 1000, de stippellijn. Links daarvan staat wie chips heeft</a:t>
+            </a:r>
+          </a:p>
+          <a:p>
+            <a:r>
+              <a:t>ingeleverd. De klont in het midden zijn de bots die iets verloren en verder</a:t>
+            </a:r>
+          </a:p>
+          <a:p>
+            <a:r>
+              <a:t>nauwelijks hebben gespeeld; rechts steken er twee ver bovenuit, en die ken je nu.</a:t>
+            </a:r>
+          </a:p>
+          <a:p/>
+          <a:p>
+            <a:r>
+              <a:t>Als je één ding wilt meegeven: dit is waarom een gemiddelde hier niets zegt. Het</a:t>
+            </a:r>
+          </a:p>
+          <a:p>
+            <a:r>
+              <a:t>gemiddelde is per definitie 1000, want het is een nulsom. De vorm is het verhaal.</a:t>
             </a:r>
           </a:p>
         </p:txBody>
@@ -2541,22 +2548,33 @@
           <a:lstStyle/>
           <a:p>
             <a:r>
-              <a:t>Vergelijken en annoteren is het criterium waar</a:t>
-            </a:r>
-          </a:p>
-          <a:p>
-            <a:r>
-              <a:t>groepen punten laten liggen. Het vraagt diff, cumsum of shift - het verschil met het</a:t>
-            </a:r>
-          </a:p>
-          <a:p>
-            <a:r>
-              <a:t>moment ervoor, niet alleen de waarde. Ze hebben diff vanmiddag al gebruikt om de</a:t>
-            </a:r>
-          </a:p>
-          <a:p>
-            <a:r>
-              <a:t>winst-kolom te maken; zeg dat er hardop bij.</a:t>
+              <a:t>De deadline is donderdag 18:00 en dat is geen</a:t>
+            </a:r>
+          </a:p>
+          <a:p>
+            <a:r>
+              <a:t>inlevermoment maar een BESLUIT: welke vraag, welke twee bronnen, op welke kolom die</a:t>
+            </a:r>
+          </a:p>
+          <a:p>
+            <a:r>
+              <a:t>aan elkaar passen, wie doet wat.</a:t>
+            </a:r>
+          </a:p>
+          <a:p/>
+          <a:p>
+            <a:r>
+              <a:t>Het zinnetje over Den Haag en 's-Gravenhage is niet grappig bedoeld. Laat ze nu al</a:t>
+            </a:r>
+          </a:p>
+          <a:p>
+            <a:r>
+              <a:t>een keer kijken of hun twee bronnen echt een gemeenschappelijke kolom hebben met</a:t>
+            </a:r>
+          </a:p>
+          <a:p>
+            <a:r>
+              <a:t>dezelfde schrijfwijze.</a:t>
             </a:r>
           </a:p>
         </p:txBody>
@@ -2626,23 +2644,22 @@
           <a:lstStyle/>
           <a:p>
             <a:r>
-              <a:t>Deze dia is saai en bespaart je</a:t>
-            </a:r>
-          </a:p>
-          <a:p>
-            <a:r>
-              <a:t>in week 4 een half uur discussie. De aftrek gaat van BEIDE cijfers af, IDS en VA.</a:t>
-            </a:r>
-          </a:p>
-          <a:p/>
-          <a:p>
-            <a:r>
-              <a:t>"Een schone clone draait zonder handmatige stappen" is de zwaarste: hun app moet het</a:t>
-            </a:r>
-          </a:p>
-          <a:p>
-            <a:r>
-              <a:t>doen op een computer die hun notebook nooit heeft gezien.</a:t>
+              <a:t>Vergelijken en annoteren is het criterium waar</a:t>
+            </a:r>
+          </a:p>
+          <a:p>
+            <a:r>
+              <a:t>groepen punten laten liggen. Het vraagt diff, cumsum of shift - het verschil met het</a:t>
+            </a:r>
+          </a:p>
+          <a:p>
+            <a:r>
+              <a:t>moment ervoor, niet alleen de waarde. Ze hebben diff vanmiddag al gebruikt om de</a:t>
+            </a:r>
+          </a:p>
+          <a:p>
+            <a:r>
+              <a:t>winst-kolom te maken; zeg dat er hardop bij.</a:t>
             </a:r>
           </a:p>
         </p:txBody>
@@ -2712,22 +2729,23 @@
           <a:lstStyle/>
           <a:p>
             <a:r>
-              <a:t>Dit is de dia die de curriculum-audit vroeg.</a:t>
-            </a:r>
-          </a:p>
-          <a:p>
-            <a:r>
-              <a:t>Studenten leggen de koppeling tussen werkcollege en rubric zelf niet. Een zin - dit</a:t>
-            </a:r>
-          </a:p>
-          <a:p>
-            <a:r>
-              <a:t>is het criterium waarop je case wordt beoordeeld - is het verschil tussen een</a:t>
-            </a:r>
-          </a:p>
-          <a:p>
-            <a:r>
-              <a:t>oefening en een reden.</a:t>
+              <a:t>Deze dia is saai en bespaart je</a:t>
+            </a:r>
+          </a:p>
+          <a:p>
+            <a:r>
+              <a:t>in week 4 een half uur discussie. De aftrek gaat van BEIDE cijfers af, IDS en VA.</a:t>
+            </a:r>
+          </a:p>
+          <a:p/>
+          <a:p>
+            <a:r>
+              <a:t>"Een schone clone draait zonder handmatige stappen" is de zwaarste: hun app moet het</a:t>
+            </a:r>
+          </a:p>
+          <a:p>
+            <a:r>
+              <a:t>doen op een computer die hun notebook nooit heeft gezien.</a:t>
             </a:r>
           </a:p>
         </p:txBody>
@@ -2797,17 +2815,22 @@
           <a:lstStyle/>
           <a:p>
             <a:r>
-              <a:t>[EDA-recept] Dit recept is precies de volgorde van de demo straks:</a:t>
-            </a:r>
-          </a:p>
-          <a:p>
-            <a:r>
-              <a:t>describe -&gt; univariaat -&gt; bivariaat. Blok 1 is describe, blok 3 is bivariaat.</a:t>
-            </a:r>
-          </a:p>
-          <a:p>
-            <a:r>
-              <a:t>Zeg dat je het zo meteen op hun eigen toernooi doet, dan luisteren ze anders.</a:t>
+              <a:t>Dit is de dia die de curriculum-audit vroeg.</a:t>
+            </a:r>
+          </a:p>
+          <a:p>
+            <a:r>
+              <a:t>Studenten leggen de koppeling tussen werkcollege en rubric zelf niet. Een zin - dit</a:t>
+            </a:r>
+          </a:p>
+          <a:p>
+            <a:r>
+              <a:t>is het criterium waarop je case wordt beoordeeld - is het verschil tussen een</a:t>
+            </a:r>
+          </a:p>
+          <a:p>
+            <a:r>
+              <a:t>oefening en een reden.</a:t>
             </a:r>
           </a:p>
         </p:txBody>
@@ -2877,39 +2900,17 @@
           <a:lstStyle/>
           <a:p>
             <a:r>
-              <a:t>[Blok 1 - wat de samenvatting verbergt] Op het toernooi van deze week:</a:t>
-            </a:r>
-          </a:p>
-          <a:p>
-            <a:r>
-              <a:t>gemiddelde 0,0 - mediaan 0,0 - std 39 - laagste -1030 - hoogste +1750.</a:t>
-            </a:r>
-          </a:p>
-          <a:p/>
-          <a:p>
-            <a:r>
-              <a:t>Het gemiddelde is exact nul en dat is geen toeval: poker is een nulsom, wat de</a:t>
-            </a:r>
-          </a:p>
-          <a:p>
-            <a:r>
-              <a:t>een wint verliest de ander. Dat is meteen je controle. Komt er geen nul uit je</a:t>
-            </a:r>
-          </a:p>
-          <a:p>
-            <a:r>
-              <a:t>eigen berekening, dan klopt je groepering niet.</a:t>
-            </a:r>
-          </a:p>
-          <a:p/>
-          <a:p>
-            <a:r>
-              <a:t>Mediaan nul betekent: in de meeste handen gebeurt er niets. En toch ging er in</a:t>
-            </a:r>
-          </a:p>
-          <a:p>
-            <a:r>
-              <a:t>een van die handen 1750 chips om. Vier getallen, en geen van de vier vertelt dat.</a:t>
+              <a:t>[EDA-recept] Dit recept is precies de volgorde van de demo straks:</a:t>
+            </a:r>
+          </a:p>
+          <a:p>
+            <a:r>
+              <a:t>describe -&gt; univariaat -&gt; bivariaat. Blok 1 is describe, blok 3 is bivariaat.</a:t>
+            </a:r>
+          </a:p>
+          <a:p>
+            <a:r>
+              <a:t>Zeg dat je het zo meteen op hun eigen toernooi doet, dan luisteren ze anders.</a:t>
             </a:r>
           </a:p>
         </p:txBody>
@@ -2979,33 +2980,39 @@
           <a:lstStyle/>
           <a:p>
             <a:r>
-              <a:t>[Blok 2 - de verdeling] Op hun data: 4838 van de 6750 handen vallen</a:t>
-            </a:r>
-          </a:p>
-          <a:p>
-            <a:r>
-              <a:t>tussen 0 en 20 chips. 1488 tussen -20 en -1. En dan de staarten: 53 handen tussen</a:t>
-            </a:r>
-          </a:p>
-          <a:p>
-            <a:r>
-              <a:t>-100 en -20, negen onder de -200, zeven boven de +200.</a:t>
+              <a:t>[Blok 1 - wat de samenvatting verbergt] Op het toernooi van deze week:</a:t>
+            </a:r>
+          </a:p>
+          <a:p>
+            <a:r>
+              <a:t>gemiddelde 0,0 - mediaan 0,0 - std 39 - laagste -1030 - hoogste +1750.</a:t>
             </a:r>
           </a:p>
           <a:p/>
           <a:p>
             <a:r>
-              <a:t>Die ene piek rond nul zijn handen die zijn weggelegd zonder in de blinds te zitten.</a:t>
-            </a:r>
-          </a:p>
-          <a:p>
-            <a:r>
-              <a:t>Het echte spel zit in de zeven handen rechts. Vraag aan de zaal: welk van de vier</a:t>
-            </a:r>
-          </a:p>
-          <a:p>
-            <a:r>
-              <a:t>getallen van de vorige dia had je dat verteld? Geen enkel.</a:t>
+              <a:t>Het gemiddelde is exact nul en dat is geen toeval: poker is een nulsom, wat de</a:t>
+            </a:r>
+          </a:p>
+          <a:p>
+            <a:r>
+              <a:t>een wint verliest de ander. Dat is meteen je controle. Komt er geen nul uit je</a:t>
+            </a:r>
+          </a:p>
+          <a:p>
+            <a:r>
+              <a:t>eigen berekening, dan klopt je groepering niet.</a:t>
+            </a:r>
+          </a:p>
+          <a:p/>
+          <a:p>
+            <a:r>
+              <a:t>Mediaan nul betekent: in de meeste handen gebeurt er niets. En toch ging er in</a:t>
+            </a:r>
+          </a:p>
+          <a:p>
+            <a:r>
+              <a:t>een van die handen 1750 chips om. Vier getallen, en geen van de vier vertelt dat.</a:t>
             </a:r>
           </a:p>
         </p:txBody>
@@ -3229,33 +3236,33 @@
           <a:lstStyle/>
           <a:p>
             <a:r>
-              <a:t>[Central tendency] Hier maakt de keuze het verschil tussen twee conclusies,</a:t>
-            </a:r>
-          </a:p>
-          <a:p>
-            <a:r>
-              <a:t>en dat kun je op hun data laten zien. Gemiddelde winst per hand: 0. Mediaan: 0.</a:t>
-            </a:r>
-          </a:p>
-          <a:p>
-            <a:r>
-              <a:t>Allebei nul, allebei waar, en samen verbergen ze een hand van +1750.</a:t>
+              <a:t>[Blok 2 - de verdeling] Op hun data: 4838 van de 6750 handen vallen</a:t>
+            </a:r>
+          </a:p>
+          <a:p>
+            <a:r>
+              <a:t>tussen 0 en 20 chips. 1488 tussen -20 en -1. En dan de staarten: 53 handen tussen</a:t>
+            </a:r>
+          </a:p>
+          <a:p>
+            <a:r>
+              <a:t>-100 en -20, negen onder de -200, zeven boven de +200.</a:t>
             </a:r>
           </a:p>
           <a:p/>
           <a:p>
             <a:r>
-              <a:t>Bij de bots ligt het andersom: de mediaan van de eindstand is 946, het gemiddelde</a:t>
-            </a:r>
-          </a:p>
-          <a:p>
-            <a:r>
-              <a:t>1000 (want nulsom). Dat verschil van 54 chips is de scheefheid - een paar bots</a:t>
-            </a:r>
-          </a:p>
-          <a:p>
-            <a:r>
-              <a:t>hebben veel, de meeste iets minder dan waarmee ze begonnen.</a:t>
+              <a:t>Die ene piek rond nul zijn handen die zijn weggelegd zonder in de blinds te zitten.</a:t>
+            </a:r>
+          </a:p>
+          <a:p>
+            <a:r>
+              <a:t>Het echte spel zit in de zeven handen rechts. Vraag aan de zaal: welk van de vier</a:t>
+            </a:r>
+          </a:p>
+          <a:p>
+            <a:r>
+              <a:t>getallen van de vorige dia had je dat verteld? Geen enkel.</a:t>
             </a:r>
           </a:p>
         </p:txBody>
@@ -3325,39 +3332,33 @@
           <a:lstStyle/>
           <a:p>
             <a:r>
-              <a:t>[Filteren] De twee filters uit de demo:</a:t>
+              <a:t>[Central tendency] Hier maakt de keuze het verschil tussen twee conclusies,</a:t>
+            </a:r>
+          </a:p>
+          <a:p>
+            <a:r>
+              <a:t>en dat kun je op hun data laten zien. Gemiddelde winst per hand: 0. Mediaan: 0.</a:t>
+            </a:r>
+          </a:p>
+          <a:p>
+            <a:r>
+              <a:t>Allebei nul, allebei waar, en samen verbergen ze een hand van +1750.</a:t>
             </a:r>
           </a:p>
           <a:p/>
           <a:p>
             <a:r>
-              <a:t>  handen[handen["bot_naam"] == "500959250"]      -- rijen op inhoud</a:t>
-            </a:r>
-          </a:p>
-          <a:p>
-            <a:r>
-              <a:t>  handen.loc[handen["aan_zet"], "actie"]         -- boolean mask</a:t>
-            </a:r>
-          </a:p>
-          <a:p/>
-          <a:p>
-            <a:r>
-              <a:t>Die tweede is de belangrijkste regel van het college. aan_zet is een kolom vol</a:t>
-            </a:r>
-          </a:p>
-          <a:p>
-            <a:r>
-              <a:t>True/False; in .loc zetten houdt alleen de rijen waar hij True is. 928 van de 6750</a:t>
-            </a:r>
-          </a:p>
-          <a:p>
-            <a:r>
-              <a:t>logregels zijn handen waarin de bot nooit iets koos - hij zat in de blinds en de</a:t>
-            </a:r>
-          </a:p>
-          <a:p>
-            <a:r>
-              <a:t>hand was al voorbij.</a:t>
+              <a:t>Bij de bots ligt het andersom: de mediaan van de eindstand is 946, het gemiddelde</a:t>
+            </a:r>
+          </a:p>
+          <a:p>
+            <a:r>
+              <a:t>1000 (want nulsom). Dat verschil van 54 chips is de scheefheid - een paar bots</a:t>
+            </a:r>
+          </a:p>
+          <a:p>
+            <a:r>
+              <a:t>hebben veel, de meeste iets minder dan waarmee ze begonnen.</a:t>
             </a:r>
           </a:p>
         </p:txBody>
@@ -3427,50 +3428,39 @@
           <a:lstStyle/>
           <a:p>
             <a:r>
-              <a:t>[Nieuwe variabelen] De winst-kolom is hier het voorbeeld, en hij komt</a:t>
-            </a:r>
-          </a:p>
-          <a:p>
-            <a:r>
-              <a:t>niet uit het log maar reken je zelf uit:</a:t>
+              <a:t>[Filteren] De twee filters uit de demo:</a:t>
             </a:r>
           </a:p>
           <a:p/>
           <a:p>
             <a:r>
-              <a:t>  handen["winst"] = handen.groupby(["bot_naam","simulatie"])["stack"].diff()</a:t>
-            </a:r>
-          </a:p>
-          <a:p>
-            <a:r>
-              <a:t>                          .fillna(handen["stack"] - 1000)</a:t>
+              <a:t>  handen[handen["bot_naam"] == "500959250"]      -- rijen op inhoud</a:t>
+            </a:r>
+          </a:p>
+          <a:p>
+            <a:r>
+              <a:t>  handen.loc[handen["aan_zet"], "actie"]         -- boolean mask</a:t>
             </a:r>
           </a:p>
           <a:p/>
           <a:p>
             <a:r>
-              <a:t>Het log bewaart de stack NA elke hand, dus winst is het verschil met de hand</a:t>
-            </a:r>
-          </a:p>
-          <a:p>
-            <a:r>
-              <a:t>ervoor. Twee dingen die misgaan: groeperen zonder simulatie (dan trek je de</a:t>
-            </a:r>
-          </a:p>
-          <a:p>
-            <a:r>
-              <a:t>eerste hand van zitting 1 af van de laatste van zitting 0), en de NaN van de</a:t>
-            </a:r>
-          </a:p>
-          <a:p>
-            <a:r>
-              <a:t>eerste hand laten staan.</a:t>
-            </a:r>
-          </a:p>
-          <a:p/>
-          <a:p>
-            <a:r>
-              <a:t>Controle: alle winst samen is precies 0.</a:t>
+              <a:t>Die tweede is de belangrijkste regel van het college. aan_zet is een kolom vol</a:t>
+            </a:r>
+          </a:p>
+          <a:p>
+            <a:r>
+              <a:t>True/False; in .loc zetten houdt alleen de rijen waar hij True is. 928 van de 6750</a:t>
+            </a:r>
+          </a:p>
+          <a:p>
+            <a:r>
+              <a:t>logregels zijn handen waarin de bot nooit iets koos - hij zat in de blinds en de</a:t>
+            </a:r>
+          </a:p>
+          <a:p>
+            <a:r>
+              <a:t>hand was al voorbij.</a:t>
             </a:r>
           </a:p>
         </p:txBody>
@@ -3540,46 +3530,50 @@
           <a:lstStyle/>
           <a:p>
             <a:r>
-              <a:t>[Groupby] Een-op-een met de vorige dia:</a:t>
+              <a:t>[Nieuwe variabelen] De winst-kolom is hier het voorbeeld, en hij komt</a:t>
+            </a:r>
+          </a:p>
+          <a:p>
+            <a:r>
+              <a:t>niet uit het log maar reken je zelf uit:</a:t>
             </a:r>
           </a:p>
           <a:p/>
           <a:p>
             <a:r>
-              <a:t>  gapminder.groupby('continent')['pop'].sum()</a:t>
-            </a:r>
-          </a:p>
-          <a:p>
-            <a:r>
-              <a:t>  handen.groupby('bot_naam')['winst'].sum()</a:t>
+              <a:t>  handen["winst"] = handen.groupby(["bot_naam","simulatie"])["stack"].diff()</a:t>
+            </a:r>
+          </a:p>
+          <a:p>
+            <a:r>
+              <a:t>                          .fillna(handen["stack"] - 1000)</a:t>
             </a:r>
           </a:p>
           <a:p/>
           <a:p>
             <a:r>
-              <a:t>Letterlijk dezelfde regel. En dan de valkuil, die je moet laten zien:</a:t>
+              <a:t>Het log bewaart de stack NA elke hand, dus winst is het verschil met de hand</a:t>
+            </a:r>
+          </a:p>
+          <a:p>
+            <a:r>
+              <a:t>ervoor. Twee dingen die misgaan: groeperen zonder simulatie (dan trek je de</a:t>
+            </a:r>
+          </a:p>
+          <a:p>
+            <a:r>
+              <a:t>eerste hand van zitting 1 af van de laatste van zitting 0), en de NaN van de</a:t>
+            </a:r>
+          </a:p>
+          <a:p>
+            <a:r>
+              <a:t>eerste hand laten staan.</a:t>
             </a:r>
           </a:p>
           <a:p/>
           <a:p>
             <a:r>
-              <a:t>  handen.groupby('bot_naam')['stack'].sum()   -&gt;  258.550 chips</a:t>
-            </a:r>
-          </a:p>
-          <a:p/>
-          <a:p>
-            <a:r>
-              <a:t>Geen foutmelding, keurig getal, volslagen onzin. Een stack is een STAND, geen</a:t>
-            </a:r>
-          </a:p>
-          <a:p>
-            <a:r>
-              <a:t>stroom. Dat over 250 handen optellen is hetzelfde als de bevolking van Europa</a:t>
-            </a:r>
-          </a:p>
-          <a:p>
-            <a:r>
-              <a:t>over alle twaalf gapminder-jaren optellen. Voor een stand wil je .last().</a:t>
+              <a:t>Controle: alle winst samen is precies 0.</a:t>
             </a:r>
           </a:p>
         </p:txBody>
@@ -3605,6 +3599,115 @@
 </file>
 
 <file path=ppt/notesSlides/notesSlide24.xml><?xml version="1.0" encoding="utf-8"?>
+<p:notes xmlns:a="http://schemas.openxmlformats.org/drawingml/2006/main" xmlns:p="http://schemas.openxmlformats.org/presentationml/2006/main" xmlns:r="http://schemas.openxmlformats.org/officeDocument/2006/relationships">
+  <p:cSld>
+    <p:spTree>
+      <p:nvGrpSpPr>
+        <p:cNvPr id="1" name=""/>
+        <p:cNvGrpSpPr/>
+        <p:nvPr/>
+      </p:nvGrpSpPr>
+      <p:grpSpPr>
+        <a:xfrm>
+          <a:off x="0" y="0"/>
+          <a:ext cx="0" cy="0"/>
+          <a:chOff x="0" y="0"/>
+          <a:chExt cx="0" cy="0"/>
+        </a:xfrm>
+      </p:grpSpPr>
+      <p:sp>
+        <p:nvSpPr>
+          <p:cNvPr id="2" name="Slide Image Placeholder 1"/>
+          <p:cNvSpPr>
+            <a:spLocks noGrp="1"/>
+          </p:cNvSpPr>
+          <p:nvPr>
+            <p:ph type="sldImg"/>
+          </p:nvPr>
+        </p:nvSpPr>
+        <p:spPr/>
+      </p:sp>
+      <p:sp>
+        <p:nvSpPr>
+          <p:cNvPr id="3" name="Notes Placeholder 2"/>
+          <p:cNvSpPr>
+            <a:spLocks noGrp="1"/>
+          </p:cNvSpPr>
+          <p:nvPr>
+            <p:ph type="body"/>
+          </p:nvPr>
+        </p:nvSpPr>
+        <p:spPr/>
+        <p:txBody>
+          <a:bodyPr/>
+          <a:lstStyle/>
+          <a:p>
+            <a:r>
+              <a:t>[Groupby] Een-op-een met de vorige dia:</a:t>
+            </a:r>
+          </a:p>
+          <a:p/>
+          <a:p>
+            <a:r>
+              <a:t>  gapminder.groupby('continent')['pop'].sum()</a:t>
+            </a:r>
+          </a:p>
+          <a:p>
+            <a:r>
+              <a:t>  handen.groupby('bot_naam')['winst'].sum()</a:t>
+            </a:r>
+          </a:p>
+          <a:p/>
+          <a:p>
+            <a:r>
+              <a:t>Letterlijk dezelfde regel. En dan de valkuil, die je moet laten zien:</a:t>
+            </a:r>
+          </a:p>
+          <a:p/>
+          <a:p>
+            <a:r>
+              <a:t>  handen.groupby('bot_naam')['stack'].sum()   -&gt;  258.550 chips</a:t>
+            </a:r>
+          </a:p>
+          <a:p/>
+          <a:p>
+            <a:r>
+              <a:t>Geen foutmelding, keurig getal, volslagen onzin. Een stack is een STAND, geen</a:t>
+            </a:r>
+          </a:p>
+          <a:p>
+            <a:r>
+              <a:t>stroom. Dat over 250 handen optellen is hetzelfde als de bevolking van Europa</a:t>
+            </a:r>
+          </a:p>
+          <a:p>
+            <a:r>
+              <a:t>over alle twaalf gapminder-jaren optellen. Voor een stand wil je .last().</a:t>
+            </a:r>
+          </a:p>
+        </p:txBody>
+      </p:sp>
+      <p:sp>
+        <p:nvSpPr>
+          <p:cNvPr id="4" name="Slide Number Placeholder 3"/>
+          <p:cNvSpPr>
+            <a:spLocks noGrp="1"/>
+          </p:cNvSpPr>
+          <p:nvPr>
+            <p:ph type="sldNum"/>
+          </p:nvPr>
+        </p:nvSpPr>
+        <p:spPr/>
+      </p:sp>
+    </p:spTree>
+  </p:cSld>
+  <p:clrMapOvr>
+    <a:masterClrMapping/>
+  </p:clrMapOvr>
+</p:notes>
+</file>
+
+<file path=ppt/notesSlides/notesSlide25.xml><?xml version="1.0" encoding="utf-8"?>
 <p:notes xmlns:a="http://schemas.openxmlformats.org/drawingml/2006/main" xmlns:p="http://schemas.openxmlformats.org/presentationml/2006/main" xmlns:r="http://schemas.openxmlformats.org/officeDocument/2006/relationships">
   <p:cSld>
     <p:spTree>
@@ -15553,7 +15656,7 @@
               </a:defRPr>
             </a:pPr>
             <a:r>
-              <a:t>Waar 27 bots zijn geëindigd</a:t>
+              <a:t>De winst per hand, getekend</a:t>
             </a:r>
           </a:p>
         </p:txBody>
@@ -15584,7 +15687,7 @@
       </p:sp>
       <p:pic>
         <p:nvPicPr>
-          <p:cNvPr id="4" name="Picture 3" descr="eindstanden_histogram.png"/>
+          <p:cNvPr id="4" name="Picture 3" descr="winst_per_hand_histogram.png"/>
           <p:cNvPicPr>
             <a:picLocks noChangeAspect="1"/>
           </p:cNvPicPr>
@@ -15599,7 +15702,7 @@
         <p:spPr>
           <a:xfrm>
             <a:off x="2441448" y="1920240"/>
-            <a:ext cx="7863840" cy="3677489"/>
+            <a:ext cx="7863840" cy="3420920"/>
           </a:xfrm>
           <a:prstGeom prst="rect">
             <a:avLst/>
@@ -16400,7 +16503,7 @@
               </a:defRPr>
             </a:pPr>
             <a:r>
-              <a:t>Groepscase 2 — wat je oplevert</a:t>
+              <a:t>Waar de bots zijn geëindigd</a:t>
             </a:r>
           </a:p>
         </p:txBody>
@@ -16426,134 +16529,36 @@
             <a:spAutoFit/>
           </a:bodyPr>
           <a:lstStyle/>
-          <a:p>
-            <a:pPr>
-              <a:defRPr sz="1700" b="1">
-                <a:solidFill>
-                  <a:srgbClr val="000000"/>
-                </a:solidFill>
-                <a:latin typeface="Arial"/>
-              </a:defRPr>
-            </a:pPr>
-            <a:r>
-              <a:t>Een Streamlit-dashboard over een onderwerp dat je zelf kiest.</a:t>
-            </a:r>
-          </a:p>
-          <a:p>
-            <a:pPr lvl="1">
-              <a:defRPr sz="1400" b="0">
-                <a:solidFill>
-                  <a:srgbClr val="000000"/>
-                </a:solidFill>
-                <a:latin typeface="Arial"/>
-              </a:defRPr>
-            </a:pPr>
-            <a:r>
-              <a:t>Gepubliceerd via GitHub op share.streamlit.io, te openen met een link</a:t>
-            </a:r>
-          </a:p>
-          <a:p>
-            <a:pPr lvl="1">
-              <a:defRPr sz="1400" b="0">
-                <a:solidFill>
-                  <a:srgbClr val="000000"/>
-                </a:solidFill>
-                <a:latin typeface="Arial"/>
-              </a:defRPr>
-            </a:pPr>
-            <a:r>
-              <a:t>De app haalt de data zelf op bij een openbare API — niet met de hand gedownload</a:t>
-            </a:r>
-          </a:p>
-          <a:p>
-            <a:pPr lvl="1">
-              <a:defRPr sz="1400" b="0">
-                <a:solidFill>
-                  <a:srgbClr val="1B4D3E"/>
-                </a:solidFill>
-                <a:latin typeface="Arial"/>
-              </a:defRPr>
-            </a:pPr>
-            <a:r>
-              <a:t>Minimaal één join: twee bronnen die je tot één tabel samenvoegt</a:t>
-            </a:r>
-          </a:p>
-          <a:p>
-            <a:pPr>
-              <a:spcBef>
-                <a:spcPts val="1300"/>
-              </a:spcBef>
-              <a:defRPr sz="1700" b="1">
-                <a:solidFill>
-                  <a:srgbClr val="000000"/>
-                </a:solidFill>
-                <a:latin typeface="Arial"/>
-              </a:defRPr>
-            </a:pPr>
-            <a:r>
-              <a:t>Loopt over week 3 en week 4. Dat is kort.</a:t>
-            </a:r>
-          </a:p>
-          <a:p>
-            <a:pPr lvl="1">
-              <a:defRPr sz="1400" b="0">
-                <a:solidFill>
-                  <a:srgbClr val="000000"/>
-                </a:solidFill>
-                <a:latin typeface="Arial"/>
-              </a:defRPr>
-            </a:pPr>
-            <a:r>
-              <a:t>Donderdag 18:00 staat je onderwerp vast: welke vraag, welke twee bronnen,</a:t>
-            </a:r>
-          </a:p>
-          <a:p>
-            <a:pPr lvl="1">
-              <a:defRPr sz="1400" b="0">
-                <a:solidFill>
-                  <a:srgbClr val="000000"/>
-                </a:solidFill>
-                <a:latin typeface="Arial"/>
-              </a:defRPr>
-            </a:pPr>
-            <a:r>
-              <a:t>op welke kolom die aan elkaar passen, en wie in de groep wat doet</a:t>
-            </a:r>
-          </a:p>
-          <a:p>
-            <a:pPr>
-              <a:spcBef>
-                <a:spcPts val="1300"/>
-              </a:spcBef>
-              <a:defRPr sz="1700" b="1">
-                <a:solidFill>
-                  <a:srgbClr val="25167A"/>
-                </a:solidFill>
-                <a:latin typeface="Arial"/>
-              </a:defRPr>
-            </a:pPr>
-            <a:r>
-              <a:t>Zoek nu al op of die twee bronnen écht een gemeenschappelijke kolom hebben.</a:t>
-            </a:r>
-          </a:p>
-          <a:p>
-            <a:pPr lvl="1">
-              <a:defRPr sz="1400" b="0">
-                <a:solidFill>
-                  <a:srgbClr val="505A64"/>
-                </a:solidFill>
-                <a:latin typeface="Arial"/>
-              </a:defRPr>
-            </a:pPr>
-            <a:r>
-              <a:t>"Den Haag" en "'s-Gravenhage" passen niet op elkaar zonder werk</a:t>
-            </a:r>
-          </a:p>
-        </p:txBody>
-      </p:sp>
-      <p:sp>
-        <p:nvSpPr>
-          <p:cNvPr id="4" name="TextBox 3"/>
+          <a:p/>
+        </p:txBody>
+      </p:sp>
+      <p:pic>
+        <p:nvPicPr>
+          <p:cNvPr id="4" name="Picture 3" descr="eindstanden_histogram.png"/>
+          <p:cNvPicPr>
+            <a:picLocks noChangeAspect="1"/>
+          </p:cNvPicPr>
+          <p:nvPr/>
+        </p:nvPicPr>
+        <p:blipFill>
+          <a:blip r:embed="rId2"/>
+          <a:stretch>
+            <a:fillRect/>
+          </a:stretch>
+        </p:blipFill>
+        <p:spPr>
+          <a:xfrm>
+            <a:off x="2441448" y="1920240"/>
+            <a:ext cx="7863840" cy="3420920"/>
+          </a:xfrm>
+          <a:prstGeom prst="rect">
+            <a:avLst/>
+          </a:prstGeom>
+        </p:spPr>
+      </p:pic>
+      <p:sp>
+        <p:nvSpPr>
+          <p:cNvPr id="5" name="TextBox 4"/>
           <p:cNvSpPr txBox="1"/>
           <p:nvPr/>
         </p:nvSpPr>
@@ -16636,7 +16641,7 @@
               </a:defRPr>
             </a:pPr>
             <a:r>
-              <a:t>Waar je cijfer vandaan komt</a:t>
+              <a:t>Groepscase 2 — wat je oplevert</a:t>
             </a:r>
           </a:p>
         </p:txBody>
@@ -16666,13 +16671,13 @@
             <a:pPr>
               <a:defRPr sz="1700" b="1">
                 <a:solidFill>
-                  <a:srgbClr val="25167A"/>
+                  <a:srgbClr val="000000"/>
                 </a:solidFill>
                 <a:latin typeface="Arial"/>
               </a:defRPr>
             </a:pPr>
             <a:r>
-              <a:t>Drie criteria voor IDS — de data-kant</a:t>
+              <a:t>Een Streamlit-dashboard over een onderwerp dat je zelf kiest.</a:t>
             </a:r>
           </a:p>
           <a:p>
@@ -16685,7 +16690,7 @@
               </a:defRPr>
             </a:pPr>
             <a:r>
-              <a:t>Data verzameling · twee bronnen, plus de sleutel en de rijen vóór en ná de join</a:t>
+              <a:t>Gepubliceerd via GitHub op share.streamlit.io, te openen met een link</a:t>
             </a:r>
           </a:p>
           <a:p>
@@ -16698,20 +16703,20 @@
               </a:defRPr>
             </a:pPr>
             <a:r>
-              <a:t>Data verkenning · lege waarden, bereik, dubbele rijen — en wat je ermee deed</a:t>
+              <a:t>De app haalt de data zelf op bij een openbare API — niet met de hand gedownload</a:t>
             </a:r>
           </a:p>
           <a:p>
             <a:pPr lvl="1">
               <a:defRPr sz="1400" b="0">
                 <a:solidFill>
-                  <a:srgbClr val="000000"/>
+                  <a:srgbClr val="1B4D3E"/>
                 </a:solidFill>
                 <a:latin typeface="Arial"/>
               </a:defRPr>
             </a:pPr>
             <a:r>
-              <a:t>Analyse · een conclusie die de data draagt, niet meer dan dat</a:t>
+              <a:t>Minimaal één join: twee bronnen die je tot één tabel samenvoegt</a:t>
             </a:r>
           </a:p>
           <a:p>
@@ -16721,13 +16726,13 @@
               </a:spcBef>
               <a:defRPr sz="1700" b="1">
                 <a:solidFill>
-                  <a:srgbClr val="25167A"/>
+                  <a:srgbClr val="000000"/>
                 </a:solidFill>
                 <a:latin typeface="Arial"/>
               </a:defRPr>
             </a:pPr>
             <a:r>
-              <a:t>Vier criteria voor VA — de verhaalkant</a:t>
+              <a:t>Loopt over week 3 en week 4. Dat is kort.</a:t>
             </a:r>
           </a:p>
           <a:p>
@@ -16740,7 +16745,7 @@
               </a:defRPr>
             </a:pPr>
             <a:r>
-              <a:t>Opbouw en verhaallijn · Interactiviteit · Dashboardontwerp</a:t>
+              <a:t>Donderdag 18:00 staat je onderwerp vast: welke vraag, welke twee bronnen,</a:t>
             </a:r>
           </a:p>
           <a:p>
@@ -16753,20 +16758,7 @@
               </a:defRPr>
             </a:pPr>
             <a:r>
-              <a:t>Vergelijken en annoteren · het verschil, het opgetelde verloop, of de waarde</a:t>
-            </a:r>
-          </a:p>
-          <a:p>
-            <a:pPr lvl="1">
-              <a:defRPr sz="1400" b="0">
-                <a:solidFill>
-                  <a:srgbClr val="1B4D3E"/>
-                </a:solidFill>
-                <a:latin typeface="Arial"/>
-              </a:defRPr>
-            </a:pPr>
-            <a:r>
-              <a:t>ten opzichte van het moment ervoor — diff, cumsum, shift</a:t>
+              <a:t>op welke kolom die aan elkaar passen, en wie in de groep wat doet</a:t>
             </a:r>
           </a:p>
           <a:p>
@@ -16776,13 +16768,26 @@
               </a:spcBef>
               <a:defRPr sz="1700" b="1">
                 <a:solidFill>
-                  <a:srgbClr val="000000"/>
+                  <a:srgbClr val="25167A"/>
                 </a:solidFill>
                 <a:latin typeface="Arial"/>
               </a:defRPr>
             </a:pPr>
             <a:r>
-              <a:t>Vijf niveaus, van Ontbreekt (1) tot Uitstekend (9).</a:t>
+              <a:t>Zoek nu al op of die twee bronnen écht een gemeenschappelijke kolom hebben.</a:t>
+            </a:r>
+          </a:p>
+          <a:p>
+            <a:pPr lvl="1">
+              <a:defRPr sz="1400" b="0">
+                <a:solidFill>
+                  <a:srgbClr val="505A64"/>
+                </a:solidFill>
+                <a:latin typeface="Arial"/>
+              </a:defRPr>
+            </a:pPr>
+            <a:r>
+              <a:t>"Den Haag" en "'s-Gravenhage" passen niet op elkaar zonder werk</a:t>
             </a:r>
           </a:p>
         </p:txBody>
@@ -16872,7 +16877,7 @@
               </a:defRPr>
             </a:pPr>
             <a:r>
-              <a:t>Vijf voorwaarden — die gaan van je cijfer af</a:t>
+              <a:t>Waar je cijfer vandaan komt</a:t>
             </a:r>
           </a:p>
         </p:txBody>
@@ -16902,13 +16907,13 @@
             <a:pPr>
               <a:defRPr sz="1700" b="1">
                 <a:solidFill>
-                  <a:srgbClr val="000000"/>
+                  <a:srgbClr val="25167A"/>
                 </a:solidFill>
                 <a:latin typeface="Arial"/>
               </a:defRPr>
             </a:pPr>
             <a:r>
-              <a:t>Dit zijn geen criteria maar drempels. Beide cijfers, IDS en VA.</a:t>
+              <a:t>Drie criteria voor IDS — de data-kant</a:t>
             </a:r>
           </a:p>
           <a:p>
@@ -16921,20 +16926,20 @@
               </a:defRPr>
             </a:pPr>
             <a:r>
-              <a:t>App niet online, of een schone clone draait niet zonder handwerk</a:t>
+              <a:t>Data verzameling · twee bronnen, plus de sleutel en de rijen vóór en ná de join</a:t>
             </a:r>
           </a:p>
           <a:p>
             <a:pPr lvl="1">
               <a:defRPr sz="1400" b="0">
                 <a:solidFill>
-                  <a:srgbClr val="25167A"/>
+                  <a:srgbClr val="000000"/>
                 </a:solidFill>
                 <a:latin typeface="Arial"/>
               </a:defRPr>
             </a:pPr>
             <a:r>
-              <a:t>     -1,0</a:t>
+              <a:t>Data verkenning · lege waarden, bereik, dubbele rijen — en wat je ermee deed</a:t>
             </a:r>
           </a:p>
           <a:p>
@@ -16947,46 +16952,7 @@
               </a:defRPr>
             </a:pPr>
             <a:r>
-              <a:t>Presentatie langer dan 10 minuten, exclusief vragen</a:t>
-            </a:r>
-          </a:p>
-          <a:p>
-            <a:pPr lvl="1">
-              <a:defRPr sz="1400" b="0">
-                <a:solidFill>
-                  <a:srgbClr val="25167A"/>
-                </a:solidFill>
-                <a:latin typeface="Arial"/>
-              </a:defRPr>
-            </a:pPr>
-            <a:r>
-              <a:t>     -1,0</a:t>
-            </a:r>
-          </a:p>
-          <a:p>
-            <a:pPr lvl="1">
-              <a:defRPr sz="1400" b="0">
-                <a:solidFill>
-                  <a:srgbClr val="000000"/>
-                </a:solidFill>
-                <a:latin typeface="Arial"/>
-              </a:defRPr>
-            </a:pPr>
-            <a:r>
-              <a:t>Geen slider, checkbox én dropdown, elk gekoppeld aan een tabel of grafiek</a:t>
-            </a:r>
-          </a:p>
-          <a:p>
-            <a:pPr lvl="1">
-              <a:defRPr sz="1400" b="0">
-                <a:solidFill>
-                  <a:srgbClr val="25167A"/>
-                </a:solidFill>
-                <a:latin typeface="Arial"/>
-              </a:defRPr>
-            </a:pPr>
-            <a:r>
-              <a:t>     -0,5</a:t>
+              <a:t>Analyse · een conclusie die de data draagt, niet meer dan dat</a:t>
             </a:r>
           </a:p>
           <a:p>
@@ -16996,26 +16962,68 @@
               </a:spcBef>
               <a:defRPr sz="1700" b="1">
                 <a:solidFill>
-                  <a:srgbClr val="000000"/>
+                  <a:srgbClr val="25167A"/>
                 </a:solidFill>
                 <a:latin typeface="Arial"/>
               </a:defRPr>
             </a:pPr>
             <a:r>
-              <a:t>En twee zonder aftrek, maar niet vrijblijvend:</a:t>
+              <a:t>Vier criteria voor VA — de verhaalkant</a:t>
             </a:r>
           </a:p>
           <a:p>
             <a:pPr lvl="1">
               <a:defRPr sz="1400" b="0">
                 <a:solidFill>
-                  <a:srgbClr val="505A64"/>
+                  <a:srgbClr val="000000"/>
                 </a:solidFill>
                 <a:latin typeface="Arial"/>
               </a:defRPr>
             </a:pPr>
             <a:r>
-              <a:t>Onderwerp op tijd gemeld · code van anderen met bron erbij, en uit te leggen</a:t>
+              <a:t>Opbouw en verhaallijn · Interactiviteit · Dashboardontwerp</a:t>
+            </a:r>
+          </a:p>
+          <a:p>
+            <a:pPr lvl="1">
+              <a:defRPr sz="1400" b="0">
+                <a:solidFill>
+                  <a:srgbClr val="000000"/>
+                </a:solidFill>
+                <a:latin typeface="Arial"/>
+              </a:defRPr>
+            </a:pPr>
+            <a:r>
+              <a:t>Vergelijken en annoteren · het verschil, het opgetelde verloop, of de waarde</a:t>
+            </a:r>
+          </a:p>
+          <a:p>
+            <a:pPr lvl="1">
+              <a:defRPr sz="1400" b="0">
+                <a:solidFill>
+                  <a:srgbClr val="1B4D3E"/>
+                </a:solidFill>
+                <a:latin typeface="Arial"/>
+              </a:defRPr>
+            </a:pPr>
+            <a:r>
+              <a:t>ten opzichte van het moment ervoor — diff, cumsum, shift</a:t>
+            </a:r>
+          </a:p>
+          <a:p>
+            <a:pPr>
+              <a:spcBef>
+                <a:spcPts val="1300"/>
+              </a:spcBef>
+              <a:defRPr sz="1700" b="1">
+                <a:solidFill>
+                  <a:srgbClr val="000000"/>
+                </a:solidFill>
+                <a:latin typeface="Arial"/>
+              </a:defRPr>
+            </a:pPr>
+            <a:r>
+              <a:t>Vijf niveaus, van Ontbreekt (1) tot Uitstekend (9).</a:t>
             </a:r>
           </a:p>
         </p:txBody>
@@ -17105,7 +17113,7 @@
               </a:defRPr>
             </a:pPr>
             <a:r>
-              <a:t>Dat heb je vanmiddag al gedaan</a:t>
+              <a:t>Vijf voorwaarden — die gaan van je cijfer af</a:t>
             </a:r>
           </a:p>
         </p:txBody>
@@ -17141,85 +17149,85 @@
               </a:defRPr>
             </a:pPr>
             <a:r>
-              <a:t>De demo van zojuist was Case 2 in het klein:</a:t>
+              <a:t>Dit zijn geen criteria maar drempels. Beide cijfers, IDS en VA.</a:t>
             </a:r>
           </a:p>
           <a:p>
             <a:pPr lvl="1">
               <a:defRPr sz="1400" b="0">
                 <a:solidFill>
-                  <a:srgbClr val="1B4D3E"/>
+                  <a:srgbClr val="000000"/>
                 </a:solidFill>
                 <a:latin typeface="Arial"/>
               </a:defRPr>
             </a:pPr>
             <a:r>
-              <a:t>twee tabellen op bot_naam samengevoegd, rijen geteld vóór en ná</a:t>
+              <a:t>App niet online, of een schone clone draait niet zonder handwerk</a:t>
             </a:r>
           </a:p>
           <a:p>
             <a:pPr lvl="1">
               <a:defRPr sz="1400" b="0">
                 <a:solidFill>
-                  <a:srgbClr val="000000"/>
+                  <a:srgbClr val="25167A"/>
                 </a:solidFill>
                 <a:latin typeface="Arial"/>
               </a:defRPr>
             </a:pPr>
             <a:r>
-              <a:t>     → criterium Data verzameling</a:t>
+              <a:t>     -1,0</a:t>
             </a:r>
           </a:p>
           <a:p>
             <a:pPr lvl="1">
               <a:defRPr sz="1400" b="0">
                 <a:solidFill>
-                  <a:srgbClr val="1B4D3E"/>
+                  <a:srgbClr val="000000"/>
                 </a:solidFill>
                 <a:latin typeface="Arial"/>
               </a:defRPr>
             </a:pPr>
             <a:r>
-              <a:t>928 lege waarden gevonden, en gezien wat ze met je percentage deden</a:t>
+              <a:t>Presentatie langer dan 10 minuten, exclusief vragen</a:t>
             </a:r>
           </a:p>
           <a:p>
             <a:pPr lvl="1">
               <a:defRPr sz="1400" b="0">
                 <a:solidFill>
-                  <a:srgbClr val="000000"/>
+                  <a:srgbClr val="25167A"/>
                 </a:solidFill>
                 <a:latin typeface="Arial"/>
               </a:defRPr>
             </a:pPr>
             <a:r>
-              <a:t>     → criterium Data verkenning</a:t>
+              <a:t>     -1,0</a:t>
             </a:r>
           </a:p>
           <a:p>
             <a:pPr lvl="1">
               <a:defRPr sz="1400" b="0">
                 <a:solidFill>
-                  <a:srgbClr val="1B4D3E"/>
+                  <a:srgbClr val="000000"/>
                 </a:solidFill>
                 <a:latin typeface="Arial"/>
               </a:defRPr>
             </a:pPr>
             <a:r>
-              <a:t>diff en cumsum over het verloop van een stack</a:t>
+              <a:t>Geen slider, checkbox én dropdown, elk gekoppeld aan een tabel of grafiek</a:t>
             </a:r>
           </a:p>
           <a:p>
             <a:pPr lvl="1">
               <a:defRPr sz="1400" b="0">
                 <a:solidFill>
-                  <a:srgbClr val="000000"/>
+                  <a:srgbClr val="25167A"/>
                 </a:solidFill>
                 <a:latin typeface="Arial"/>
               </a:defRPr>
             </a:pPr>
             <a:r>
-              <a:t>     → criterium Vergelijken en annoteren</a:t>
+              <a:t>     -0,5</a:t>
             </a:r>
           </a:p>
           <a:p>
@@ -17235,7 +17243,7 @@
               </a:defRPr>
             </a:pPr>
             <a:r>
-              <a:t>Het verschil met de case: daar kiest niemand de dataset voor je,</a:t>
+              <a:t>En twee zonder aftrek, maar niet vrijblijvend:</a:t>
             </a:r>
           </a:p>
           <a:p>
@@ -17248,7 +17256,7 @@
               </a:defRPr>
             </a:pPr>
             <a:r>
-              <a:t>en staat er geen kolom aan_zet klaar om je fout te laten zien.</a:t>
+              <a:t>Onderwerp op tijd gemeld · code van anderen met bron erbij, en uit te leggen</a:t>
             </a:r>
           </a:p>
         </p:txBody>
@@ -17285,6 +17293,239 @@
             </a:pPr>
             <a:r>
               <a:t>34</a:t>
+            </a:r>
+          </a:p>
+        </p:txBody>
+      </p:sp>
+    </p:spTree>
+  </p:cSld>
+  <p:clrMapOvr>
+    <a:masterClrMapping/>
+  </p:clrMapOvr>
+</p:sld>
+</file>
+
+<file path=ppt/slides/slide35.xml><?xml version="1.0" encoding="utf-8"?>
+<p:sld xmlns:a="http://schemas.openxmlformats.org/drawingml/2006/main" xmlns:p="http://schemas.openxmlformats.org/presentationml/2006/main" xmlns:r="http://schemas.openxmlformats.org/officeDocument/2006/relationships">
+  <p:cSld>
+    <p:spTree>
+      <p:nvGrpSpPr>
+        <p:cNvPr id="1" name=""/>
+        <p:cNvGrpSpPr/>
+        <p:nvPr/>
+      </p:nvGrpSpPr>
+      <p:grpSpPr/>
+      <p:sp>
+        <p:nvSpPr>
+          <p:cNvPr id="2" name="TextBox 1"/>
+          <p:cNvSpPr txBox="1"/>
+          <p:nvPr/>
+        </p:nvSpPr>
+        <p:spPr>
+          <a:xfrm>
+            <a:off x="1984248" y="941832"/>
+            <a:ext cx="8229600" cy="1143000"/>
+          </a:xfrm>
+          <a:prstGeom prst="rect">
+            <a:avLst/>
+          </a:prstGeom>
+          <a:noFill/>
+        </p:spPr>
+        <p:txBody>
+          <a:bodyPr wrap="square">
+            <a:spAutoFit/>
+          </a:bodyPr>
+          <a:lstStyle/>
+          <a:p>
+            <a:pPr>
+              <a:defRPr sz="3200">
+                <a:solidFill>
+                  <a:srgbClr val="25167A"/>
+                </a:solidFill>
+                <a:latin typeface="Arial"/>
+              </a:defRPr>
+            </a:pPr>
+            <a:r>
+              <a:t>Dat heb je vanmiddag al gedaan</a:t>
+            </a:r>
+          </a:p>
+        </p:txBody>
+      </p:sp>
+      <p:sp>
+        <p:nvSpPr>
+          <p:cNvPr id="3" name="TextBox 2"/>
+          <p:cNvSpPr txBox="1"/>
+          <p:nvPr/>
+        </p:nvSpPr>
+        <p:spPr>
+          <a:xfrm>
+            <a:off x="1984248" y="2084831"/>
+            <a:ext cx="8778240" cy="4041648"/>
+          </a:xfrm>
+          <a:prstGeom prst="rect">
+            <a:avLst/>
+          </a:prstGeom>
+          <a:noFill/>
+        </p:spPr>
+        <p:txBody>
+          <a:bodyPr wrap="square">
+            <a:spAutoFit/>
+          </a:bodyPr>
+          <a:lstStyle/>
+          <a:p>
+            <a:pPr>
+              <a:defRPr sz="1700" b="1">
+                <a:solidFill>
+                  <a:srgbClr val="000000"/>
+                </a:solidFill>
+                <a:latin typeface="Arial"/>
+              </a:defRPr>
+            </a:pPr>
+            <a:r>
+              <a:t>De demo van zojuist was Case 2 in het klein:</a:t>
+            </a:r>
+          </a:p>
+          <a:p>
+            <a:pPr lvl="1">
+              <a:defRPr sz="1400" b="0">
+                <a:solidFill>
+                  <a:srgbClr val="1B4D3E"/>
+                </a:solidFill>
+                <a:latin typeface="Arial"/>
+              </a:defRPr>
+            </a:pPr>
+            <a:r>
+              <a:t>twee tabellen op bot_naam samengevoegd, rijen geteld vóór en ná</a:t>
+            </a:r>
+          </a:p>
+          <a:p>
+            <a:pPr lvl="1">
+              <a:defRPr sz="1400" b="0">
+                <a:solidFill>
+                  <a:srgbClr val="000000"/>
+                </a:solidFill>
+                <a:latin typeface="Arial"/>
+              </a:defRPr>
+            </a:pPr>
+            <a:r>
+              <a:t>     → criterium Data verzameling</a:t>
+            </a:r>
+          </a:p>
+          <a:p>
+            <a:pPr lvl="1">
+              <a:defRPr sz="1400" b="0">
+                <a:solidFill>
+                  <a:srgbClr val="1B4D3E"/>
+                </a:solidFill>
+                <a:latin typeface="Arial"/>
+              </a:defRPr>
+            </a:pPr>
+            <a:r>
+              <a:t>928 lege waarden gevonden, en gezien wat ze met je percentage deden</a:t>
+            </a:r>
+          </a:p>
+          <a:p>
+            <a:pPr lvl="1">
+              <a:defRPr sz="1400" b="0">
+                <a:solidFill>
+                  <a:srgbClr val="000000"/>
+                </a:solidFill>
+                <a:latin typeface="Arial"/>
+              </a:defRPr>
+            </a:pPr>
+            <a:r>
+              <a:t>     → criterium Data verkenning</a:t>
+            </a:r>
+          </a:p>
+          <a:p>
+            <a:pPr lvl="1">
+              <a:defRPr sz="1400" b="0">
+                <a:solidFill>
+                  <a:srgbClr val="1B4D3E"/>
+                </a:solidFill>
+                <a:latin typeface="Arial"/>
+              </a:defRPr>
+            </a:pPr>
+            <a:r>
+              <a:t>diff en cumsum over het verloop van een stack</a:t>
+            </a:r>
+          </a:p>
+          <a:p>
+            <a:pPr lvl="1">
+              <a:defRPr sz="1400" b="0">
+                <a:solidFill>
+                  <a:srgbClr val="000000"/>
+                </a:solidFill>
+                <a:latin typeface="Arial"/>
+              </a:defRPr>
+            </a:pPr>
+            <a:r>
+              <a:t>     → criterium Vergelijken en annoteren</a:t>
+            </a:r>
+          </a:p>
+          <a:p>
+            <a:pPr>
+              <a:spcBef>
+                <a:spcPts val="1300"/>
+              </a:spcBef>
+              <a:defRPr sz="1700" b="1">
+                <a:solidFill>
+                  <a:srgbClr val="000000"/>
+                </a:solidFill>
+                <a:latin typeface="Arial"/>
+              </a:defRPr>
+            </a:pPr>
+            <a:r>
+              <a:t>Het verschil met de case: daar kiest niemand de dataset voor je,</a:t>
+            </a:r>
+          </a:p>
+          <a:p>
+            <a:pPr lvl="1">
+              <a:defRPr sz="1400" b="0">
+                <a:solidFill>
+                  <a:srgbClr val="505A64"/>
+                </a:solidFill>
+                <a:latin typeface="Arial"/>
+              </a:defRPr>
+            </a:pPr>
+            <a:r>
+              <a:t>en staat er geen kolom aan_zet klaar om je fout te laten zien.</a:t>
+            </a:r>
+          </a:p>
+        </p:txBody>
+      </p:sp>
+      <p:sp>
+        <p:nvSpPr>
+          <p:cNvPr id="4" name="TextBox 3"/>
+          <p:cNvSpPr txBox="1"/>
+          <p:nvPr/>
+        </p:nvSpPr>
+        <p:spPr>
+          <a:xfrm>
+            <a:off x="9774936" y="6126480"/>
+            <a:ext cx="630936" cy="365760"/>
+          </a:xfrm>
+          <a:prstGeom prst="rect">
+            <a:avLst/>
+          </a:prstGeom>
+          <a:noFill/>
+        </p:spPr>
+        <p:txBody>
+          <a:bodyPr wrap="none">
+            <a:spAutoFit/>
+          </a:bodyPr>
+          <a:lstStyle/>
+          <a:p>
+            <a:pPr>
+              <a:defRPr sz="1200">
+                <a:solidFill>
+                  <a:srgbClr val="505A64"/>
+                </a:solidFill>
+                <a:latin typeface="Arial"/>
+              </a:defRPr>
+            </a:pPr>
+            <a:r>
+              <a:t>35</a:t>
             </a:r>
           </a:p>
         </p:txBody>
